--- a/docs/design-simulator/设计态仿真器_负载引擎立项.pptx
+++ b/docs/design-simulator/设计态仿真器_负载引擎立项.pptx
@@ -508,12 +508,7 @@
           </a:p>
           <a:p>
             <a:r>
-              <a:t>①模型画像解决单作业内部的计算/通信/访存结构；②到达与请求分布解决多作业、多请求在时间上的叠加；③Trace 拟合与外推把真实生产数据变成可放大、可迁移的模型参数；④数据工厂把以上能力流水线化、资产化；⑤统一 IR 让同一份负载以不同保真度驱动已有仿真内核；⑥闭环校准用实测保证可信度。</a:t>
-            </a:r>
-          </a:p>
-          <a:p>
-            <a:r>
-              <a:t>KPI 为建议值，需结合现有实测平台规模与项目周期对齐。</a:t>
+              <a:t>①通过计算图展开刻画单作业内部的计算/通信/访存结构；②通过随机过程刻画多作业、多请求在时间上的叠加；③通过统计拟合把真实生产 Trace 变成可放大、可迁移的负载；④把以上能力流水线化、资产化，批量产出 DSE 输入；⑤统一 IR 让同一份负载以不同保真度驱动已有仿真内核；⑥仿真结果与实测对标，误差回灌，保证可信度。</a:t>
             </a:r>
           </a:p>
         </p:txBody>
@@ -3728,21 +3723,65 @@
                 <a:ea typeface="微软雅黑"/>
                 <a:cs typeface="微软雅黑"/>
               </a:rPr>
-              <a:t>底层 NPU / 内存存储 / 网络仿真能力已具备；本项目聚焦负载的画像、到达建模、Trace 拟合外推、数据工厂与统一导入，形成「真实负载 → 可外推负载 → 设计结论」闭环。</a:t>
-            </a:r>
-          </a:p>
-        </p:txBody>
-      </p:sp>
-      <p:sp>
-        <p:nvSpPr>
-          <p:cNvPr id="7" name="TextBox 6"/>
+              <a:t>底层 NPU / 内存存储 / 网络仿真已具备；本项目补齐负载的画像、生成与导入，形成「真实负载 → 可外推负载 → 设计结论」闭环。</a:t>
+            </a:r>
+          </a:p>
+        </p:txBody>
+      </p:sp>
+      <p:sp>
+        <p:nvSpPr>
+          <p:cNvPr id="7" name="Rectangle 6"/>
+          <p:cNvSpPr/>
+          <p:nvPr/>
+        </p:nvSpPr>
+        <p:spPr>
+          <a:xfrm>
+            <a:off x="329184" y="1097280"/>
+            <a:ext cx="896112" cy="420624"/>
+          </a:xfrm>
+          <a:prstGeom prst="rect">
+            <a:avLst/>
+          </a:prstGeom>
+          <a:solidFill>
+            <a:srgbClr val="1A5FA8"/>
+          </a:solidFill>
+          <a:ln>
+            <a:noFill/>
+          </a:ln>
+          <a:effectLst/>
+        </p:spPr>
+        <p:style>
+          <a:lnRef idx="1">
+            <a:schemeClr val="accent1"/>
+          </a:lnRef>
+          <a:fillRef idx="3">
+            <a:schemeClr val="accent1"/>
+          </a:fillRef>
+          <a:effectRef idx="2">
+            <a:schemeClr val="accent1"/>
+          </a:effectRef>
+          <a:fontRef idx="minor">
+            <a:schemeClr val="lt1"/>
+          </a:fontRef>
+        </p:style>
+        <p:txBody>
+          <a:bodyPr rtlCol="0" anchor="ctr"/>
+          <a:lstStyle/>
+          <a:p>
+            <a:pPr algn="ctr"/>
+          </a:p>
+        </p:txBody>
+      </p:sp>
+      <p:sp>
+        <p:nvSpPr>
+          <p:cNvPr id="8" name="TextBox 7"/>
           <p:cNvSpPr txBox="1"/>
           <p:nvPr/>
         </p:nvSpPr>
         <p:spPr>
           <a:xfrm>
-            <a:off x="329184" y="1143000"/>
-            <a:ext cx="1993392" cy="256032"/>
+            <a:off x="329184" y="1097280"/>
+            <a:ext cx="896112" cy="420624"/>
           </a:xfrm>
           <a:prstGeom prst="rect">
             <a:avLst/>
@@ -3750,10 +3789,10 @@
           <a:noFill/>
         </p:spPr>
         <p:txBody>
-          <a:bodyPr wrap="square" lIns="45720" rIns="45720" tIns="27432" bIns="27432" anchor="t"/>
-          <a:lstStyle/>
-          <a:p>
-            <a:pPr algn="l">
+          <a:bodyPr wrap="square" lIns="45720" rIns="45720" tIns="27432" bIns="27432" anchor="ctr"/>
+          <a:lstStyle/>
+          <a:p>
+            <a:pPr algn="ctr">
               <a:spcBef>
                 <a:spcPts val="0"/>
               </a:spcBef>
@@ -3762,33 +3801,33 @@
               </a:spcAft>
             </a:pPr>
             <a:r>
-              <a:rPr sz="1150" b="1" i="0">
-                <a:solidFill>
-                  <a:srgbClr val="123E6E"/>
+              <a:rPr sz="1050" b="1" i="0">
+                <a:solidFill>
+                  <a:srgbClr val="FFFFFF"/>
                 </a:solidFill>
                 <a:latin typeface="微软雅黑"/>
                 <a:ea typeface="微软雅黑"/>
                 <a:cs typeface="微软雅黑"/>
               </a:rPr>
-              <a:t>输入源</a:t>
-            </a:r>
-          </a:p>
-        </p:txBody>
-      </p:sp>
-      <p:sp>
-        <p:nvSpPr>
-          <p:cNvPr id="8" name="Rounded Rectangle 7"/>
+              <a:t>输入层</a:t>
+            </a:r>
+          </a:p>
+        </p:txBody>
+      </p:sp>
+      <p:sp>
+        <p:nvSpPr>
+          <p:cNvPr id="9" name="Rounded Rectangle 8"/>
           <p:cNvSpPr/>
           <p:nvPr/>
         </p:nvSpPr>
         <p:spPr>
           <a:xfrm>
-            <a:off x="329184" y="1435608"/>
-            <a:ext cx="1993392" cy="841248"/>
+            <a:off x="1298448" y="1097280"/>
+            <a:ext cx="2599182" cy="420624"/>
           </a:xfrm>
           <a:prstGeom prst="roundRect">
             <a:avLst>
-              <a:gd name="adj" fmla="val 5000"/>
+              <a:gd name="adj" fmla="val 12000"/>
             </a:avLst>
           </a:prstGeom>
           <a:solidFill>
@@ -3814,6 +3853,235 @@
           </a:fontRef>
         </p:style>
         <p:txBody>
+          <a:bodyPr rtlCol="0" anchor="ctr" wrap="square" lIns="27432" rIns="27432" tIns="9144" bIns="9144"/>
+          <a:lstStyle/>
+          <a:p>
+            <a:pPr algn="ctr"/>
+            <a:r>
+              <a:rPr sz="950" b="0" i="0">
+                <a:solidFill>
+                  <a:srgbClr val="1B2430"/>
+                </a:solidFill>
+                <a:latin typeface="微软雅黑"/>
+                <a:ea typeface="微软雅黑"/>
+                <a:cs typeface="微软雅黑"/>
+              </a:rPr>
+              <a:t>生产 Trace（msprof / HCCL / 服务日志）</a:t>
+            </a:r>
+          </a:p>
+        </p:txBody>
+      </p:sp>
+      <p:sp>
+        <p:nvSpPr>
+          <p:cNvPr id="10" name="Rounded Rectangle 9"/>
+          <p:cNvSpPr/>
+          <p:nvPr/>
+        </p:nvSpPr>
+        <p:spPr>
+          <a:xfrm>
+            <a:off x="3952494" y="1097280"/>
+            <a:ext cx="2599182" cy="420624"/>
+          </a:xfrm>
+          <a:prstGeom prst="roundRect">
+            <a:avLst>
+              <a:gd name="adj" fmla="val 12000"/>
+            </a:avLst>
+          </a:prstGeom>
+          <a:solidFill>
+            <a:srgbClr val="E3EEF8"/>
+          </a:solidFill>
+          <a:ln>
+            <a:noFill/>
+          </a:ln>
+          <a:effectLst/>
+        </p:spPr>
+        <p:style>
+          <a:lnRef idx="1">
+            <a:schemeClr val="accent1"/>
+          </a:lnRef>
+          <a:fillRef idx="3">
+            <a:schemeClr val="accent1"/>
+          </a:fillRef>
+          <a:effectRef idx="2">
+            <a:schemeClr val="accent1"/>
+          </a:effectRef>
+          <a:fontRef idx="minor">
+            <a:schemeClr val="lt1"/>
+          </a:fontRef>
+        </p:style>
+        <p:txBody>
+          <a:bodyPr rtlCol="0" anchor="ctr" wrap="square" lIns="27432" rIns="27432" tIns="9144" bIns="9144"/>
+          <a:lstStyle/>
+          <a:p>
+            <a:pPr algn="ctr"/>
+            <a:r>
+              <a:rPr sz="950" b="0" i="0">
+                <a:solidFill>
+                  <a:srgbClr val="1B2430"/>
+                </a:solidFill>
+                <a:latin typeface="微软雅黑"/>
+                <a:ea typeface="微软雅黑"/>
+                <a:cs typeface="微软雅黑"/>
+              </a:rPr>
+              <a:t>模型结构与并行配置</a:t>
+            </a:r>
+          </a:p>
+        </p:txBody>
+      </p:sp>
+      <p:sp>
+        <p:nvSpPr>
+          <p:cNvPr id="11" name="Rounded Rectangle 10"/>
+          <p:cNvSpPr/>
+          <p:nvPr/>
+        </p:nvSpPr>
+        <p:spPr>
+          <a:xfrm>
+            <a:off x="6606540" y="1097280"/>
+            <a:ext cx="2599182" cy="420624"/>
+          </a:xfrm>
+          <a:prstGeom prst="roundRect">
+            <a:avLst>
+              <a:gd name="adj" fmla="val 12000"/>
+            </a:avLst>
+          </a:prstGeom>
+          <a:solidFill>
+            <a:srgbClr val="E3EEF8"/>
+          </a:solidFill>
+          <a:ln>
+            <a:noFill/>
+          </a:ln>
+          <a:effectLst/>
+        </p:spPr>
+        <p:style>
+          <a:lnRef idx="1">
+            <a:schemeClr val="accent1"/>
+          </a:lnRef>
+          <a:fillRef idx="3">
+            <a:schemeClr val="accent1"/>
+          </a:fillRef>
+          <a:effectRef idx="2">
+            <a:schemeClr val="accent1"/>
+          </a:effectRef>
+          <a:fontRef idx="minor">
+            <a:schemeClr val="lt1"/>
+          </a:fontRef>
+        </p:style>
+        <p:txBody>
+          <a:bodyPr rtlCol="0" anchor="ctr" wrap="square" lIns="27432" rIns="27432" tIns="9144" bIns="9144"/>
+          <a:lstStyle/>
+          <a:p>
+            <a:pPr algn="ctr"/>
+            <a:r>
+              <a:rPr sz="950" b="0" i="0">
+                <a:solidFill>
+                  <a:srgbClr val="1B2430"/>
+                </a:solidFill>
+                <a:latin typeface="微软雅黑"/>
+                <a:ea typeface="微软雅黑"/>
+                <a:cs typeface="微软雅黑"/>
+              </a:rPr>
+              <a:t>业务流量预测与 SLO 分级</a:t>
+            </a:r>
+          </a:p>
+        </p:txBody>
+      </p:sp>
+      <p:sp>
+        <p:nvSpPr>
+          <p:cNvPr id="12" name="Rounded Rectangle 11"/>
+          <p:cNvSpPr/>
+          <p:nvPr/>
+        </p:nvSpPr>
+        <p:spPr>
+          <a:xfrm>
+            <a:off x="9260586" y="1097280"/>
+            <a:ext cx="2599182" cy="420624"/>
+          </a:xfrm>
+          <a:prstGeom prst="roundRect">
+            <a:avLst>
+              <a:gd name="adj" fmla="val 12000"/>
+            </a:avLst>
+          </a:prstGeom>
+          <a:solidFill>
+            <a:srgbClr val="E3EEF8"/>
+          </a:solidFill>
+          <a:ln>
+            <a:noFill/>
+          </a:ln>
+          <a:effectLst/>
+        </p:spPr>
+        <p:style>
+          <a:lnRef idx="1">
+            <a:schemeClr val="accent1"/>
+          </a:lnRef>
+          <a:fillRef idx="3">
+            <a:schemeClr val="accent1"/>
+          </a:fillRef>
+          <a:effectRef idx="2">
+            <a:schemeClr val="accent1"/>
+          </a:effectRef>
+          <a:fontRef idx="minor">
+            <a:schemeClr val="lt1"/>
+          </a:fontRef>
+        </p:style>
+        <p:txBody>
+          <a:bodyPr rtlCol="0" anchor="ctr" wrap="square" lIns="27432" rIns="27432" tIns="9144" bIns="9144"/>
+          <a:lstStyle/>
+          <a:p>
+            <a:pPr algn="ctr"/>
+            <a:r>
+              <a:rPr sz="950" b="0" i="0">
+                <a:solidFill>
+                  <a:srgbClr val="1B2430"/>
+                </a:solidFill>
+                <a:latin typeface="微软雅黑"/>
+                <a:ea typeface="微软雅黑"/>
+                <a:cs typeface="微软雅黑"/>
+              </a:rPr>
+              <a:t>未来模型与集群规模假设</a:t>
+            </a:r>
+          </a:p>
+        </p:txBody>
+      </p:sp>
+      <p:sp>
+        <p:nvSpPr>
+          <p:cNvPr id="13" name="Down Arrow 12"/>
+          <p:cNvSpPr/>
+          <p:nvPr/>
+        </p:nvSpPr>
+        <p:spPr>
+          <a:xfrm>
+            <a:off x="6432804" y="1545336"/>
+            <a:ext cx="292608" cy="128016"/>
+          </a:xfrm>
+          <a:prstGeom prst="downArrow">
+            <a:avLst>
+              <a:gd name="adj1" fmla="val 50000"/>
+              <a:gd name="adj2" fmla="val 50000"/>
+            </a:avLst>
+          </a:prstGeom>
+          <a:solidFill>
+            <a:srgbClr val="7A8896"/>
+          </a:solidFill>
+          <a:ln>
+            <a:noFill/>
+          </a:ln>
+          <a:effectLst/>
+        </p:spPr>
+        <p:style>
+          <a:lnRef idx="1">
+            <a:schemeClr val="accent1"/>
+          </a:lnRef>
+          <a:fillRef idx="3">
+            <a:schemeClr val="accent1"/>
+          </a:fillRef>
+          <a:effectRef idx="2">
+            <a:schemeClr val="accent1"/>
+          </a:effectRef>
+          <a:fontRef idx="minor">
+            <a:schemeClr val="lt1"/>
+          </a:fontRef>
+        </p:style>
+        <p:txBody>
           <a:bodyPr rtlCol="0" anchor="ctr"/>
           <a:lstStyle/>
           <a:p>
@@ -3823,14 +4091,58 @@
       </p:sp>
       <p:sp>
         <p:nvSpPr>
-          <p:cNvPr id="9" name="TextBox 8"/>
+          <p:cNvPr id="14" name="Rectangle 13"/>
+          <p:cNvSpPr/>
+          <p:nvPr/>
+        </p:nvSpPr>
+        <p:spPr>
+          <a:xfrm>
+            <a:off x="329184" y="1700784"/>
+            <a:ext cx="896112" cy="3456432"/>
+          </a:xfrm>
+          <a:prstGeom prst="rect">
+            <a:avLst/>
+          </a:prstGeom>
+          <a:solidFill>
+            <a:srgbClr val="C45A10"/>
+          </a:solidFill>
+          <a:ln>
+            <a:noFill/>
+          </a:ln>
+          <a:effectLst/>
+        </p:spPr>
+        <p:style>
+          <a:lnRef idx="1">
+            <a:schemeClr val="accent1"/>
+          </a:lnRef>
+          <a:fillRef idx="3">
+            <a:schemeClr val="accent1"/>
+          </a:fillRef>
+          <a:effectRef idx="2">
+            <a:schemeClr val="accent1"/>
+          </a:effectRef>
+          <a:fontRef idx="minor">
+            <a:schemeClr val="lt1"/>
+          </a:fontRef>
+        </p:style>
+        <p:txBody>
+          <a:bodyPr rtlCol="0" anchor="ctr"/>
+          <a:lstStyle/>
+          <a:p>
+            <a:pPr algn="ctr"/>
+          </a:p>
+        </p:txBody>
+      </p:sp>
+      <p:sp>
+        <p:nvSpPr>
+          <p:cNvPr id="15" name="TextBox 14"/>
           <p:cNvSpPr txBox="1"/>
           <p:nvPr/>
         </p:nvSpPr>
         <p:spPr>
           <a:xfrm>
-            <a:off x="374904" y="1472184"/>
-            <a:ext cx="1920240" cy="786384"/>
+            <a:off x="329184" y="1700784"/>
+            <a:ext cx="896112" cy="3456432"/>
           </a:xfrm>
           <a:prstGeom prst="rect">
             <a:avLst/>
@@ -3838,10 +4150,10 @@
           <a:noFill/>
         </p:spPr>
         <p:txBody>
-          <a:bodyPr wrap="square" lIns="45720" rIns="45720" tIns="27432" bIns="27432" anchor="t"/>
-          <a:lstStyle/>
-          <a:p>
-            <a:pPr algn="l">
+          <a:bodyPr wrap="square" lIns="45720" rIns="45720" tIns="27432" bIns="27432" anchor="ctr"/>
+          <a:lstStyle/>
+          <a:p>
+            <a:pPr algn="ctr">
               <a:spcBef>
                 <a:spcPts val="0"/>
               </a:spcBef>
@@ -3850,19 +4162,19 @@
               </a:spcAft>
             </a:pPr>
             <a:r>
-              <a:rPr sz="1000" b="1" i="0">
-                <a:solidFill>
-                  <a:srgbClr val="123E6E"/>
+              <a:rPr sz="1050" b="1" i="0">
+                <a:solidFill>
+                  <a:srgbClr val="FFFFFF"/>
                 </a:solidFill>
                 <a:latin typeface="微软雅黑"/>
                 <a:ea typeface="微软雅黑"/>
                 <a:cs typeface="微软雅黑"/>
               </a:rPr>
-              <a:t>生产 Trace</a:t>
-            </a:r>
-          </a:p>
-          <a:p>
-            <a:pPr algn="l">
+              <a:t>负载引擎</a:t>
+            </a:r>
+          </a:p>
+          <a:p>
+            <a:pPr algn="ctr">
               <a:spcBef>
                 <a:spcPts val="0"/>
               </a:spcBef>
@@ -3871,506 +4183,33 @@
               </a:spcAft>
             </a:pPr>
             <a:r>
-              <a:rPr sz="880" b="0" i="0">
-                <a:solidFill>
-                  <a:srgbClr val="1B2430"/>
+              <a:rPr sz="800" b="0" i="0">
+                <a:solidFill>
+                  <a:srgbClr val="FFFFFF"/>
                 </a:solidFill>
                 <a:latin typeface="微软雅黑"/>
                 <a:ea typeface="微软雅黑"/>
                 <a:cs typeface="微软雅黑"/>
               </a:rPr>
-              <a:t>训练 Profiling（msprof/Kineto）、HCCL 通信日志、推理服务请求日志、集群遥测</a:t>
-            </a:r>
-          </a:p>
-        </p:txBody>
-      </p:sp>
-      <p:sp>
-        <p:nvSpPr>
-          <p:cNvPr id="10" name="Rounded Rectangle 9"/>
+              <a:t>本项目核心</a:t>
+            </a:r>
+          </a:p>
+        </p:txBody>
+      </p:sp>
+      <p:sp>
+        <p:nvSpPr>
+          <p:cNvPr id="16" name="Rounded Rectangle 15"/>
           <p:cNvSpPr/>
           <p:nvPr/>
         </p:nvSpPr>
         <p:spPr>
           <a:xfrm>
-            <a:off x="329184" y="2350008"/>
-            <a:ext cx="1993392" cy="841248"/>
+            <a:off x="1298448" y="1700784"/>
+            <a:ext cx="10561320" cy="3456432"/>
           </a:xfrm>
           <a:prstGeom prst="roundRect">
             <a:avLst>
-              <a:gd name="adj" fmla="val 5000"/>
-            </a:avLst>
-          </a:prstGeom>
-          <a:solidFill>
-            <a:srgbClr val="E3EEF8"/>
-          </a:solidFill>
-          <a:ln>
-            <a:noFill/>
-          </a:ln>
-          <a:effectLst/>
-        </p:spPr>
-        <p:style>
-          <a:lnRef idx="1">
-            <a:schemeClr val="accent1"/>
-          </a:lnRef>
-          <a:fillRef idx="3">
-            <a:schemeClr val="accent1"/>
-          </a:fillRef>
-          <a:effectRef idx="2">
-            <a:schemeClr val="accent1"/>
-          </a:effectRef>
-          <a:fontRef idx="minor">
-            <a:schemeClr val="lt1"/>
-          </a:fontRef>
-        </p:style>
-        <p:txBody>
-          <a:bodyPr rtlCol="0" anchor="ctr"/>
-          <a:lstStyle/>
-          <a:p>
-            <a:pPr algn="ctr"/>
-          </a:p>
-        </p:txBody>
-      </p:sp>
-      <p:sp>
-        <p:nvSpPr>
-          <p:cNvPr id="11" name="TextBox 10"/>
-          <p:cNvSpPr txBox="1"/>
-          <p:nvPr/>
-        </p:nvSpPr>
-        <p:spPr>
-          <a:xfrm>
-            <a:off x="374904" y="2386584"/>
-            <a:ext cx="1920240" cy="786384"/>
-          </a:xfrm>
-          <a:prstGeom prst="rect">
-            <a:avLst/>
-          </a:prstGeom>
-          <a:noFill/>
-        </p:spPr>
-        <p:txBody>
-          <a:bodyPr wrap="square" lIns="45720" rIns="45720" tIns="27432" bIns="27432" anchor="t"/>
-          <a:lstStyle/>
-          <a:p>
-            <a:pPr algn="l">
-              <a:spcBef>
-                <a:spcPts val="0"/>
-              </a:spcBef>
-              <a:spcAft>
-                <a:spcPts val="250"/>
-              </a:spcAft>
-            </a:pPr>
-            <a:r>
-              <a:rPr sz="1000" b="1" i="0">
-                <a:solidFill>
-                  <a:srgbClr val="123E6E"/>
-                </a:solidFill>
-                <a:latin typeface="微软雅黑"/>
-                <a:ea typeface="微软雅黑"/>
-                <a:cs typeface="微软雅黑"/>
-              </a:rPr>
-              <a:t>模型与并行配置</a:t>
-            </a:r>
-          </a:p>
-          <a:p>
-            <a:pPr algn="l">
-              <a:spcBef>
-                <a:spcPts val="0"/>
-              </a:spcBef>
-              <a:spcAft>
-                <a:spcPts val="250"/>
-              </a:spcAft>
-            </a:pPr>
-            <a:r>
-              <a:rPr sz="880" b="0" i="0">
-                <a:solidFill>
-                  <a:srgbClr val="1B2430"/>
-                </a:solidFill>
-                <a:latin typeface="微软雅黑"/>
-                <a:ea typeface="微软雅黑"/>
-                <a:cs typeface="微软雅黑"/>
-              </a:rPr>
-              <a:t>模型结构定义、并行策略、目标模型假设（如 10T MoE、百万上下文）</a:t>
-            </a:r>
-          </a:p>
-        </p:txBody>
-      </p:sp>
-      <p:sp>
-        <p:nvSpPr>
-          <p:cNvPr id="12" name="Rounded Rectangle 11"/>
-          <p:cNvSpPr/>
-          <p:nvPr/>
-        </p:nvSpPr>
-        <p:spPr>
-          <a:xfrm>
-            <a:off x="329184" y="3264408"/>
-            <a:ext cx="1993392" cy="841248"/>
-          </a:xfrm>
-          <a:prstGeom prst="roundRect">
-            <a:avLst>
-              <a:gd name="adj" fmla="val 5000"/>
-            </a:avLst>
-          </a:prstGeom>
-          <a:solidFill>
-            <a:srgbClr val="E3EEF8"/>
-          </a:solidFill>
-          <a:ln>
-            <a:noFill/>
-          </a:ln>
-          <a:effectLst/>
-        </p:spPr>
-        <p:style>
-          <a:lnRef idx="1">
-            <a:schemeClr val="accent1"/>
-          </a:lnRef>
-          <a:fillRef idx="3">
-            <a:schemeClr val="accent1"/>
-          </a:fillRef>
-          <a:effectRef idx="2">
-            <a:schemeClr val="accent1"/>
-          </a:effectRef>
-          <a:fontRef idx="minor">
-            <a:schemeClr val="lt1"/>
-          </a:fontRef>
-        </p:style>
-        <p:txBody>
-          <a:bodyPr rtlCol="0" anchor="ctr"/>
-          <a:lstStyle/>
-          <a:p>
-            <a:pPr algn="ctr"/>
-          </a:p>
-        </p:txBody>
-      </p:sp>
-      <p:sp>
-        <p:nvSpPr>
-          <p:cNvPr id="13" name="TextBox 12"/>
-          <p:cNvSpPr txBox="1"/>
-          <p:nvPr/>
-        </p:nvSpPr>
-        <p:spPr>
-          <a:xfrm>
-            <a:off x="374904" y="3300984"/>
-            <a:ext cx="1920240" cy="786384"/>
-          </a:xfrm>
-          <a:prstGeom prst="rect">
-            <a:avLst/>
-          </a:prstGeom>
-          <a:noFill/>
-        </p:spPr>
-        <p:txBody>
-          <a:bodyPr wrap="square" lIns="45720" rIns="45720" tIns="27432" bIns="27432" anchor="t"/>
-          <a:lstStyle/>
-          <a:p>
-            <a:pPr algn="l">
-              <a:spcBef>
-                <a:spcPts val="0"/>
-              </a:spcBef>
-              <a:spcAft>
-                <a:spcPts val="250"/>
-              </a:spcAft>
-            </a:pPr>
-            <a:r>
-              <a:rPr sz="1000" b="1" i="0">
-                <a:solidFill>
-                  <a:srgbClr val="123E6E"/>
-                </a:solidFill>
-                <a:latin typeface="微软雅黑"/>
-                <a:ea typeface="微软雅黑"/>
-                <a:cs typeface="微软雅黑"/>
-              </a:rPr>
-              <a:t>业务规划</a:t>
-            </a:r>
-          </a:p>
-          <a:p>
-            <a:pPr algn="l">
-              <a:spcBef>
-                <a:spcPts val="0"/>
-              </a:spcBef>
-              <a:spcAft>
-                <a:spcPts val="250"/>
-              </a:spcAft>
-            </a:pPr>
-            <a:r>
-              <a:rPr sz="880" b="0" i="0">
-                <a:solidFill>
-                  <a:srgbClr val="1B2430"/>
-                </a:solidFill>
-                <a:latin typeface="微软雅黑"/>
-                <a:ea typeface="微软雅黑"/>
-                <a:cs typeface="微软雅黑"/>
-              </a:rPr>
-              <a:t>流量预测、SLO 等级、租户结构、训推混部比例</a:t>
-            </a:r>
-          </a:p>
-        </p:txBody>
-      </p:sp>
-      <p:sp>
-        <p:nvSpPr>
-          <p:cNvPr id="14" name="Rounded Rectangle 13"/>
-          <p:cNvSpPr/>
-          <p:nvPr/>
-        </p:nvSpPr>
-        <p:spPr>
-          <a:xfrm>
-            <a:off x="329184" y="4215384"/>
-            <a:ext cx="1993392" cy="1655064"/>
-          </a:xfrm>
-          <a:prstGeom prst="roundRect">
-            <a:avLst>
-              <a:gd name="adj" fmla="val 5000"/>
-            </a:avLst>
-          </a:prstGeom>
-          <a:solidFill>
-            <a:srgbClr val="FFFFFF"/>
-          </a:solidFill>
-          <a:ln w="12700">
-            <a:solidFill>
-              <a:srgbClr val="1A5FA8"/>
-            </a:solidFill>
-          </a:ln>
-          <a:effectLst/>
-        </p:spPr>
-        <p:style>
-          <a:lnRef idx="1">
-            <a:schemeClr val="accent1"/>
-          </a:lnRef>
-          <a:fillRef idx="3">
-            <a:schemeClr val="accent1"/>
-          </a:fillRef>
-          <a:effectRef idx="2">
-            <a:schemeClr val="accent1"/>
-          </a:effectRef>
-          <a:fontRef idx="minor">
-            <a:schemeClr val="lt1"/>
-          </a:fontRef>
-        </p:style>
-        <p:txBody>
-          <a:bodyPr rtlCol="0" anchor="ctr"/>
-          <a:lstStyle/>
-          <a:p>
-            <a:pPr algn="ctr"/>
-          </a:p>
-        </p:txBody>
-      </p:sp>
-      <p:sp>
-        <p:nvSpPr>
-          <p:cNvPr id="15" name="TextBox 14"/>
-          <p:cNvSpPr txBox="1"/>
-          <p:nvPr/>
-        </p:nvSpPr>
-        <p:spPr>
-          <a:xfrm>
-            <a:off x="384048" y="4251960"/>
-            <a:ext cx="1901952" cy="1600200"/>
-          </a:xfrm>
-          <a:prstGeom prst="rect">
-            <a:avLst/>
-          </a:prstGeom>
-          <a:noFill/>
-        </p:spPr>
-        <p:txBody>
-          <a:bodyPr wrap="square" lIns="45720" rIns="45720" tIns="27432" bIns="27432" anchor="t"/>
-          <a:lstStyle/>
-          <a:p>
-            <a:pPr algn="l">
-              <a:spcBef>
-                <a:spcPts val="0"/>
-              </a:spcBef>
-              <a:spcAft>
-                <a:spcPts val="250"/>
-              </a:spcAft>
-            </a:pPr>
-            <a:r>
-              <a:rPr sz="1000" b="1" i="0">
-                <a:solidFill>
-                  <a:srgbClr val="123E6E"/>
-                </a:solidFill>
-                <a:latin typeface="微软雅黑"/>
-                <a:ea typeface="微软雅黑"/>
-                <a:cs typeface="微软雅黑"/>
-              </a:rPr>
-              <a:t>设计态 ≠ 在线工具</a:t>
-            </a:r>
-          </a:p>
-          <a:p>
-            <a:pPr algn="l">
-              <a:spcBef>
-                <a:spcPts val="0"/>
-              </a:spcBef>
-              <a:spcAft>
-                <a:spcPts val="250"/>
-              </a:spcAft>
-            </a:pPr>
-            <a:r>
-              <a:rPr sz="880" b="1" i="0">
-                <a:solidFill>
-                  <a:srgbClr val="1A5FA8"/>
-                </a:solidFill>
-                <a:latin typeface="微软雅黑"/>
-                <a:ea typeface="微软雅黑"/>
-                <a:cs typeface="微软雅黑"/>
-              </a:rPr>
-              <a:t>▪ </a:t>
-            </a:r>
-            <a:r>
-              <a:rPr sz="880" b="0" i="0">
-                <a:solidFill>
-                  <a:srgbClr val="1B2430"/>
-                </a:solidFill>
-                <a:latin typeface="微软雅黑"/>
-                <a:ea typeface="微软雅黑"/>
-                <a:cs typeface="微软雅黑"/>
-              </a:rPr>
-              <a:t>无实时约束：以时间换精度，可做包级细粒度仿真</a:t>
-            </a:r>
-          </a:p>
-          <a:p>
-            <a:pPr algn="l">
-              <a:spcBef>
-                <a:spcPts val="0"/>
-              </a:spcBef>
-              <a:spcAft>
-                <a:spcPts val="250"/>
-              </a:spcAft>
-            </a:pPr>
-            <a:r>
-              <a:rPr sz="880" b="1" i="0">
-                <a:solidFill>
-                  <a:srgbClr val="1A5FA8"/>
-                </a:solidFill>
-                <a:latin typeface="微软雅黑"/>
-                <a:ea typeface="微软雅黑"/>
-                <a:cs typeface="微软雅黑"/>
-              </a:rPr>
-              <a:t>▪ </a:t>
-            </a:r>
-            <a:r>
-              <a:rPr sz="880" b="0" i="0">
-                <a:solidFill>
-                  <a:srgbClr val="1B2430"/>
-                </a:solidFill>
-                <a:latin typeface="微软雅黑"/>
-                <a:ea typeface="微软雅黑"/>
-                <a:cs typeface="微软雅黑"/>
-              </a:rPr>
-              <a:t>目标系统与模型往往尚不存在：负载必须</a:t>
-            </a:r>
-            <a:r>
-              <a:rPr sz="880" b="1" i="0">
-                <a:solidFill>
-                  <a:srgbClr val="C45A10"/>
-                </a:solidFill>
-                <a:latin typeface="微软雅黑"/>
-                <a:ea typeface="微软雅黑"/>
-                <a:cs typeface="微软雅黑"/>
-              </a:rPr>
-              <a:t>可参数化、可外推</a:t>
-            </a:r>
-            <a:r>
-              <a:rPr sz="880" b="0" i="0">
-                <a:solidFill>
-                  <a:srgbClr val="1B2430"/>
-                </a:solidFill>
-                <a:latin typeface="微软雅黑"/>
-                <a:ea typeface="微软雅黑"/>
-                <a:cs typeface="微软雅黑"/>
-              </a:rPr>
-              <a:t>，不能只靠回放</a:t>
-            </a:r>
-          </a:p>
-          <a:p>
-            <a:pPr algn="l">
-              <a:spcBef>
-                <a:spcPts val="0"/>
-              </a:spcBef>
-              <a:spcAft>
-                <a:spcPts val="250"/>
-              </a:spcAft>
-            </a:pPr>
-            <a:r>
-              <a:rPr sz="880" b="1" i="0">
-                <a:solidFill>
-                  <a:srgbClr val="1A5FA8"/>
-                </a:solidFill>
-                <a:latin typeface="微软雅黑"/>
-                <a:ea typeface="微软雅黑"/>
-                <a:cs typeface="微软雅黑"/>
-              </a:rPr>
-              <a:t>▪ </a:t>
-            </a:r>
-            <a:r>
-              <a:rPr sz="880" b="0" i="0">
-                <a:solidFill>
-                  <a:srgbClr val="1B2430"/>
-                </a:solidFill>
-                <a:latin typeface="微软雅黑"/>
-                <a:ea typeface="微软雅黑"/>
-                <a:cs typeface="微软雅黑"/>
-              </a:rPr>
-              <a:t>服务于设计空间探索（DSE）：需批量扫描上千种配置</a:t>
-            </a:r>
-          </a:p>
-        </p:txBody>
-      </p:sp>
-      <p:sp>
-        <p:nvSpPr>
-          <p:cNvPr id="16" name="Right Arrow 15"/>
-          <p:cNvSpPr/>
-          <p:nvPr/>
-        </p:nvSpPr>
-        <p:spPr>
-          <a:xfrm>
-            <a:off x="2359152" y="3246120"/>
-            <a:ext cx="219456" cy="384048"/>
-          </a:xfrm>
-          <a:prstGeom prst="rightArrow">
-            <a:avLst>
-              <a:gd name="adj1" fmla="val 50000"/>
-              <a:gd name="adj2" fmla="val 50000"/>
-            </a:avLst>
-          </a:prstGeom>
-          <a:solidFill>
-            <a:srgbClr val="C45A10"/>
-          </a:solidFill>
-          <a:ln>
-            <a:noFill/>
-          </a:ln>
-          <a:effectLst/>
-        </p:spPr>
-        <p:style>
-          <a:lnRef idx="1">
-            <a:schemeClr val="accent1"/>
-          </a:lnRef>
-          <a:fillRef idx="3">
-            <a:schemeClr val="accent1"/>
-          </a:fillRef>
-          <a:effectRef idx="2">
-            <a:schemeClr val="accent1"/>
-          </a:effectRef>
-          <a:fontRef idx="minor">
-            <a:schemeClr val="lt1"/>
-          </a:fontRef>
-        </p:style>
-        <p:txBody>
-          <a:bodyPr rtlCol="0" anchor="ctr"/>
-          <a:lstStyle/>
-          <a:p>
-            <a:pPr algn="ctr"/>
-          </a:p>
-        </p:txBody>
-      </p:sp>
-      <p:sp>
-        <p:nvSpPr>
-          <p:cNvPr id="17" name="Rounded Rectangle 16"/>
-          <p:cNvSpPr/>
-          <p:nvPr/>
-        </p:nvSpPr>
-        <p:spPr>
-          <a:xfrm>
-            <a:off x="2615184" y="1143000"/>
-            <a:ext cx="6510528" cy="4727448"/>
-          </a:xfrm>
-          <a:prstGeom prst="roundRect">
-            <a:avLst>
-              <a:gd name="adj" fmla="val 2500"/>
+              <a:gd name="adj" fmla="val 2000"/>
             </a:avLst>
           </a:prstGeom>
           <a:solidFill>
@@ -4407,71 +4246,18 @@
       </p:sp>
       <p:sp>
         <p:nvSpPr>
-          <p:cNvPr id="18" name="TextBox 17"/>
-          <p:cNvSpPr txBox="1"/>
-          <p:nvPr/>
-        </p:nvSpPr>
-        <p:spPr>
-          <a:xfrm>
-            <a:off x="2706624" y="1170432"/>
-            <a:ext cx="6327648" cy="292608"/>
-          </a:xfrm>
-          <a:prstGeom prst="rect">
-            <a:avLst/>
-          </a:prstGeom>
-          <a:noFill/>
-        </p:spPr>
-        <p:txBody>
-          <a:bodyPr wrap="square" lIns="45720" rIns="45720" tIns="27432" bIns="27432" anchor="ctr"/>
-          <a:lstStyle/>
-          <a:p>
-            <a:pPr algn="l">
-              <a:spcBef>
-                <a:spcPts val="0"/>
-              </a:spcBef>
-              <a:spcAft>
-                <a:spcPts val="250"/>
-              </a:spcAft>
-            </a:pPr>
-            <a:r>
-              <a:rPr sz="1300" b="1" i="0">
-                <a:solidFill>
-                  <a:srgbClr val="C45A10"/>
-                </a:solidFill>
-                <a:latin typeface="微软雅黑"/>
-                <a:ea typeface="微软雅黑"/>
-                <a:cs typeface="微软雅黑"/>
-              </a:rPr>
-              <a:t>负载引擎 Workload Engine</a:t>
-            </a:r>
-            <a:r>
-              <a:rPr sz="950" b="0" i="0">
-                <a:solidFill>
-                  <a:srgbClr val="5C6B7A"/>
-                </a:solidFill>
-                <a:latin typeface="微软雅黑"/>
-                <a:ea typeface="微软雅黑"/>
-                <a:cs typeface="微软雅黑"/>
-              </a:rPr>
-              <a:t>   本项目核心：让负载可度量、可生成、可校准</a:t>
-            </a:r>
-          </a:p>
-        </p:txBody>
-      </p:sp>
-      <p:sp>
-        <p:nvSpPr>
-          <p:cNvPr id="19" name="Rounded Rectangle 18"/>
+          <p:cNvPr id="17" name="Rounded Rectangle 16"/>
           <p:cNvSpPr/>
           <p:nvPr/>
         </p:nvSpPr>
         <p:spPr>
           <a:xfrm>
-            <a:off x="2706624" y="1508760"/>
-            <a:ext cx="2060448" cy="1828800"/>
+            <a:off x="1371600" y="1773936"/>
+            <a:ext cx="2855976" cy="1664208"/>
           </a:xfrm>
           <a:prstGeom prst="roundRect">
             <a:avLst>
-              <a:gd name="adj" fmla="val 5000"/>
+              <a:gd name="adj" fmla="val 4000"/>
             </a:avLst>
           </a:prstGeom>
           <a:solidFill>
@@ -4508,60 +4294,14 @@
       </p:sp>
       <p:sp>
         <p:nvSpPr>
-          <p:cNvPr id="20" name="Rounded Rectangle 19"/>
-          <p:cNvSpPr/>
-          <p:nvPr/>
-        </p:nvSpPr>
-        <p:spPr>
-          <a:xfrm>
-            <a:off x="2706624" y="1508760"/>
-            <a:ext cx="2060448" cy="329184"/>
-          </a:xfrm>
-          <a:prstGeom prst="roundRect">
-            <a:avLst>
-              <a:gd name="adj" fmla="val 20000"/>
-            </a:avLst>
-          </a:prstGeom>
-          <a:solidFill>
-            <a:srgbClr val="FBE3CF"/>
-          </a:solidFill>
-          <a:ln>
-            <a:noFill/>
-          </a:ln>
-          <a:effectLst/>
-        </p:spPr>
-        <p:style>
-          <a:lnRef idx="1">
-            <a:schemeClr val="accent1"/>
-          </a:lnRef>
-          <a:fillRef idx="3">
-            <a:schemeClr val="accent1"/>
-          </a:fillRef>
-          <a:effectRef idx="2">
-            <a:schemeClr val="accent1"/>
-          </a:effectRef>
-          <a:fontRef idx="minor">
-            <a:schemeClr val="lt1"/>
-          </a:fontRef>
-        </p:style>
-        <p:txBody>
-          <a:bodyPr rtlCol="0" anchor="ctr"/>
-          <a:lstStyle/>
-          <a:p>
-            <a:pPr algn="ctr"/>
-          </a:p>
-        </p:txBody>
-      </p:sp>
-      <p:sp>
-        <p:nvSpPr>
-          <p:cNvPr id="21" name="TextBox 20"/>
+          <p:cNvPr id="18" name="TextBox 17"/>
           <p:cNvSpPr txBox="1"/>
           <p:nvPr/>
         </p:nvSpPr>
         <p:spPr>
           <a:xfrm>
-            <a:off x="2761488" y="1527048"/>
-            <a:ext cx="1969008" cy="292608"/>
+            <a:off x="1417320" y="1792224"/>
+            <a:ext cx="2764536" cy="274320"/>
           </a:xfrm>
           <a:prstGeom prst="rect">
             <a:avLst/>
@@ -4572,7 +4312,7 @@
           <a:bodyPr wrap="square" lIns="45720" rIns="45720" tIns="27432" bIns="27432" anchor="ctr"/>
           <a:lstStyle/>
           <a:p>
-            <a:pPr algn="l">
+            <a:pPr algn="ctr">
               <a:spcBef>
                 <a:spcPts val="0"/>
               </a:spcBef>
@@ -4581,7 +4321,7 @@
               </a:spcAft>
             </a:pPr>
             <a:r>
-              <a:rPr sz="1150" b="1" i="0">
+              <a:rPr sz="1000" b="1" i="0">
                 <a:solidFill>
                   <a:srgbClr val="C45A10"/>
                 </a:solidFill>
@@ -4589,10 +4329,58 @@
                 <a:ea typeface="微软雅黑"/>
                 <a:cs typeface="微软雅黑"/>
               </a:rPr>
-              <a:t>① </a:t>
-            </a:r>
-            <a:r>
-              <a:rPr sz="1150" b="1" i="0">
+              <a:t>① 基于计算图展开的模型负载画像</a:t>
+            </a:r>
+          </a:p>
+        </p:txBody>
+      </p:sp>
+      <p:sp>
+        <p:nvSpPr>
+          <p:cNvPr id="19" name="Rounded Rectangle 18"/>
+          <p:cNvSpPr/>
+          <p:nvPr/>
+        </p:nvSpPr>
+        <p:spPr>
+          <a:xfrm>
+            <a:off x="1435608" y="2066544"/>
+            <a:ext cx="1336548" cy="399288"/>
+          </a:xfrm>
+          <a:prstGeom prst="roundRect">
+            <a:avLst>
+              <a:gd name="adj" fmla="val 12000"/>
+            </a:avLst>
+          </a:prstGeom>
+          <a:solidFill>
+            <a:srgbClr val="FDF3EA"/>
+          </a:solidFill>
+          <a:ln w="9525">
+            <a:solidFill>
+              <a:srgbClr val="FBE3CF"/>
+            </a:solidFill>
+          </a:ln>
+          <a:effectLst/>
+        </p:spPr>
+        <p:style>
+          <a:lnRef idx="1">
+            <a:schemeClr val="accent1"/>
+          </a:lnRef>
+          <a:fillRef idx="3">
+            <a:schemeClr val="accent1"/>
+          </a:fillRef>
+          <a:effectRef idx="2">
+            <a:schemeClr val="accent1"/>
+          </a:effectRef>
+          <a:fontRef idx="minor">
+            <a:schemeClr val="lt1"/>
+          </a:fontRef>
+        </p:style>
+        <p:txBody>
+          <a:bodyPr rtlCol="0" anchor="ctr" wrap="square" lIns="27432" rIns="27432" tIns="9144" bIns="9144"/>
+          <a:lstStyle/>
+          <a:p>
+            <a:pPr algn="ctr"/>
+            <a:r>
+              <a:rPr sz="880" b="0" i="0">
                 <a:solidFill>
                   <a:srgbClr val="1B2430"/>
                 </a:solidFill>
@@ -4600,63 +4388,176 @@
                 <a:ea typeface="微软雅黑"/>
                 <a:cs typeface="微软雅黑"/>
               </a:rPr>
-              <a:t>模型画像</a:t>
-            </a:r>
-            <a:r>
-              <a:rPr sz="800" b="0" i="0">
-                <a:solidFill>
-                  <a:srgbClr val="5C6B7A"/>
+              <a:t>框架计算图抽取</a:t>
+            </a:r>
+          </a:p>
+        </p:txBody>
+      </p:sp>
+      <p:sp>
+        <p:nvSpPr>
+          <p:cNvPr id="20" name="Rounded Rectangle 19"/>
+          <p:cNvSpPr/>
+          <p:nvPr/>
+        </p:nvSpPr>
+        <p:spPr>
+          <a:xfrm>
+            <a:off x="2827020" y="2066544"/>
+            <a:ext cx="1336548" cy="399288"/>
+          </a:xfrm>
+          <a:prstGeom prst="roundRect">
+            <a:avLst>
+              <a:gd name="adj" fmla="val 12000"/>
+            </a:avLst>
+          </a:prstGeom>
+          <a:solidFill>
+            <a:srgbClr val="FDF3EA"/>
+          </a:solidFill>
+          <a:ln w="9525">
+            <a:solidFill>
+              <a:srgbClr val="FBE3CF"/>
+            </a:solidFill>
+          </a:ln>
+          <a:effectLst/>
+        </p:spPr>
+        <p:style>
+          <a:lnRef idx="1">
+            <a:schemeClr val="accent1"/>
+          </a:lnRef>
+          <a:fillRef idx="3">
+            <a:schemeClr val="accent1"/>
+          </a:fillRef>
+          <a:effectRef idx="2">
+            <a:schemeClr val="accent1"/>
+          </a:effectRef>
+          <a:fontRef idx="minor">
+            <a:schemeClr val="lt1"/>
+          </a:fontRef>
+        </p:style>
+        <p:txBody>
+          <a:bodyPr rtlCol="0" anchor="ctr" wrap="square" lIns="27432" rIns="27432" tIns="9144" bIns="9144"/>
+          <a:lstStyle/>
+          <a:p>
+            <a:pPr algn="ctr"/>
+            <a:r>
+              <a:rPr sz="880" b="0" i="0">
+                <a:solidFill>
+                  <a:srgbClr val="1B2430"/>
                 </a:solidFill>
                 <a:latin typeface="微软雅黑"/>
                 <a:ea typeface="微软雅黑"/>
                 <a:cs typeface="微软雅黑"/>
               </a:rPr>
-              <a:t/>
-            </a:r>
-          </a:p>
-        </p:txBody>
-      </p:sp>
-      <p:sp>
-        <p:nvSpPr>
-          <p:cNvPr id="22" name="TextBox 21"/>
-          <p:cNvSpPr txBox="1"/>
+              <a:t>并行策略符号化展开</a:t>
+            </a:r>
+          </a:p>
+        </p:txBody>
+      </p:sp>
+      <p:sp>
+        <p:nvSpPr>
+          <p:cNvPr id="21" name="Rounded Rectangle 20"/>
+          <p:cNvSpPr/>
           <p:nvPr/>
         </p:nvSpPr>
         <p:spPr>
           <a:xfrm>
-            <a:off x="2761488" y="1892808"/>
-            <a:ext cx="1969008" cy="1408176"/>
-          </a:xfrm>
-          <a:prstGeom prst="rect">
-            <a:avLst/>
-          </a:prstGeom>
-          <a:noFill/>
-        </p:spPr>
-        <p:txBody>
-          <a:bodyPr wrap="square" lIns="45720" rIns="45720" tIns="27432" bIns="27432" anchor="t"/>
-          <a:lstStyle/>
-          <a:p>
-            <a:pPr algn="l">
-              <a:spcBef>
-                <a:spcPts val="0"/>
-              </a:spcBef>
-              <a:spcAft>
-                <a:spcPts val="250"/>
-              </a:spcAft>
-            </a:pPr>
-            <a:r>
-              <a:rPr sz="950" b="1" i="0">
-                <a:solidFill>
-                  <a:srgbClr val="C45A10"/>
+            <a:off x="1435608" y="2520696"/>
+            <a:ext cx="1336548" cy="399288"/>
+          </a:xfrm>
+          <a:prstGeom prst="roundRect">
+            <a:avLst>
+              <a:gd name="adj" fmla="val 12000"/>
+            </a:avLst>
+          </a:prstGeom>
+          <a:solidFill>
+            <a:srgbClr val="FDF3EA"/>
+          </a:solidFill>
+          <a:ln w="9525">
+            <a:solidFill>
+              <a:srgbClr val="FBE3CF"/>
+            </a:solidFill>
+          </a:ln>
+          <a:effectLst/>
+        </p:spPr>
+        <p:style>
+          <a:lnRef idx="1">
+            <a:schemeClr val="accent1"/>
+          </a:lnRef>
+          <a:fillRef idx="3">
+            <a:schemeClr val="accent1"/>
+          </a:fillRef>
+          <a:effectRef idx="2">
+            <a:schemeClr val="accent1"/>
+          </a:effectRef>
+          <a:fontRef idx="minor">
+            <a:schemeClr val="lt1"/>
+          </a:fontRef>
+        </p:style>
+        <p:txBody>
+          <a:bodyPr rtlCol="0" anchor="ctr" wrap="square" lIns="27432" rIns="27432" tIns="9144" bIns="9144"/>
+          <a:lstStyle/>
+          <a:p>
+            <a:pPr algn="ctr"/>
+            <a:r>
+              <a:rPr sz="880" b="0" i="0">
+                <a:solidFill>
+                  <a:srgbClr val="1B2430"/>
                 </a:solidFill>
                 <a:latin typeface="微软雅黑"/>
                 <a:ea typeface="微软雅黑"/>
                 <a:cs typeface="微软雅黑"/>
               </a:rPr>
-              <a:t>▪ </a:t>
-            </a:r>
-            <a:r>
-              <a:rPr sz="950" b="1" i="0">
+              <a:t>多级算子代价模型</a:t>
+            </a:r>
+          </a:p>
+        </p:txBody>
+      </p:sp>
+      <p:sp>
+        <p:nvSpPr>
+          <p:cNvPr id="22" name="Rounded Rectangle 21"/>
+          <p:cNvSpPr/>
+          <p:nvPr/>
+        </p:nvSpPr>
+        <p:spPr>
+          <a:xfrm>
+            <a:off x="2827020" y="2520696"/>
+            <a:ext cx="1336548" cy="399288"/>
+          </a:xfrm>
+          <a:prstGeom prst="roundRect">
+            <a:avLst>
+              <a:gd name="adj" fmla="val 12000"/>
+            </a:avLst>
+          </a:prstGeom>
+          <a:solidFill>
+            <a:srgbClr val="FDF3EA"/>
+          </a:solidFill>
+          <a:ln w="9525">
+            <a:solidFill>
+              <a:srgbClr val="FBE3CF"/>
+            </a:solidFill>
+          </a:ln>
+          <a:effectLst/>
+        </p:spPr>
+        <p:style>
+          <a:lnRef idx="1">
+            <a:schemeClr val="accent1"/>
+          </a:lnRef>
+          <a:fillRef idx="3">
+            <a:schemeClr val="accent1"/>
+          </a:fillRef>
+          <a:effectRef idx="2">
+            <a:schemeClr val="accent1"/>
+          </a:effectRef>
+          <a:fontRef idx="minor">
+            <a:schemeClr val="lt1"/>
+          </a:fontRef>
+        </p:style>
+        <p:txBody>
+          <a:bodyPr rtlCol="0" anchor="ctr" wrap="square" lIns="27432" rIns="27432" tIns="9144" bIns="9144"/>
+          <a:lstStyle/>
+          <a:p>
+            <a:pPr algn="ctr"/>
+            <a:r>
+              <a:rPr sz="880" b="0" i="0">
                 <a:solidFill>
                   <a:srgbClr val="1B2430"/>
                 </a:solidFill>
@@ -4664,10 +4565,58 @@
                 <a:ea typeface="微软雅黑"/>
                 <a:cs typeface="微软雅黑"/>
               </a:rPr>
-              <a:t>结构画像：</a:t>
-            </a:r>
-            <a:r>
-              <a:rPr sz="950" b="0" i="0">
+              <a:t>通信量与访存量推导</a:t>
+            </a:r>
+          </a:p>
+        </p:txBody>
+      </p:sp>
+      <p:sp>
+        <p:nvSpPr>
+          <p:cNvPr id="23" name="Rounded Rectangle 22"/>
+          <p:cNvSpPr/>
+          <p:nvPr/>
+        </p:nvSpPr>
+        <p:spPr>
+          <a:xfrm>
+            <a:off x="1435608" y="2974848"/>
+            <a:ext cx="1336548" cy="399288"/>
+          </a:xfrm>
+          <a:prstGeom prst="roundRect">
+            <a:avLst>
+              <a:gd name="adj" fmla="val 12000"/>
+            </a:avLst>
+          </a:prstGeom>
+          <a:solidFill>
+            <a:srgbClr val="FDF3EA"/>
+          </a:solidFill>
+          <a:ln w="9525">
+            <a:solidFill>
+              <a:srgbClr val="FBE3CF"/>
+            </a:solidFill>
+          </a:ln>
+          <a:effectLst/>
+        </p:spPr>
+        <p:style>
+          <a:lnRef idx="1">
+            <a:schemeClr val="accent1"/>
+          </a:lnRef>
+          <a:fillRef idx="3">
+            <a:schemeClr val="accent1"/>
+          </a:fillRef>
+          <a:effectRef idx="2">
+            <a:schemeClr val="accent1"/>
+          </a:effectRef>
+          <a:fontRef idx="minor">
+            <a:schemeClr val="lt1"/>
+          </a:fontRef>
+        </p:style>
+        <p:txBody>
+          <a:bodyPr rtlCol="0" anchor="ctr" wrap="square" lIns="27432" rIns="27432" tIns="9144" bIns="9144"/>
+          <a:lstStyle/>
+          <a:p>
+            <a:pPr algn="ctr"/>
+            <a:r>
+              <a:rPr sz="880" b="0" i="0">
                 <a:solidFill>
                   <a:srgbClr val="1B2430"/>
                 </a:solidFill>
@@ -4675,154 +4624,84 @@
                 <a:ea typeface="微软雅黑"/>
                 <a:cs typeface="微软雅黑"/>
               </a:rPr>
-              <a:t>Dense/MoE/长序列；层数、专家数、TopK</a:t>
-            </a:r>
-          </a:p>
-          <a:p>
-            <a:pPr algn="l">
-              <a:spcBef>
-                <a:spcPts val="0"/>
-              </a:spcBef>
-              <a:spcAft>
-                <a:spcPts val="250"/>
-              </a:spcAft>
-            </a:pPr>
-            <a:r>
-              <a:rPr sz="950" b="1" i="0">
-                <a:solidFill>
-                  <a:srgbClr val="C45A10"/>
+              <a:t>MoE 路由偏斜建模</a:t>
+            </a:r>
+          </a:p>
+        </p:txBody>
+      </p:sp>
+      <p:sp>
+        <p:nvSpPr>
+          <p:cNvPr id="24" name="Rounded Rectangle 23"/>
+          <p:cNvSpPr/>
+          <p:nvPr/>
+        </p:nvSpPr>
+        <p:spPr>
+          <a:xfrm>
+            <a:off x="2827020" y="2974848"/>
+            <a:ext cx="1336548" cy="399288"/>
+          </a:xfrm>
+          <a:prstGeom prst="roundRect">
+            <a:avLst>
+              <a:gd name="adj" fmla="val 12000"/>
+            </a:avLst>
+          </a:prstGeom>
+          <a:solidFill>
+            <a:srgbClr val="FDF3EA"/>
+          </a:solidFill>
+          <a:ln w="9525">
+            <a:solidFill>
+              <a:srgbClr val="FBE3CF"/>
+            </a:solidFill>
+          </a:ln>
+          <a:effectLst/>
+        </p:spPr>
+        <p:style>
+          <a:lnRef idx="1">
+            <a:schemeClr val="accent1"/>
+          </a:lnRef>
+          <a:fillRef idx="3">
+            <a:schemeClr val="accent1"/>
+          </a:fillRef>
+          <a:effectRef idx="2">
+            <a:schemeClr val="accent1"/>
+          </a:effectRef>
+          <a:fontRef idx="minor">
+            <a:schemeClr val="lt1"/>
+          </a:fontRef>
+        </p:style>
+        <p:txBody>
+          <a:bodyPr rtlCol="0" anchor="ctr" wrap="square" lIns="27432" rIns="27432" tIns="9144" bIns="9144"/>
+          <a:lstStyle/>
+          <a:p>
+            <a:pPr algn="ctr"/>
+            <a:r>
+              <a:rPr sz="880" b="0" i="0">
+                <a:solidFill>
+                  <a:srgbClr val="1B2430"/>
                 </a:solidFill>
                 <a:latin typeface="微软雅黑"/>
                 <a:ea typeface="微软雅黑"/>
                 <a:cs typeface="微软雅黑"/>
               </a:rPr>
-              <a:t>▪ </a:t>
-            </a:r>
-            <a:r>
-              <a:rPr sz="950" b="1" i="0">
-                <a:solidFill>
-                  <a:srgbClr val="1B2430"/>
-                </a:solidFill>
-                <a:latin typeface="微软雅黑"/>
-                <a:ea typeface="微软雅黑"/>
-                <a:cs typeface="微软雅黑"/>
-              </a:rPr>
-              <a:t>并行展开：</a:t>
-            </a:r>
-            <a:r>
-              <a:rPr sz="950" b="0" i="0">
-                <a:solidFill>
-                  <a:srgbClr val="1B2430"/>
-                </a:solidFill>
-                <a:latin typeface="微软雅黑"/>
-                <a:ea typeface="微软雅黑"/>
-                <a:cs typeface="微软雅黑"/>
-              </a:rPr>
-              <a:t>TP/PP/DP/EP/CP → 每 rank 算子图 + 通信</a:t>
-            </a:r>
-          </a:p>
-          <a:p>
-            <a:pPr algn="l">
-              <a:spcBef>
-                <a:spcPts val="0"/>
-              </a:spcBef>
-              <a:spcAft>
-                <a:spcPts val="250"/>
-              </a:spcAft>
-            </a:pPr>
-            <a:r>
-              <a:rPr sz="950" b="1" i="0">
-                <a:solidFill>
-                  <a:srgbClr val="C45A10"/>
-                </a:solidFill>
-                <a:latin typeface="微软雅黑"/>
-                <a:ea typeface="微软雅黑"/>
-                <a:cs typeface="微软雅黑"/>
-              </a:rPr>
-              <a:t>▪ </a:t>
-            </a:r>
-            <a:r>
-              <a:rPr sz="950" b="1" i="0">
-                <a:solidFill>
-                  <a:srgbClr val="1B2430"/>
-                </a:solidFill>
-                <a:latin typeface="微软雅黑"/>
-                <a:ea typeface="微软雅黑"/>
-                <a:cs typeface="微软雅黑"/>
-              </a:rPr>
-              <a:t>算子代价：</a:t>
-            </a:r>
-            <a:r>
-              <a:rPr sz="950" b="0" i="0">
-                <a:solidFill>
-                  <a:srgbClr val="1B2430"/>
-                </a:solidFill>
-                <a:latin typeface="微软雅黑"/>
-                <a:ea typeface="微软雅黑"/>
-                <a:cs typeface="微软雅黑"/>
-              </a:rPr>
-              <a:t>Roofline + 实测表 + 回归外推</a:t>
-            </a:r>
-          </a:p>
-          <a:p>
-            <a:pPr algn="l">
-              <a:spcBef>
-                <a:spcPts val="0"/>
-              </a:spcBef>
-              <a:spcAft>
-                <a:spcPts val="250"/>
-              </a:spcAft>
-            </a:pPr>
-            <a:r>
-              <a:rPr sz="950" b="1" i="0">
-                <a:solidFill>
-                  <a:srgbClr val="C45A10"/>
-                </a:solidFill>
-                <a:latin typeface="微软雅黑"/>
-                <a:ea typeface="微软雅黑"/>
-                <a:cs typeface="微软雅黑"/>
-              </a:rPr>
-              <a:t>▪ </a:t>
-            </a:r>
-            <a:r>
-              <a:rPr sz="950" b="1" i="0">
-                <a:solidFill>
-                  <a:srgbClr val="1B2430"/>
-                </a:solidFill>
-                <a:latin typeface="微软雅黑"/>
-                <a:ea typeface="微软雅黑"/>
-                <a:cs typeface="微软雅黑"/>
-              </a:rPr>
-              <a:t>动态特征：</a:t>
-            </a:r>
-            <a:r>
-              <a:rPr sz="950" b="0" i="0">
-                <a:solidFill>
-                  <a:srgbClr val="1B2430"/>
-                </a:solidFill>
-                <a:latin typeface="微软雅黑"/>
-                <a:ea typeface="微软雅黑"/>
-                <a:cs typeface="微软雅黑"/>
-              </a:rPr>
-              <a:t>MoE 路由偏斜、KV 增长、重计算</a:t>
-            </a:r>
-          </a:p>
-        </p:txBody>
-      </p:sp>
-      <p:sp>
-        <p:nvSpPr>
-          <p:cNvPr id="23" name="Rounded Rectangle 22"/>
+              <a:t>KV Cache 动态增长建模</a:t>
+            </a:r>
+          </a:p>
+        </p:txBody>
+      </p:sp>
+      <p:sp>
+        <p:nvSpPr>
+          <p:cNvPr id="25" name="Rounded Rectangle 24"/>
           <p:cNvSpPr/>
           <p:nvPr/>
         </p:nvSpPr>
         <p:spPr>
           <a:xfrm>
-            <a:off x="4840224" y="1508760"/>
-            <a:ext cx="2060448" cy="1828800"/>
+            <a:off x="4300728" y="1773936"/>
+            <a:ext cx="2855976" cy="1664208"/>
           </a:xfrm>
           <a:prstGeom prst="roundRect">
             <a:avLst>
-              <a:gd name="adj" fmla="val 5000"/>
+              <a:gd name="adj" fmla="val 4000"/>
             </a:avLst>
           </a:prstGeom>
           <a:solidFill>
@@ -4859,60 +4738,14 @@
       </p:sp>
       <p:sp>
         <p:nvSpPr>
-          <p:cNvPr id="24" name="Rounded Rectangle 23"/>
-          <p:cNvSpPr/>
-          <p:nvPr/>
-        </p:nvSpPr>
-        <p:spPr>
-          <a:xfrm>
-            <a:off x="4840224" y="1508760"/>
-            <a:ext cx="2060448" cy="329184"/>
-          </a:xfrm>
-          <a:prstGeom prst="roundRect">
-            <a:avLst>
-              <a:gd name="adj" fmla="val 20000"/>
-            </a:avLst>
-          </a:prstGeom>
-          <a:solidFill>
-            <a:srgbClr val="FBE3CF"/>
-          </a:solidFill>
-          <a:ln>
-            <a:noFill/>
-          </a:ln>
-          <a:effectLst/>
-        </p:spPr>
-        <p:style>
-          <a:lnRef idx="1">
-            <a:schemeClr val="accent1"/>
-          </a:lnRef>
-          <a:fillRef idx="3">
-            <a:schemeClr val="accent1"/>
-          </a:fillRef>
-          <a:effectRef idx="2">
-            <a:schemeClr val="accent1"/>
-          </a:effectRef>
-          <a:fontRef idx="minor">
-            <a:schemeClr val="lt1"/>
-          </a:fontRef>
-        </p:style>
-        <p:txBody>
-          <a:bodyPr rtlCol="0" anchor="ctr"/>
-          <a:lstStyle/>
-          <a:p>
-            <a:pPr algn="ctr"/>
-          </a:p>
-        </p:txBody>
-      </p:sp>
-      <p:sp>
-        <p:nvSpPr>
-          <p:cNvPr id="25" name="TextBox 24"/>
+          <p:cNvPr id="26" name="TextBox 25"/>
           <p:cNvSpPr txBox="1"/>
           <p:nvPr/>
         </p:nvSpPr>
         <p:spPr>
           <a:xfrm>
-            <a:off x="4895088" y="1527048"/>
-            <a:ext cx="1969008" cy="292608"/>
+            <a:off x="4346448" y="1792224"/>
+            <a:ext cx="2764536" cy="274320"/>
           </a:xfrm>
           <a:prstGeom prst="rect">
             <a:avLst/>
@@ -4923,7 +4756,7 @@
           <a:bodyPr wrap="square" lIns="45720" rIns="45720" tIns="27432" bIns="27432" anchor="ctr"/>
           <a:lstStyle/>
           <a:p>
-            <a:pPr algn="l">
+            <a:pPr algn="ctr">
               <a:spcBef>
                 <a:spcPts val="0"/>
               </a:spcBef>
@@ -4932,7 +4765,7 @@
               </a:spcAft>
             </a:pPr>
             <a:r>
-              <a:rPr sz="1150" b="1" i="0">
+              <a:rPr sz="1000" b="1" i="0">
                 <a:solidFill>
                   <a:srgbClr val="C45A10"/>
                 </a:solidFill>
@@ -4940,10 +4773,58 @@
                 <a:ea typeface="微软雅黑"/>
                 <a:cs typeface="微软雅黑"/>
               </a:rPr>
-              <a:t>② </a:t>
-            </a:r>
-            <a:r>
-              <a:rPr sz="1150" b="1" i="0">
+              <a:t>② 基于随机过程的到达与请求建模</a:t>
+            </a:r>
+          </a:p>
+        </p:txBody>
+      </p:sp>
+      <p:sp>
+        <p:nvSpPr>
+          <p:cNvPr id="27" name="Rounded Rectangle 26"/>
+          <p:cNvSpPr/>
+          <p:nvPr/>
+        </p:nvSpPr>
+        <p:spPr>
+          <a:xfrm>
+            <a:off x="4364736" y="2066544"/>
+            <a:ext cx="1336548" cy="399288"/>
+          </a:xfrm>
+          <a:prstGeom prst="roundRect">
+            <a:avLst>
+              <a:gd name="adj" fmla="val 12000"/>
+            </a:avLst>
+          </a:prstGeom>
+          <a:solidFill>
+            <a:srgbClr val="FDF3EA"/>
+          </a:solidFill>
+          <a:ln w="9525">
+            <a:solidFill>
+              <a:srgbClr val="FBE3CF"/>
+            </a:solidFill>
+          </a:ln>
+          <a:effectLst/>
+        </p:spPr>
+        <p:style>
+          <a:lnRef idx="1">
+            <a:schemeClr val="accent1"/>
+          </a:lnRef>
+          <a:fillRef idx="3">
+            <a:schemeClr val="accent1"/>
+          </a:fillRef>
+          <a:effectRef idx="2">
+            <a:schemeClr val="accent1"/>
+          </a:effectRef>
+          <a:fontRef idx="minor">
+            <a:schemeClr val="lt1"/>
+          </a:fontRef>
+        </p:style>
+        <p:txBody>
+          <a:bodyPr rtlCol="0" anchor="ctr" wrap="square" lIns="27432" rIns="27432" tIns="9144" bIns="9144"/>
+          <a:lstStyle/>
+          <a:p>
+            <a:pPr algn="ctr"/>
+            <a:r>
+              <a:rPr sz="880" b="0" i="0">
                 <a:solidFill>
                   <a:srgbClr val="1B2430"/>
                 </a:solidFill>
@@ -4951,63 +4832,131 @@
                 <a:ea typeface="微软雅黑"/>
                 <a:cs typeface="微软雅黑"/>
               </a:rPr>
-              <a:t>到达与请求分布</a:t>
-            </a:r>
-            <a:r>
-              <a:rPr sz="800" b="0" i="0">
-                <a:solidFill>
-                  <a:srgbClr val="5C6B7A"/>
+              <a:t>突发到达建模</a:t>
+            </a:r>
+          </a:p>
+          <a:p>
+            <a:pPr algn="ctr"/>
+            <a:r>
+              <a:rPr sz="880" b="0" i="0">
+                <a:solidFill>
+                  <a:srgbClr val="1B2430"/>
                 </a:solidFill>
                 <a:latin typeface="微软雅黑"/>
                 <a:ea typeface="微软雅黑"/>
                 <a:cs typeface="微软雅黑"/>
               </a:rPr>
-              <a:t/>
-            </a:r>
-          </a:p>
-        </p:txBody>
-      </p:sp>
-      <p:sp>
-        <p:nvSpPr>
-          <p:cNvPr id="26" name="TextBox 25"/>
-          <p:cNvSpPr txBox="1"/>
+              <a:t>MMPP / Hawkes</a:t>
+            </a:r>
+          </a:p>
+        </p:txBody>
+      </p:sp>
+      <p:sp>
+        <p:nvSpPr>
+          <p:cNvPr id="28" name="Rounded Rectangle 27"/>
+          <p:cNvSpPr/>
           <p:nvPr/>
         </p:nvSpPr>
         <p:spPr>
           <a:xfrm>
-            <a:off x="4895088" y="1892808"/>
-            <a:ext cx="1969008" cy="1408176"/>
-          </a:xfrm>
-          <a:prstGeom prst="rect">
-            <a:avLst/>
-          </a:prstGeom>
-          <a:noFill/>
-        </p:spPr>
-        <p:txBody>
-          <a:bodyPr wrap="square" lIns="45720" rIns="45720" tIns="27432" bIns="27432" anchor="t"/>
-          <a:lstStyle/>
-          <a:p>
-            <a:pPr algn="l">
-              <a:spcBef>
-                <a:spcPts val="0"/>
-              </a:spcBef>
-              <a:spcAft>
-                <a:spcPts val="250"/>
-              </a:spcAft>
-            </a:pPr>
-            <a:r>
-              <a:rPr sz="950" b="1" i="0">
-                <a:solidFill>
-                  <a:srgbClr val="C45A10"/>
+            <a:off x="5756148" y="2066544"/>
+            <a:ext cx="1336548" cy="399288"/>
+          </a:xfrm>
+          <a:prstGeom prst="roundRect">
+            <a:avLst>
+              <a:gd name="adj" fmla="val 12000"/>
+            </a:avLst>
+          </a:prstGeom>
+          <a:solidFill>
+            <a:srgbClr val="FDF3EA"/>
+          </a:solidFill>
+          <a:ln w="9525">
+            <a:solidFill>
+              <a:srgbClr val="FBE3CF"/>
+            </a:solidFill>
+          </a:ln>
+          <a:effectLst/>
+        </p:spPr>
+        <p:style>
+          <a:lnRef idx="1">
+            <a:schemeClr val="accent1"/>
+          </a:lnRef>
+          <a:fillRef idx="3">
+            <a:schemeClr val="accent1"/>
+          </a:fillRef>
+          <a:effectRef idx="2">
+            <a:schemeClr val="accent1"/>
+          </a:effectRef>
+          <a:fontRef idx="minor">
+            <a:schemeClr val="lt1"/>
+          </a:fontRef>
+        </p:style>
+        <p:txBody>
+          <a:bodyPr rtlCol="0" anchor="ctr" wrap="square" lIns="27432" rIns="27432" tIns="9144" bIns="9144"/>
+          <a:lstStyle/>
+          <a:p>
+            <a:pPr algn="ctr"/>
+            <a:r>
+              <a:rPr sz="880" b="0" i="0">
+                <a:solidFill>
+                  <a:srgbClr val="1B2430"/>
                 </a:solidFill>
                 <a:latin typeface="微软雅黑"/>
                 <a:ea typeface="微软雅黑"/>
                 <a:cs typeface="微软雅黑"/>
               </a:rPr>
-              <a:t>▪ </a:t>
-            </a:r>
-            <a:r>
-              <a:rPr sz="950" b="1" i="0">
+              <a:t>日周期与多租户叠加</a:t>
+            </a:r>
+          </a:p>
+        </p:txBody>
+      </p:sp>
+      <p:sp>
+        <p:nvSpPr>
+          <p:cNvPr id="29" name="Rounded Rectangle 28"/>
+          <p:cNvSpPr/>
+          <p:nvPr/>
+        </p:nvSpPr>
+        <p:spPr>
+          <a:xfrm>
+            <a:off x="4364736" y="2520696"/>
+            <a:ext cx="1336548" cy="399288"/>
+          </a:xfrm>
+          <a:prstGeom prst="roundRect">
+            <a:avLst>
+              <a:gd name="adj" fmla="val 12000"/>
+            </a:avLst>
+          </a:prstGeom>
+          <a:solidFill>
+            <a:srgbClr val="FDF3EA"/>
+          </a:solidFill>
+          <a:ln w="9525">
+            <a:solidFill>
+              <a:srgbClr val="FBE3CF"/>
+            </a:solidFill>
+          </a:ln>
+          <a:effectLst/>
+        </p:spPr>
+        <p:style>
+          <a:lnRef idx="1">
+            <a:schemeClr val="accent1"/>
+          </a:lnRef>
+          <a:fillRef idx="3">
+            <a:schemeClr val="accent1"/>
+          </a:fillRef>
+          <a:effectRef idx="2">
+            <a:schemeClr val="accent1"/>
+          </a:effectRef>
+          <a:fontRef idx="minor">
+            <a:schemeClr val="lt1"/>
+          </a:fontRef>
+        </p:style>
+        <p:txBody>
+          <a:bodyPr rtlCol="0" anchor="ctr" wrap="square" lIns="27432" rIns="27432" tIns="9144" bIns="9144"/>
+          <a:lstStyle/>
+          <a:p>
+            <a:pPr algn="ctr"/>
+            <a:r>
+              <a:rPr sz="880" b="0" i="0">
                 <a:solidFill>
                   <a:srgbClr val="1B2430"/>
                 </a:solidFill>
@@ -5015,10 +4964,13 @@
                 <a:ea typeface="微软雅黑"/>
                 <a:cs typeface="微软雅黑"/>
               </a:rPr>
-              <a:t>到达过程：</a:t>
-            </a:r>
-            <a:r>
-              <a:rPr sz="950" b="0" i="0">
+              <a:t>输入/输出长度</a:t>
+            </a:r>
+          </a:p>
+          <a:p>
+            <a:pPr algn="ctr"/>
+            <a:r>
+              <a:rPr sz="880" b="0" i="0">
                 <a:solidFill>
                   <a:srgbClr val="1B2430"/>
                 </a:solidFill>
@@ -5026,31 +4978,117 @@
                 <a:ea typeface="微软雅黑"/>
                 <a:cs typeface="微软雅黑"/>
               </a:rPr>
-              <a:t>突发 MMPP/Hawkes、日周期、多租户叠加</a:t>
-            </a:r>
-          </a:p>
-          <a:p>
-            <a:pPr algn="l">
-              <a:spcBef>
-                <a:spcPts val="0"/>
-              </a:spcBef>
-              <a:spcAft>
-                <a:spcPts val="250"/>
-              </a:spcAft>
-            </a:pPr>
-            <a:r>
-              <a:rPr sz="950" b="1" i="0">
-                <a:solidFill>
-                  <a:srgbClr val="C45A10"/>
+              <a:t>Copula 联合建模</a:t>
+            </a:r>
+          </a:p>
+        </p:txBody>
+      </p:sp>
+      <p:sp>
+        <p:nvSpPr>
+          <p:cNvPr id="30" name="Rounded Rectangle 29"/>
+          <p:cNvSpPr/>
+          <p:nvPr/>
+        </p:nvSpPr>
+        <p:spPr>
+          <a:xfrm>
+            <a:off x="5756148" y="2520696"/>
+            <a:ext cx="1336548" cy="399288"/>
+          </a:xfrm>
+          <a:prstGeom prst="roundRect">
+            <a:avLst>
+              <a:gd name="adj" fmla="val 12000"/>
+            </a:avLst>
+          </a:prstGeom>
+          <a:solidFill>
+            <a:srgbClr val="FDF3EA"/>
+          </a:solidFill>
+          <a:ln w="9525">
+            <a:solidFill>
+              <a:srgbClr val="FBE3CF"/>
+            </a:solidFill>
+          </a:ln>
+          <a:effectLst/>
+        </p:spPr>
+        <p:style>
+          <a:lnRef idx="1">
+            <a:schemeClr val="accent1"/>
+          </a:lnRef>
+          <a:fillRef idx="3">
+            <a:schemeClr val="accent1"/>
+          </a:fillRef>
+          <a:effectRef idx="2">
+            <a:schemeClr val="accent1"/>
+          </a:effectRef>
+          <a:fontRef idx="minor">
+            <a:schemeClr val="lt1"/>
+          </a:fontRef>
+        </p:style>
+        <p:txBody>
+          <a:bodyPr rtlCol="0" anchor="ctr" wrap="square" lIns="27432" rIns="27432" tIns="9144" bIns="9144"/>
+          <a:lstStyle/>
+          <a:p>
+            <a:pPr algn="ctr"/>
+            <a:r>
+              <a:rPr sz="880" b="0" i="0">
+                <a:solidFill>
+                  <a:srgbClr val="1B2430"/>
                 </a:solidFill>
                 <a:latin typeface="微软雅黑"/>
                 <a:ea typeface="微软雅黑"/>
                 <a:cs typeface="微软雅黑"/>
               </a:rPr>
-              <a:t>▪ </a:t>
-            </a:r>
-            <a:r>
-              <a:rPr sz="950" b="1" i="0">
+              <a:t>会话与前缀复用建模</a:t>
+            </a:r>
+          </a:p>
+        </p:txBody>
+      </p:sp>
+      <p:sp>
+        <p:nvSpPr>
+          <p:cNvPr id="31" name="Rounded Rectangle 30"/>
+          <p:cNvSpPr/>
+          <p:nvPr/>
+        </p:nvSpPr>
+        <p:spPr>
+          <a:xfrm>
+            <a:off x="4364736" y="2974848"/>
+            <a:ext cx="1336548" cy="399288"/>
+          </a:xfrm>
+          <a:prstGeom prst="roundRect">
+            <a:avLst>
+              <a:gd name="adj" fmla="val 12000"/>
+            </a:avLst>
+          </a:prstGeom>
+          <a:solidFill>
+            <a:srgbClr val="FDF3EA"/>
+          </a:solidFill>
+          <a:ln w="9525">
+            <a:solidFill>
+              <a:srgbClr val="FBE3CF"/>
+            </a:solidFill>
+          </a:ln>
+          <a:effectLst/>
+        </p:spPr>
+        <p:style>
+          <a:lnRef idx="1">
+            <a:schemeClr val="accent1"/>
+          </a:lnRef>
+          <a:fillRef idx="3">
+            <a:schemeClr val="accent1"/>
+          </a:fillRef>
+          <a:effectRef idx="2">
+            <a:schemeClr val="accent1"/>
+          </a:effectRef>
+          <a:fontRef idx="minor">
+            <a:schemeClr val="lt1"/>
+          </a:fontRef>
+        </p:style>
+        <p:txBody>
+          <a:bodyPr rtlCol="0" anchor="ctr" wrap="square" lIns="27432" rIns="27432" tIns="9144" bIns="9144"/>
+          <a:lstStyle/>
+          <a:p>
+            <a:pPr algn="ctr"/>
+            <a:r>
+              <a:rPr sz="880" b="0" i="0">
                 <a:solidFill>
                   <a:srgbClr val="1B2430"/>
                 </a:solidFill>
@@ -5058,10 +5096,58 @@
                 <a:ea typeface="微软雅黑"/>
                 <a:cs typeface="微软雅黑"/>
               </a:rPr>
-              <a:t>请求形态：</a:t>
-            </a:r>
-            <a:r>
-              <a:rPr sz="950" b="0" i="0">
+              <a:t>训练作业规模与故障建模</a:t>
+            </a:r>
+          </a:p>
+        </p:txBody>
+      </p:sp>
+      <p:sp>
+        <p:nvSpPr>
+          <p:cNvPr id="32" name="Rounded Rectangle 31"/>
+          <p:cNvSpPr/>
+          <p:nvPr/>
+        </p:nvSpPr>
+        <p:spPr>
+          <a:xfrm>
+            <a:off x="5756148" y="2974848"/>
+            <a:ext cx="1336548" cy="399288"/>
+          </a:xfrm>
+          <a:prstGeom prst="roundRect">
+            <a:avLst>
+              <a:gd name="adj" fmla="val 12000"/>
+            </a:avLst>
+          </a:prstGeom>
+          <a:solidFill>
+            <a:srgbClr val="FDF3EA"/>
+          </a:solidFill>
+          <a:ln w="9525">
+            <a:solidFill>
+              <a:srgbClr val="FBE3CF"/>
+            </a:solidFill>
+          </a:ln>
+          <a:effectLst/>
+        </p:spPr>
+        <p:style>
+          <a:lnRef idx="1">
+            <a:schemeClr val="accent1"/>
+          </a:lnRef>
+          <a:fillRef idx="3">
+            <a:schemeClr val="accent1"/>
+          </a:fillRef>
+          <a:effectRef idx="2">
+            <a:schemeClr val="accent1"/>
+          </a:effectRef>
+          <a:fontRef idx="minor">
+            <a:schemeClr val="lt1"/>
+          </a:fontRef>
+        </p:style>
+        <p:txBody>
+          <a:bodyPr rtlCol="0" anchor="ctr" wrap="square" lIns="27432" rIns="27432" tIns="9144" bIns="9144"/>
+          <a:lstStyle/>
+          <a:p>
+            <a:pPr algn="ctr"/>
+            <a:r>
+              <a:rPr sz="880" b="0" i="0">
                 <a:solidFill>
                   <a:srgbClr val="1B2430"/>
                 </a:solidFill>
@@ -5069,111 +5155,25 @@
                 <a:ea typeface="微软雅黑"/>
                 <a:cs typeface="微软雅黑"/>
               </a:rPr>
-              <a:t>输入/输出长度联合分布、前缀复用、多轮/Agent</a:t>
-            </a:r>
-          </a:p>
-          <a:p>
-            <a:pPr algn="l">
-              <a:spcBef>
-                <a:spcPts val="0"/>
-              </a:spcBef>
-              <a:spcAft>
-                <a:spcPts val="250"/>
-              </a:spcAft>
-            </a:pPr>
-            <a:r>
-              <a:rPr sz="950" b="1" i="0">
-                <a:solidFill>
-                  <a:srgbClr val="C45A10"/>
-                </a:solidFill>
-                <a:latin typeface="微软雅黑"/>
-                <a:ea typeface="微软雅黑"/>
-                <a:cs typeface="微软雅黑"/>
-              </a:rPr>
-              <a:t>▪ </a:t>
-            </a:r>
-            <a:r>
-              <a:rPr sz="950" b="1" i="0">
-                <a:solidFill>
-                  <a:srgbClr val="1B2430"/>
-                </a:solidFill>
-                <a:latin typeface="微软雅黑"/>
-                <a:ea typeface="微软雅黑"/>
-                <a:cs typeface="微软雅黑"/>
-              </a:rPr>
-              <a:t>训练作业：</a:t>
-            </a:r>
-            <a:r>
-              <a:rPr sz="950" b="0" i="0">
-                <a:solidFill>
-                  <a:srgbClr val="1B2430"/>
-                </a:solidFill>
-                <a:latin typeface="微软雅黑"/>
-                <a:ea typeface="微软雅黑"/>
-                <a:cs typeface="微软雅黑"/>
-              </a:rPr>
-              <a:t>到达、规模幂律、时长、故障</a:t>
-            </a:r>
-          </a:p>
-          <a:p>
-            <a:pPr algn="l">
-              <a:spcBef>
-                <a:spcPts val="0"/>
-              </a:spcBef>
-              <a:spcAft>
-                <a:spcPts val="250"/>
-              </a:spcAft>
-            </a:pPr>
-            <a:r>
-              <a:rPr sz="950" b="1" i="0">
-                <a:solidFill>
-                  <a:srgbClr val="C45A10"/>
-                </a:solidFill>
-                <a:latin typeface="微软雅黑"/>
-                <a:ea typeface="微软雅黑"/>
-                <a:cs typeface="微软雅黑"/>
-              </a:rPr>
-              <a:t>▪ </a:t>
-            </a:r>
-            <a:r>
-              <a:rPr sz="950" b="1" i="0">
-                <a:solidFill>
-                  <a:srgbClr val="1B2430"/>
-                </a:solidFill>
-                <a:latin typeface="微软雅黑"/>
-                <a:ea typeface="微软雅黑"/>
-                <a:cs typeface="微软雅黑"/>
-              </a:rPr>
-              <a:t>条件化：</a:t>
-            </a:r>
-            <a:r>
-              <a:rPr sz="950" b="0" i="0">
-                <a:solidFill>
-                  <a:srgbClr val="1B2430"/>
-                </a:solidFill>
-                <a:latin typeface="微软雅黑"/>
-                <a:ea typeface="微软雅黑"/>
-                <a:cs typeface="微软雅黑"/>
-              </a:rPr>
-              <a:t>按业务/时段/SLO 参数化</a:t>
-            </a:r>
-          </a:p>
-        </p:txBody>
-      </p:sp>
-      <p:sp>
-        <p:nvSpPr>
-          <p:cNvPr id="27" name="Rounded Rectangle 26"/>
+              <a:t>SLO 分级条件化生成</a:t>
+            </a:r>
+          </a:p>
+        </p:txBody>
+      </p:sp>
+      <p:sp>
+        <p:nvSpPr>
+          <p:cNvPr id="33" name="Rounded Rectangle 32"/>
           <p:cNvSpPr/>
           <p:nvPr/>
         </p:nvSpPr>
         <p:spPr>
           <a:xfrm>
-            <a:off x="6973824" y="1508760"/>
-            <a:ext cx="2060448" cy="1828800"/>
+            <a:off x="7229856" y="1773936"/>
+            <a:ext cx="2855976" cy="1664208"/>
           </a:xfrm>
           <a:prstGeom prst="roundRect">
             <a:avLst>
-              <a:gd name="adj" fmla="val 5000"/>
+              <a:gd name="adj" fmla="val 4000"/>
             </a:avLst>
           </a:prstGeom>
           <a:solidFill>
@@ -5210,60 +5210,14 @@
       </p:sp>
       <p:sp>
         <p:nvSpPr>
-          <p:cNvPr id="28" name="Rounded Rectangle 27"/>
-          <p:cNvSpPr/>
-          <p:nvPr/>
-        </p:nvSpPr>
-        <p:spPr>
-          <a:xfrm>
-            <a:off x="6973824" y="1508760"/>
-            <a:ext cx="2060448" cy="329184"/>
-          </a:xfrm>
-          <a:prstGeom prst="roundRect">
-            <a:avLst>
-              <a:gd name="adj" fmla="val 20000"/>
-            </a:avLst>
-          </a:prstGeom>
-          <a:solidFill>
-            <a:srgbClr val="FBE3CF"/>
-          </a:solidFill>
-          <a:ln>
-            <a:noFill/>
-          </a:ln>
-          <a:effectLst/>
-        </p:spPr>
-        <p:style>
-          <a:lnRef idx="1">
-            <a:schemeClr val="accent1"/>
-          </a:lnRef>
-          <a:fillRef idx="3">
-            <a:schemeClr val="accent1"/>
-          </a:fillRef>
-          <a:effectRef idx="2">
-            <a:schemeClr val="accent1"/>
-          </a:effectRef>
-          <a:fontRef idx="minor">
-            <a:schemeClr val="lt1"/>
-          </a:fontRef>
-        </p:style>
-        <p:txBody>
-          <a:bodyPr rtlCol="0" anchor="ctr"/>
-          <a:lstStyle/>
-          <a:p>
-            <a:pPr algn="ctr"/>
-          </a:p>
-        </p:txBody>
-      </p:sp>
-      <p:sp>
-        <p:nvSpPr>
-          <p:cNvPr id="29" name="TextBox 28"/>
+          <p:cNvPr id="34" name="TextBox 33"/>
           <p:cNvSpPr txBox="1"/>
           <p:nvPr/>
         </p:nvSpPr>
         <p:spPr>
           <a:xfrm>
-            <a:off x="7028688" y="1527048"/>
-            <a:ext cx="1969008" cy="292608"/>
+            <a:off x="7275576" y="1792224"/>
+            <a:ext cx="2764536" cy="274320"/>
           </a:xfrm>
           <a:prstGeom prst="rect">
             <a:avLst/>
@@ -5274,7 +5228,7 @@
           <a:bodyPr wrap="square" lIns="45720" rIns="45720" tIns="27432" bIns="27432" anchor="ctr"/>
           <a:lstStyle/>
           <a:p>
-            <a:pPr algn="l">
+            <a:pPr algn="ctr">
               <a:spcBef>
                 <a:spcPts val="0"/>
               </a:spcBef>
@@ -5283,7 +5237,7 @@
               </a:spcAft>
             </a:pPr>
             <a:r>
-              <a:rPr sz="1150" b="1" i="0">
+              <a:rPr sz="1000" b="1" i="0">
                 <a:solidFill>
                   <a:srgbClr val="C45A10"/>
                 </a:solidFill>
@@ -5291,10 +5245,58 @@
                 <a:ea typeface="微软雅黑"/>
                 <a:cs typeface="微软雅黑"/>
               </a:rPr>
-              <a:t>③ </a:t>
-            </a:r>
-            <a:r>
-              <a:rPr sz="1150" b="1" i="0">
+              <a:t>③ 基于统计拟合的 Trace 重构与外推</a:t>
+            </a:r>
+          </a:p>
+        </p:txBody>
+      </p:sp>
+      <p:sp>
+        <p:nvSpPr>
+          <p:cNvPr id="35" name="Rounded Rectangle 34"/>
+          <p:cNvSpPr/>
+          <p:nvPr/>
+        </p:nvSpPr>
+        <p:spPr>
+          <a:xfrm>
+            <a:off x="7293864" y="2066544"/>
+            <a:ext cx="1336548" cy="399288"/>
+          </a:xfrm>
+          <a:prstGeom prst="roundRect">
+            <a:avLst>
+              <a:gd name="adj" fmla="val 12000"/>
+            </a:avLst>
+          </a:prstGeom>
+          <a:solidFill>
+            <a:srgbClr val="FDF3EA"/>
+          </a:solidFill>
+          <a:ln w="9525">
+            <a:solidFill>
+              <a:srgbClr val="FBE3CF"/>
+            </a:solidFill>
+          </a:ln>
+          <a:effectLst/>
+        </p:spPr>
+        <p:style>
+          <a:lnRef idx="1">
+            <a:schemeClr val="accent1"/>
+          </a:lnRef>
+          <a:fillRef idx="3">
+            <a:schemeClr val="accent1"/>
+          </a:fillRef>
+          <a:effectRef idx="2">
+            <a:schemeClr val="accent1"/>
+          </a:effectRef>
+          <a:fontRef idx="minor">
+            <a:schemeClr val="lt1"/>
+          </a:fontRef>
+        </p:style>
+        <p:txBody>
+          <a:bodyPr rtlCol="0" anchor="ctr" wrap="square" lIns="27432" rIns="27432" tIns="9144" bIns="9144"/>
+          <a:lstStyle/>
+          <a:p>
+            <a:pPr algn="ctr"/>
+            <a:r>
+              <a:rPr sz="880" b="0" i="0">
                 <a:solidFill>
                   <a:srgbClr val="1B2430"/>
                 </a:solidFill>
@@ -5302,63 +5304,131 @@
                 <a:ea typeface="微软雅黑"/>
                 <a:cs typeface="微软雅黑"/>
               </a:rPr>
-              <a:t>Trace 拟合与外推</a:t>
-            </a:r>
-            <a:r>
-              <a:rPr sz="800" b="0" i="0">
-                <a:solidFill>
-                  <a:srgbClr val="5C6B7A"/>
+              <a:t>多源 Trace 时钟对齐</a:t>
+            </a:r>
+          </a:p>
+          <a:p>
+            <a:pPr algn="ctr"/>
+            <a:r>
+              <a:rPr sz="880" b="0" i="0">
+                <a:solidFill>
+                  <a:srgbClr val="1B2430"/>
                 </a:solidFill>
                 <a:latin typeface="微软雅黑"/>
                 <a:ea typeface="微软雅黑"/>
                 <a:cs typeface="微软雅黑"/>
               </a:rPr>
-              <a:t/>
-            </a:r>
-          </a:p>
-        </p:txBody>
-      </p:sp>
-      <p:sp>
-        <p:nvSpPr>
-          <p:cNvPr id="30" name="TextBox 29"/>
-          <p:cNvSpPr txBox="1"/>
+              <a:t>与依赖重建</a:t>
+            </a:r>
+          </a:p>
+        </p:txBody>
+      </p:sp>
+      <p:sp>
+        <p:nvSpPr>
+          <p:cNvPr id="36" name="Rounded Rectangle 35"/>
+          <p:cNvSpPr/>
           <p:nvPr/>
         </p:nvSpPr>
         <p:spPr>
           <a:xfrm>
-            <a:off x="7028688" y="1892808"/>
-            <a:ext cx="1969008" cy="1408176"/>
-          </a:xfrm>
-          <a:prstGeom prst="rect">
-            <a:avLst/>
-          </a:prstGeom>
-          <a:noFill/>
-        </p:spPr>
-        <p:txBody>
-          <a:bodyPr wrap="square" lIns="45720" rIns="45720" tIns="27432" bIns="27432" anchor="t"/>
-          <a:lstStyle/>
-          <a:p>
-            <a:pPr algn="l">
-              <a:spcBef>
-                <a:spcPts val="0"/>
-              </a:spcBef>
-              <a:spcAft>
-                <a:spcPts val="250"/>
-              </a:spcAft>
-            </a:pPr>
-            <a:r>
-              <a:rPr sz="950" b="1" i="0">
-                <a:solidFill>
-                  <a:srgbClr val="C45A10"/>
+            <a:off x="8685276" y="2066544"/>
+            <a:ext cx="1336548" cy="399288"/>
+          </a:xfrm>
+          <a:prstGeom prst="roundRect">
+            <a:avLst>
+              <a:gd name="adj" fmla="val 12000"/>
+            </a:avLst>
+          </a:prstGeom>
+          <a:solidFill>
+            <a:srgbClr val="FDF3EA"/>
+          </a:solidFill>
+          <a:ln w="9525">
+            <a:solidFill>
+              <a:srgbClr val="FBE3CF"/>
+            </a:solidFill>
+          </a:ln>
+          <a:effectLst/>
+        </p:spPr>
+        <p:style>
+          <a:lnRef idx="1">
+            <a:schemeClr val="accent1"/>
+          </a:lnRef>
+          <a:fillRef idx="3">
+            <a:schemeClr val="accent1"/>
+          </a:fillRef>
+          <a:effectRef idx="2">
+            <a:schemeClr val="accent1"/>
+          </a:effectRef>
+          <a:fontRef idx="minor">
+            <a:schemeClr val="lt1"/>
+          </a:fontRef>
+        </p:style>
+        <p:txBody>
+          <a:bodyPr rtlCol="0" anchor="ctr" wrap="square" lIns="27432" rIns="27432" tIns="9144" bIns="9144"/>
+          <a:lstStyle/>
+          <a:p>
+            <a:pPr algn="ctr"/>
+            <a:r>
+              <a:rPr sz="880" b="0" i="0">
+                <a:solidFill>
+                  <a:srgbClr val="1B2430"/>
                 </a:solidFill>
                 <a:latin typeface="微软雅黑"/>
                 <a:ea typeface="微软雅黑"/>
                 <a:cs typeface="微软雅黑"/>
               </a:rPr>
-              <a:t>▪ </a:t>
-            </a:r>
-            <a:r>
-              <a:rPr sz="950" b="1" i="0">
+              <a:t>迭代周期性压缩</a:t>
+            </a:r>
+          </a:p>
+        </p:txBody>
+      </p:sp>
+      <p:sp>
+        <p:nvSpPr>
+          <p:cNvPr id="37" name="Rounded Rectangle 36"/>
+          <p:cNvSpPr/>
+          <p:nvPr/>
+        </p:nvSpPr>
+        <p:spPr>
+          <a:xfrm>
+            <a:off x="7293864" y="2520696"/>
+            <a:ext cx="1336548" cy="399288"/>
+          </a:xfrm>
+          <a:prstGeom prst="roundRect">
+            <a:avLst>
+              <a:gd name="adj" fmla="val 12000"/>
+            </a:avLst>
+          </a:prstGeom>
+          <a:solidFill>
+            <a:srgbClr val="FDF3EA"/>
+          </a:solidFill>
+          <a:ln w="9525">
+            <a:solidFill>
+              <a:srgbClr val="FBE3CF"/>
+            </a:solidFill>
+          </a:ln>
+          <a:effectLst/>
+        </p:spPr>
+        <p:style>
+          <a:lnRef idx="1">
+            <a:schemeClr val="accent1"/>
+          </a:lnRef>
+          <a:fillRef idx="3">
+            <a:schemeClr val="accent1"/>
+          </a:fillRef>
+          <a:effectRef idx="2">
+            <a:schemeClr val="accent1"/>
+          </a:effectRef>
+          <a:fontRef idx="minor">
+            <a:schemeClr val="lt1"/>
+          </a:fontRef>
+        </p:style>
+        <p:txBody>
+          <a:bodyPr rtlCol="0" anchor="ctr" wrap="square" lIns="27432" rIns="27432" tIns="9144" bIns="9144"/>
+          <a:lstStyle/>
+          <a:p>
+            <a:pPr algn="ctr"/>
+            <a:r>
+              <a:rPr sz="880" b="0" i="0">
                 <a:solidFill>
                   <a:srgbClr val="1B2430"/>
                 </a:solidFill>
@@ -5366,10 +5436,13 @@
                 <a:ea typeface="微软雅黑"/>
                 <a:cs typeface="微软雅黑"/>
               </a:rPr>
-              <a:t>对齐提取：</a:t>
-            </a:r>
-            <a:r>
-              <a:rPr sz="950" b="0" i="0">
+              <a:t>混合分布拟合</a:t>
+            </a:r>
+          </a:p>
+          <a:p>
+            <a:pPr algn="ctr"/>
+            <a:r>
+              <a:rPr sz="880" b="0" i="0">
                 <a:solidFill>
                   <a:srgbClr val="1B2430"/>
                 </a:solidFill>
@@ -5377,31 +5450,72 @@
                 <a:ea typeface="微软雅黑"/>
                 <a:cs typeface="微软雅黑"/>
               </a:rPr>
-              <a:t>跨 rank 时钟对齐、依赖与关键路径重建</a:t>
-            </a:r>
-          </a:p>
-          <a:p>
-            <a:pPr algn="l">
-              <a:spcBef>
-                <a:spcPts val="0"/>
-              </a:spcBef>
-              <a:spcAft>
-                <a:spcPts val="250"/>
-              </a:spcAft>
-            </a:pPr>
-            <a:r>
-              <a:rPr sz="950" b="1" i="0">
-                <a:solidFill>
-                  <a:srgbClr val="C45A10"/>
+              <a:t>与 KS/W1 检验</a:t>
+            </a:r>
+          </a:p>
+        </p:txBody>
+      </p:sp>
+      <p:sp>
+        <p:nvSpPr>
+          <p:cNvPr id="38" name="Rounded Rectangle 37"/>
+          <p:cNvSpPr/>
+          <p:nvPr/>
+        </p:nvSpPr>
+        <p:spPr>
+          <a:xfrm>
+            <a:off x="8685276" y="2520696"/>
+            <a:ext cx="1336548" cy="399288"/>
+          </a:xfrm>
+          <a:prstGeom prst="roundRect">
+            <a:avLst>
+              <a:gd name="adj" fmla="val 12000"/>
+            </a:avLst>
+          </a:prstGeom>
+          <a:solidFill>
+            <a:srgbClr val="FDF3EA"/>
+          </a:solidFill>
+          <a:ln w="9525">
+            <a:solidFill>
+              <a:srgbClr val="FBE3CF"/>
+            </a:solidFill>
+          </a:ln>
+          <a:effectLst/>
+        </p:spPr>
+        <p:style>
+          <a:lnRef idx="1">
+            <a:schemeClr val="accent1"/>
+          </a:lnRef>
+          <a:fillRef idx="3">
+            <a:schemeClr val="accent1"/>
+          </a:fillRef>
+          <a:effectRef idx="2">
+            <a:schemeClr val="accent1"/>
+          </a:effectRef>
+          <a:fontRef idx="minor">
+            <a:schemeClr val="lt1"/>
+          </a:fontRef>
+        </p:style>
+        <p:txBody>
+          <a:bodyPr rtlCol="0" anchor="ctr" wrap="square" lIns="27432" rIns="27432" tIns="9144" bIns="9144"/>
+          <a:lstStyle/>
+          <a:p>
+            <a:pPr algn="ctr"/>
+            <a:r>
+              <a:rPr sz="880" b="0" i="0">
+                <a:solidFill>
+                  <a:srgbClr val="1B2430"/>
                 </a:solidFill>
                 <a:latin typeface="微软雅黑"/>
                 <a:ea typeface="微软雅黑"/>
                 <a:cs typeface="微软雅黑"/>
               </a:rPr>
-              <a:t>▪ </a:t>
-            </a:r>
-            <a:r>
-              <a:rPr sz="950" b="1" i="0">
+              <a:t>rank 对称规模外推</a:t>
+            </a:r>
+          </a:p>
+          <a:p>
+            <a:pPr algn="ctr"/>
+            <a:r>
+              <a:rPr sz="880" b="0" i="0">
                 <a:solidFill>
                   <a:srgbClr val="1B2430"/>
                 </a:solidFill>
@@ -5409,10 +5523,58 @@
                 <a:ea typeface="微软雅黑"/>
                 <a:cs typeface="微软雅黑"/>
               </a:rPr>
-              <a:t>压缩：</a:t>
-            </a:r>
-            <a:r>
-              <a:rPr sz="950" b="0" i="0">
+              <a:t>1K → 100K</a:t>
+            </a:r>
+          </a:p>
+        </p:txBody>
+      </p:sp>
+      <p:sp>
+        <p:nvSpPr>
+          <p:cNvPr id="39" name="Rounded Rectangle 38"/>
+          <p:cNvSpPr/>
+          <p:nvPr/>
+        </p:nvSpPr>
+        <p:spPr>
+          <a:xfrm>
+            <a:off x="7293864" y="2974848"/>
+            <a:ext cx="1336548" cy="399288"/>
+          </a:xfrm>
+          <a:prstGeom prst="roundRect">
+            <a:avLst>
+              <a:gd name="adj" fmla="val 12000"/>
+            </a:avLst>
+          </a:prstGeom>
+          <a:solidFill>
+            <a:srgbClr val="FDF3EA"/>
+          </a:solidFill>
+          <a:ln w="9525">
+            <a:solidFill>
+              <a:srgbClr val="FBE3CF"/>
+            </a:solidFill>
+          </a:ln>
+          <a:effectLst/>
+        </p:spPr>
+        <p:style>
+          <a:lnRef idx="1">
+            <a:schemeClr val="accent1"/>
+          </a:lnRef>
+          <a:fillRef idx="3">
+            <a:schemeClr val="accent1"/>
+          </a:fillRef>
+          <a:effectRef idx="2">
+            <a:schemeClr val="accent1"/>
+          </a:effectRef>
+          <a:fontRef idx="minor">
+            <a:schemeClr val="lt1"/>
+          </a:fontRef>
+        </p:style>
+        <p:txBody>
+          <a:bodyPr rtlCol="0" anchor="ctr" wrap="square" lIns="27432" rIns="27432" tIns="9144" bIns="9144"/>
+          <a:lstStyle/>
+          <a:p>
+            <a:pPr algn="ctr"/>
+            <a:r>
+              <a:rPr sz="880" b="0" i="0">
                 <a:solidFill>
                   <a:srgbClr val="1B2430"/>
                 </a:solidFill>
@@ -5420,111 +5582,84 @@
                 <a:ea typeface="微软雅黑"/>
                 <a:cs typeface="微软雅黑"/>
               </a:rPr>
-              <a:t>代表迭代 + 扰动统计</a:t>
-            </a:r>
-          </a:p>
-          <a:p>
-            <a:pPr algn="l">
-              <a:spcBef>
-                <a:spcPts val="0"/>
-              </a:spcBef>
-              <a:spcAft>
-                <a:spcPts val="250"/>
-              </a:spcAft>
-            </a:pPr>
-            <a:r>
-              <a:rPr sz="950" b="1" i="0">
-                <a:solidFill>
-                  <a:srgbClr val="C45A10"/>
+              <a:t>跨硬件负载重定向</a:t>
+            </a:r>
+          </a:p>
+        </p:txBody>
+      </p:sp>
+      <p:sp>
+        <p:nvSpPr>
+          <p:cNvPr id="40" name="Rounded Rectangle 39"/>
+          <p:cNvSpPr/>
+          <p:nvPr/>
+        </p:nvSpPr>
+        <p:spPr>
+          <a:xfrm>
+            <a:off x="8685276" y="2974848"/>
+            <a:ext cx="1336548" cy="399288"/>
+          </a:xfrm>
+          <a:prstGeom prst="roundRect">
+            <a:avLst>
+              <a:gd name="adj" fmla="val 12000"/>
+            </a:avLst>
+          </a:prstGeom>
+          <a:solidFill>
+            <a:srgbClr val="FDF3EA"/>
+          </a:solidFill>
+          <a:ln w="9525">
+            <a:solidFill>
+              <a:srgbClr val="FBE3CF"/>
+            </a:solidFill>
+          </a:ln>
+          <a:effectLst/>
+        </p:spPr>
+        <p:style>
+          <a:lnRef idx="1">
+            <a:schemeClr val="accent1"/>
+          </a:lnRef>
+          <a:fillRef idx="3">
+            <a:schemeClr val="accent1"/>
+          </a:fillRef>
+          <a:effectRef idx="2">
+            <a:schemeClr val="accent1"/>
+          </a:effectRef>
+          <a:fontRef idx="minor">
+            <a:schemeClr val="lt1"/>
+          </a:fontRef>
+        </p:style>
+        <p:txBody>
+          <a:bodyPr rtlCol="0" anchor="ctr" wrap="square" lIns="27432" rIns="27432" tIns="9144" bIns="9144"/>
+          <a:lstStyle/>
+          <a:p>
+            <a:pPr algn="ctr"/>
+            <a:r>
+              <a:rPr sz="880" b="0" i="0">
+                <a:solidFill>
+                  <a:srgbClr val="1B2430"/>
                 </a:solidFill>
                 <a:latin typeface="微软雅黑"/>
                 <a:ea typeface="微软雅黑"/>
                 <a:cs typeface="微软雅黑"/>
               </a:rPr>
-              <a:t>▪ </a:t>
-            </a:r>
-            <a:r>
-              <a:rPr sz="950" b="1" i="0">
-                <a:solidFill>
-                  <a:srgbClr val="1B2430"/>
-                </a:solidFill>
-                <a:latin typeface="微软雅黑"/>
-                <a:ea typeface="微软雅黑"/>
-                <a:cs typeface="微软雅黑"/>
-              </a:rPr>
-              <a:t>拟合：</a:t>
-            </a:r>
-            <a:r>
-              <a:rPr sz="950" b="0" i="0">
-                <a:solidFill>
-                  <a:srgbClr val="1B2430"/>
-                </a:solidFill>
-                <a:latin typeface="微软雅黑"/>
-                <a:ea typeface="微软雅黑"/>
-                <a:cs typeface="微软雅黑"/>
-              </a:rPr>
-              <a:t>混合分布（EM）+ KS/W1 检验</a:t>
-            </a:r>
-          </a:p>
-          <a:p>
-            <a:pPr algn="l">
-              <a:spcBef>
-                <a:spcPts val="0"/>
-              </a:spcBef>
-              <a:spcAft>
-                <a:spcPts val="250"/>
-              </a:spcAft>
-            </a:pPr>
-            <a:r>
-              <a:rPr sz="950" b="1" i="0">
-                <a:solidFill>
-                  <a:srgbClr val="C45A10"/>
-                </a:solidFill>
-                <a:latin typeface="微软雅黑"/>
-                <a:ea typeface="微软雅黑"/>
-                <a:cs typeface="微软雅黑"/>
-              </a:rPr>
-              <a:t>▪ </a:t>
-            </a:r>
-            <a:r>
-              <a:rPr sz="950" b="1" i="0">
-                <a:solidFill>
-                  <a:srgbClr val="1B2430"/>
-                </a:solidFill>
-                <a:latin typeface="微软雅黑"/>
-                <a:ea typeface="微软雅黑"/>
-                <a:cs typeface="微软雅黑"/>
-              </a:rPr>
-              <a:t>外推：</a:t>
-            </a:r>
-            <a:r>
-              <a:rPr sz="950" b="0" i="0">
-                <a:solidFill>
-                  <a:srgbClr val="1B2430"/>
-                </a:solidFill>
-                <a:latin typeface="微软雅黑"/>
-                <a:ea typeface="微软雅黑"/>
-                <a:cs typeface="微软雅黑"/>
-              </a:rPr>
-              <a:t>千卡→十万卡扩展；跨硬件重定向</a:t>
-            </a:r>
-          </a:p>
-        </p:txBody>
-      </p:sp>
-      <p:sp>
-        <p:nvSpPr>
-          <p:cNvPr id="31" name="Rounded Rectangle 30"/>
+              <a:t>未来模型 what-if 改写</a:t>
+            </a:r>
+          </a:p>
+        </p:txBody>
+      </p:sp>
+      <p:sp>
+        <p:nvSpPr>
+          <p:cNvPr id="41" name="Rounded Rectangle 40"/>
           <p:cNvSpPr/>
           <p:nvPr/>
         </p:nvSpPr>
         <p:spPr>
           <a:xfrm>
-            <a:off x="2706624" y="3410712"/>
-            <a:ext cx="6327648" cy="1097280"/>
+            <a:off x="1371600" y="3511296"/>
+            <a:ext cx="8714232" cy="768096"/>
           </a:xfrm>
           <a:prstGeom prst="roundRect">
             <a:avLst>
-              <a:gd name="adj" fmla="val 5000"/>
+              <a:gd name="adj" fmla="val 8000"/>
             </a:avLst>
           </a:prstGeom>
           <a:solidFill>
@@ -5561,14 +5696,14 @@
       </p:sp>
       <p:sp>
         <p:nvSpPr>
-          <p:cNvPr id="32" name="TextBox 31"/>
+          <p:cNvPr id="42" name="TextBox 41"/>
           <p:cNvSpPr txBox="1"/>
           <p:nvPr/>
         </p:nvSpPr>
         <p:spPr>
           <a:xfrm>
-            <a:off x="2761488" y="3438144"/>
-            <a:ext cx="6327648" cy="274320"/>
+            <a:off x="1426464" y="3511296"/>
+            <a:ext cx="1682496" cy="768096"/>
           </a:xfrm>
           <a:prstGeom prst="rect">
             <a:avLst/>
@@ -5579,7 +5714,7 @@
           <a:bodyPr wrap="square" lIns="45720" rIns="45720" tIns="27432" bIns="27432" anchor="ctr"/>
           <a:lstStyle/>
           <a:p>
-            <a:pPr algn="l">
+            <a:pPr algn="ctr">
               <a:spcBef>
                 <a:spcPts val="0"/>
               </a:spcBef>
@@ -5588,7 +5723,7 @@
               </a:spcAft>
             </a:pPr>
             <a:r>
-              <a:rPr sz="1150" b="1" i="0">
+              <a:rPr sz="1000" b="1" i="0">
                 <a:solidFill>
                   <a:srgbClr val="C45A10"/>
                 </a:solidFill>
@@ -5596,453 +5731,11 @@
                 <a:ea typeface="微软雅黑"/>
                 <a:cs typeface="微软雅黑"/>
               </a:rPr>
-              <a:t>④ </a:t>
-            </a:r>
-            <a:r>
-              <a:rPr sz="1150" b="1" i="0">
-                <a:solidFill>
-                  <a:srgbClr val="1B2430"/>
-                </a:solidFill>
-                <a:latin typeface="微软雅黑"/>
-                <a:ea typeface="微软雅黑"/>
-                <a:cs typeface="微软雅黑"/>
-              </a:rPr>
-              <a:t>负载数据工厂</a:t>
-            </a:r>
-            <a:r>
-              <a:rPr sz="800" b="0" i="0">
-                <a:solidFill>
-                  <a:srgbClr val="5C6B7A"/>
-                </a:solidFill>
-                <a:latin typeface="微软雅黑"/>
-                <a:ea typeface="微软雅黑"/>
-                <a:cs typeface="微软雅黑"/>
-              </a:rPr>
-              <a:t>  Workload Data Factory</a:t>
-            </a:r>
-          </a:p>
-        </p:txBody>
-      </p:sp>
-      <p:sp>
-        <p:nvSpPr>
-          <p:cNvPr id="33" name="Pentagon 32"/>
-          <p:cNvSpPr/>
-          <p:nvPr/>
-        </p:nvSpPr>
-        <p:spPr>
-          <a:xfrm>
-            <a:off x="2779776" y="3739896"/>
-            <a:ext cx="919625" cy="310896"/>
-          </a:xfrm>
-          <a:prstGeom prst="homePlate">
-            <a:avLst>
-              <a:gd name="adj" fmla="val 30000"/>
-            </a:avLst>
-          </a:prstGeom>
-          <a:solidFill>
-            <a:srgbClr val="FBE3CF"/>
-          </a:solidFill>
-          <a:ln>
-            <a:noFill/>
-          </a:ln>
-          <a:effectLst/>
-        </p:spPr>
-        <p:style>
-          <a:lnRef idx="1">
-            <a:schemeClr val="accent1"/>
-          </a:lnRef>
-          <a:fillRef idx="3">
-            <a:schemeClr val="accent1"/>
-          </a:fillRef>
-          <a:effectRef idx="2">
-            <a:schemeClr val="accent1"/>
-          </a:effectRef>
-          <a:fontRef idx="minor">
-            <a:schemeClr val="lt1"/>
-          </a:fontRef>
-        </p:style>
-        <p:txBody>
-          <a:bodyPr rtlCol="0" anchor="ctr" wrap="square" lIns="27432" rIns="27432" tIns="9144" bIns="9144"/>
-          <a:lstStyle/>
-          <a:p>
-            <a:pPr algn="ctr"/>
-            <a:r>
-              <a:rPr sz="830" b="1" i="0">
-                <a:solidFill>
-                  <a:srgbClr val="1B2430"/>
-                </a:solidFill>
-                <a:latin typeface="微软雅黑"/>
-                <a:ea typeface="微软雅黑"/>
-                <a:cs typeface="微软雅黑"/>
-              </a:rPr>
-              <a:t>采集</a:t>
-            </a:r>
-          </a:p>
-        </p:txBody>
-      </p:sp>
-      <p:sp>
-        <p:nvSpPr>
-          <p:cNvPr id="34" name="Chevron 33"/>
-          <p:cNvSpPr/>
-          <p:nvPr/>
-        </p:nvSpPr>
-        <p:spPr>
-          <a:xfrm>
-            <a:off x="3662825" y="3739896"/>
-            <a:ext cx="919625" cy="310896"/>
-          </a:xfrm>
-          <a:prstGeom prst="chevron">
-            <a:avLst>
-              <a:gd name="adj" fmla="val 30000"/>
-            </a:avLst>
-          </a:prstGeom>
-          <a:solidFill>
-            <a:srgbClr val="FBE3CF"/>
-          </a:solidFill>
-          <a:ln>
-            <a:noFill/>
-          </a:ln>
-          <a:effectLst/>
-        </p:spPr>
-        <p:style>
-          <a:lnRef idx="1">
-            <a:schemeClr val="accent1"/>
-          </a:lnRef>
-          <a:fillRef idx="3">
-            <a:schemeClr val="accent1"/>
-          </a:fillRef>
-          <a:effectRef idx="2">
-            <a:schemeClr val="accent1"/>
-          </a:effectRef>
-          <a:fontRef idx="minor">
-            <a:schemeClr val="lt1"/>
-          </a:fontRef>
-        </p:style>
-        <p:txBody>
-          <a:bodyPr rtlCol="0" anchor="ctr" wrap="square" lIns="27432" rIns="27432" tIns="9144" bIns="9144"/>
-          <a:lstStyle/>
-          <a:p>
-            <a:pPr algn="ctr"/>
-            <a:r>
-              <a:rPr sz="830" b="1" i="0">
-                <a:solidFill>
-                  <a:srgbClr val="1B2430"/>
-                </a:solidFill>
-                <a:latin typeface="微软雅黑"/>
-                <a:ea typeface="微软雅黑"/>
-                <a:cs typeface="微软雅黑"/>
-              </a:rPr>
-              <a:t>清洗/脱敏</a:t>
-            </a:r>
-          </a:p>
-        </p:txBody>
-      </p:sp>
-      <p:sp>
-        <p:nvSpPr>
-          <p:cNvPr id="35" name="Chevron 34"/>
-          <p:cNvSpPr/>
-          <p:nvPr/>
-        </p:nvSpPr>
-        <p:spPr>
-          <a:xfrm>
-            <a:off x="4545874" y="3739896"/>
-            <a:ext cx="919625" cy="310896"/>
-          </a:xfrm>
-          <a:prstGeom prst="chevron">
-            <a:avLst>
-              <a:gd name="adj" fmla="val 30000"/>
-            </a:avLst>
-          </a:prstGeom>
-          <a:solidFill>
-            <a:srgbClr val="FBE3CF"/>
-          </a:solidFill>
-          <a:ln>
-            <a:noFill/>
-          </a:ln>
-          <a:effectLst/>
-        </p:spPr>
-        <p:style>
-          <a:lnRef idx="1">
-            <a:schemeClr val="accent1"/>
-          </a:lnRef>
-          <a:fillRef idx="3">
-            <a:schemeClr val="accent1"/>
-          </a:fillRef>
-          <a:effectRef idx="2">
-            <a:schemeClr val="accent1"/>
-          </a:effectRef>
-          <a:fontRef idx="minor">
-            <a:schemeClr val="lt1"/>
-          </a:fontRef>
-        </p:style>
-        <p:txBody>
-          <a:bodyPr rtlCol="0" anchor="ctr" wrap="square" lIns="27432" rIns="27432" tIns="9144" bIns="9144"/>
-          <a:lstStyle/>
-          <a:p>
-            <a:pPr algn="ctr"/>
-            <a:r>
-              <a:rPr sz="830" b="1" i="0">
-                <a:solidFill>
-                  <a:srgbClr val="1B2430"/>
-                </a:solidFill>
-                <a:latin typeface="微软雅黑"/>
-                <a:ea typeface="微软雅黑"/>
-                <a:cs typeface="微软雅黑"/>
-              </a:rPr>
-              <a:t>特征化</a:t>
-            </a:r>
-          </a:p>
-        </p:txBody>
-      </p:sp>
-      <p:sp>
-        <p:nvSpPr>
-          <p:cNvPr id="36" name="Chevron 35"/>
-          <p:cNvSpPr/>
-          <p:nvPr/>
-        </p:nvSpPr>
-        <p:spPr>
-          <a:xfrm>
-            <a:off x="5428923" y="3739896"/>
-            <a:ext cx="919625" cy="310896"/>
-          </a:xfrm>
-          <a:prstGeom prst="chevron">
-            <a:avLst>
-              <a:gd name="adj" fmla="val 30000"/>
-            </a:avLst>
-          </a:prstGeom>
-          <a:solidFill>
-            <a:srgbClr val="C45A10"/>
-          </a:solidFill>
-          <a:ln>
-            <a:noFill/>
-          </a:ln>
-          <a:effectLst/>
-        </p:spPr>
-        <p:style>
-          <a:lnRef idx="1">
-            <a:schemeClr val="accent1"/>
-          </a:lnRef>
-          <a:fillRef idx="3">
-            <a:schemeClr val="accent1"/>
-          </a:fillRef>
-          <a:effectRef idx="2">
-            <a:schemeClr val="accent1"/>
-          </a:effectRef>
-          <a:fontRef idx="minor">
-            <a:schemeClr val="lt1"/>
-          </a:fontRef>
-        </p:style>
-        <p:txBody>
-          <a:bodyPr rtlCol="0" anchor="ctr" wrap="square" lIns="27432" rIns="27432" tIns="9144" bIns="9144"/>
-          <a:lstStyle/>
-          <a:p>
-            <a:pPr algn="ctr"/>
-            <a:r>
-              <a:rPr sz="830" b="1" i="0">
-                <a:solidFill>
-                  <a:srgbClr val="FFFFFF"/>
-                </a:solidFill>
-                <a:latin typeface="微软雅黑"/>
-                <a:ea typeface="微软雅黑"/>
-                <a:cs typeface="微软雅黑"/>
-              </a:rPr>
-              <a:t>统计/生成</a:t>
-            </a:r>
-          </a:p>
-        </p:txBody>
-      </p:sp>
-      <p:sp>
-        <p:nvSpPr>
-          <p:cNvPr id="37" name="Chevron 36"/>
-          <p:cNvSpPr/>
-          <p:nvPr/>
-        </p:nvSpPr>
-        <p:spPr>
-          <a:xfrm>
-            <a:off x="6311972" y="3739896"/>
-            <a:ext cx="919625" cy="310896"/>
-          </a:xfrm>
-          <a:prstGeom prst="chevron">
-            <a:avLst>
-              <a:gd name="adj" fmla="val 30000"/>
-            </a:avLst>
-          </a:prstGeom>
-          <a:solidFill>
-            <a:srgbClr val="FBE3CF"/>
-          </a:solidFill>
-          <a:ln>
-            <a:noFill/>
-          </a:ln>
-          <a:effectLst/>
-        </p:spPr>
-        <p:style>
-          <a:lnRef idx="1">
-            <a:schemeClr val="accent1"/>
-          </a:lnRef>
-          <a:fillRef idx="3">
-            <a:schemeClr val="accent1"/>
-          </a:fillRef>
-          <a:effectRef idx="2">
-            <a:schemeClr val="accent1"/>
-          </a:effectRef>
-          <a:fontRef idx="minor">
-            <a:schemeClr val="lt1"/>
-          </a:fontRef>
-        </p:style>
-        <p:txBody>
-          <a:bodyPr rtlCol="0" anchor="ctr" wrap="square" lIns="27432" rIns="27432" tIns="9144" bIns="9144"/>
-          <a:lstStyle/>
-          <a:p>
-            <a:pPr algn="ctr"/>
-            <a:r>
-              <a:rPr sz="830" b="1" i="0">
-                <a:solidFill>
-                  <a:srgbClr val="1B2430"/>
-                </a:solidFill>
-                <a:latin typeface="微软雅黑"/>
-                <a:ea typeface="微软雅黑"/>
-                <a:cs typeface="微软雅黑"/>
-              </a:rPr>
-              <a:t>合成</a:t>
-            </a:r>
-          </a:p>
-        </p:txBody>
-      </p:sp>
-      <p:sp>
-        <p:nvSpPr>
-          <p:cNvPr id="38" name="Chevron 37"/>
-          <p:cNvSpPr/>
-          <p:nvPr/>
-        </p:nvSpPr>
-        <p:spPr>
-          <a:xfrm>
-            <a:off x="7195021" y="3739896"/>
-            <a:ext cx="919625" cy="310896"/>
-          </a:xfrm>
-          <a:prstGeom prst="chevron">
-            <a:avLst>
-              <a:gd name="adj" fmla="val 30000"/>
-            </a:avLst>
-          </a:prstGeom>
-          <a:solidFill>
-            <a:srgbClr val="C45A10"/>
-          </a:solidFill>
-          <a:ln>
-            <a:noFill/>
-          </a:ln>
-          <a:effectLst/>
-        </p:spPr>
-        <p:style>
-          <a:lnRef idx="1">
-            <a:schemeClr val="accent1"/>
-          </a:lnRef>
-          <a:fillRef idx="3">
-            <a:schemeClr val="accent1"/>
-          </a:fillRef>
-          <a:effectRef idx="2">
-            <a:schemeClr val="accent1"/>
-          </a:effectRef>
-          <a:fontRef idx="minor">
-            <a:schemeClr val="lt1"/>
-          </a:fontRef>
-        </p:style>
-        <p:txBody>
-          <a:bodyPr rtlCol="0" anchor="ctr" wrap="square" lIns="27432" rIns="27432" tIns="9144" bIns="9144"/>
-          <a:lstStyle/>
-          <a:p>
-            <a:pPr algn="ctr"/>
-            <a:r>
-              <a:rPr sz="830" b="1" i="0">
-                <a:solidFill>
-                  <a:srgbClr val="FFFFFF"/>
-                </a:solidFill>
-                <a:latin typeface="微软雅黑"/>
-                <a:ea typeface="微软雅黑"/>
-                <a:cs typeface="微软雅黑"/>
-              </a:rPr>
-              <a:t>保真校验</a:t>
-            </a:r>
-          </a:p>
-        </p:txBody>
-      </p:sp>
-      <p:sp>
-        <p:nvSpPr>
-          <p:cNvPr id="39" name="Chevron 38"/>
-          <p:cNvSpPr/>
-          <p:nvPr/>
-        </p:nvSpPr>
-        <p:spPr>
-          <a:xfrm>
-            <a:off x="8078070" y="3739896"/>
-            <a:ext cx="919625" cy="310896"/>
-          </a:xfrm>
-          <a:prstGeom prst="chevron">
-            <a:avLst>
-              <a:gd name="adj" fmla="val 30000"/>
-            </a:avLst>
-          </a:prstGeom>
-          <a:solidFill>
-            <a:srgbClr val="FBE3CF"/>
-          </a:solidFill>
-          <a:ln>
-            <a:noFill/>
-          </a:ln>
-          <a:effectLst/>
-        </p:spPr>
-        <p:style>
-          <a:lnRef idx="1">
-            <a:schemeClr val="accent1"/>
-          </a:lnRef>
-          <a:fillRef idx="3">
-            <a:schemeClr val="accent1"/>
-          </a:fillRef>
-          <a:effectRef idx="2">
-            <a:schemeClr val="accent1"/>
-          </a:effectRef>
-          <a:fontRef idx="minor">
-            <a:schemeClr val="lt1"/>
-          </a:fontRef>
-        </p:style>
-        <p:txBody>
-          <a:bodyPr rtlCol="0" anchor="ctr" wrap="square" lIns="27432" rIns="27432" tIns="9144" bIns="9144"/>
-          <a:lstStyle/>
-          <a:p>
-            <a:pPr algn="ctr"/>
-            <a:r>
-              <a:rPr sz="830" b="1" i="0">
-                <a:solidFill>
-                  <a:srgbClr val="1B2430"/>
-                </a:solidFill>
-                <a:latin typeface="微软雅黑"/>
-                <a:ea typeface="微软雅黑"/>
-                <a:cs typeface="微软雅黑"/>
-              </a:rPr>
-              <a:t>版本入库</a:t>
-            </a:r>
-          </a:p>
-        </p:txBody>
-      </p:sp>
-      <p:sp>
-        <p:nvSpPr>
-          <p:cNvPr id="40" name="TextBox 39"/>
-          <p:cNvSpPr txBox="1"/>
-          <p:nvPr/>
-        </p:nvSpPr>
-        <p:spPr>
-          <a:xfrm>
-            <a:off x="2761488" y="4087368"/>
-            <a:ext cx="6236208" cy="420624"/>
-          </a:xfrm>
-          <a:prstGeom prst="rect">
-            <a:avLst/>
-          </a:prstGeom>
-          <a:noFill/>
-        </p:spPr>
-        <p:txBody>
-          <a:bodyPr wrap="square" lIns="45720" rIns="45720" tIns="27432" bIns="27432" anchor="t"/>
-          <a:lstStyle/>
-          <a:p>
-            <a:pPr algn="l">
+              <a:t>④ 面向 DSE 的</a:t>
+            </a:r>
+          </a:p>
+          <a:p>
+            <a:pPr algn="ctr">
               <a:spcBef>
                 <a:spcPts val="0"/>
               </a:spcBef>
@@ -6051,7 +5744,7 @@
               </a:spcAft>
             </a:pPr>
             <a:r>
-              <a:rPr sz="880" b="1" i="0">
+              <a:rPr sz="1000" b="1" i="0">
                 <a:solidFill>
                   <a:srgbClr val="C45A10"/>
                 </a:solidFill>
@@ -6059,8 +5752,56 @@
                 <a:ea typeface="微软雅黑"/>
                 <a:cs typeface="微软雅黑"/>
               </a:rPr>
-              <a:t>产出：</a:t>
-            </a:r>
+              <a:t>流水线化负载数据工厂</a:t>
+            </a:r>
+          </a:p>
+        </p:txBody>
+      </p:sp>
+      <p:sp>
+        <p:nvSpPr>
+          <p:cNvPr id="43" name="Pentagon 42"/>
+          <p:cNvSpPr/>
+          <p:nvPr/>
+        </p:nvSpPr>
+        <p:spPr>
+          <a:xfrm>
+            <a:off x="3145536" y="3575304"/>
+            <a:ext cx="1420977" cy="640080"/>
+          </a:xfrm>
+          <a:prstGeom prst="homePlate">
+            <a:avLst>
+              <a:gd name="adj" fmla="val 22000"/>
+            </a:avLst>
+          </a:prstGeom>
+          <a:solidFill>
+            <a:srgbClr val="FDF3EA"/>
+          </a:solidFill>
+          <a:ln w="9525">
+            <a:solidFill>
+              <a:srgbClr val="FBE3CF"/>
+            </a:solidFill>
+          </a:ln>
+          <a:effectLst/>
+        </p:spPr>
+        <p:style>
+          <a:lnRef idx="1">
+            <a:schemeClr val="accent1"/>
+          </a:lnRef>
+          <a:fillRef idx="3">
+            <a:schemeClr val="accent1"/>
+          </a:fillRef>
+          <a:effectRef idx="2">
+            <a:schemeClr val="accent1"/>
+          </a:effectRef>
+          <a:fontRef idx="minor">
+            <a:schemeClr val="lt1"/>
+          </a:fontRef>
+        </p:style>
+        <p:txBody>
+          <a:bodyPr rtlCol="0" anchor="ctr" wrap="square" lIns="27432" rIns="27432" tIns="9144" bIns="9144"/>
+          <a:lstStyle/>
+          <a:p>
+            <a:pPr algn="ctr"/>
             <a:r>
               <a:rPr sz="880" b="0" i="0">
                 <a:solidFill>
@@ -6070,29 +5811,70 @@
                 <a:ea typeface="微软雅黑"/>
                 <a:cs typeface="微软雅黑"/>
               </a:rPr>
-              <a:t>场景化标准负载库：预训练 / RL 后训练 / 在线推理 / PD 分离 / Agent 长上下文 / 训推混部</a:t>
-            </a:r>
-          </a:p>
-          <a:p>
-            <a:pPr algn="l">
-              <a:spcBef>
-                <a:spcPts val="0"/>
-              </a:spcBef>
-              <a:spcAft>
-                <a:spcPts val="250"/>
-              </a:spcAft>
-            </a:pPr>
-            <a:r>
-              <a:rPr sz="880" b="1" i="0">
-                <a:solidFill>
-                  <a:srgbClr val="C45A10"/>
+              <a:t>多源采集</a:t>
+            </a:r>
+          </a:p>
+          <a:p>
+            <a:pPr algn="ctr"/>
+            <a:r>
+              <a:rPr sz="880" b="0" i="0">
+                <a:solidFill>
+                  <a:srgbClr val="1B2430"/>
                 </a:solidFill>
                 <a:latin typeface="微软雅黑"/>
                 <a:ea typeface="微软雅黑"/>
                 <a:cs typeface="微软雅黑"/>
               </a:rPr>
-              <a:t>手段：</a:t>
-            </a:r>
+              <a:t>与脱敏</a:t>
+            </a:r>
+          </a:p>
+        </p:txBody>
+      </p:sp>
+      <p:sp>
+        <p:nvSpPr>
+          <p:cNvPr id="44" name="Chevron 43"/>
+          <p:cNvSpPr/>
+          <p:nvPr/>
+        </p:nvSpPr>
+        <p:spPr>
+          <a:xfrm>
+            <a:off x="4520793" y="3575304"/>
+            <a:ext cx="1420977" cy="640080"/>
+          </a:xfrm>
+          <a:prstGeom prst="chevron">
+            <a:avLst>
+              <a:gd name="adj" fmla="val 22000"/>
+            </a:avLst>
+          </a:prstGeom>
+          <a:solidFill>
+            <a:srgbClr val="FDF3EA"/>
+          </a:solidFill>
+          <a:ln w="9525">
+            <a:solidFill>
+              <a:srgbClr val="FBE3CF"/>
+            </a:solidFill>
+          </a:ln>
+          <a:effectLst/>
+        </p:spPr>
+        <p:style>
+          <a:lnRef idx="1">
+            <a:schemeClr val="accent1"/>
+          </a:lnRef>
+          <a:fillRef idx="3">
+            <a:schemeClr val="accent1"/>
+          </a:fillRef>
+          <a:effectRef idx="2">
+            <a:schemeClr val="accent1"/>
+          </a:effectRef>
+          <a:fontRef idx="minor">
+            <a:schemeClr val="lt1"/>
+          </a:fontRef>
+        </p:style>
+        <p:txBody>
+          <a:bodyPr rtlCol="0" anchor="ctr" wrap="square" lIns="27432" rIns="27432" tIns="9144" bIns="9144"/>
+          <a:lstStyle/>
+          <a:p>
+            <a:pPr algn="ctr"/>
             <a:r>
               <a:rPr sz="880" b="0" i="0">
                 <a:solidFill>
@@ -6102,25 +5884,258 @@
                 <a:ea typeface="微软雅黑"/>
                 <a:cs typeface="微软雅黑"/>
               </a:rPr>
-              <a:t>参数化生成器 + 生成式合成，按「模型×规模×流量」旋钮批量产出 DSE 输入</a:t>
-            </a:r>
-          </a:p>
-        </p:txBody>
-      </p:sp>
-      <p:sp>
-        <p:nvSpPr>
-          <p:cNvPr id="41" name="Rounded Rectangle 40"/>
+              <a:t>负载特征化</a:t>
+            </a:r>
+          </a:p>
+          <a:p>
+            <a:pPr algn="ctr"/>
+            <a:r>
+              <a:rPr sz="880" b="0" i="0">
+                <a:solidFill>
+                  <a:srgbClr val="1B2430"/>
+                </a:solidFill>
+                <a:latin typeface="微软雅黑"/>
+                <a:ea typeface="微软雅黑"/>
+                <a:cs typeface="微软雅黑"/>
+              </a:rPr>
+              <a:t>抽取</a:t>
+            </a:r>
+          </a:p>
+        </p:txBody>
+      </p:sp>
+      <p:sp>
+        <p:nvSpPr>
+          <p:cNvPr id="45" name="Chevron 44"/>
           <p:cNvSpPr/>
           <p:nvPr/>
         </p:nvSpPr>
         <p:spPr>
           <a:xfrm>
-            <a:off x="2706624" y="4581144"/>
-            <a:ext cx="4041648" cy="1216152"/>
+            <a:off x="5896051" y="3575304"/>
+            <a:ext cx="1420977" cy="640080"/>
+          </a:xfrm>
+          <a:prstGeom prst="chevron">
+            <a:avLst>
+              <a:gd name="adj" fmla="val 22000"/>
+            </a:avLst>
+          </a:prstGeom>
+          <a:solidFill>
+            <a:srgbClr val="FDF3EA"/>
+          </a:solidFill>
+          <a:ln w="9525">
+            <a:solidFill>
+              <a:srgbClr val="FBE3CF"/>
+            </a:solidFill>
+          </a:ln>
+          <a:effectLst/>
+        </p:spPr>
+        <p:style>
+          <a:lnRef idx="1">
+            <a:schemeClr val="accent1"/>
+          </a:lnRef>
+          <a:fillRef idx="3">
+            <a:schemeClr val="accent1"/>
+          </a:fillRef>
+          <a:effectRef idx="2">
+            <a:schemeClr val="accent1"/>
+          </a:effectRef>
+          <a:fontRef idx="minor">
+            <a:schemeClr val="lt1"/>
+          </a:fontRef>
+        </p:style>
+        <p:txBody>
+          <a:bodyPr rtlCol="0" anchor="ctr" wrap="square" lIns="27432" rIns="27432" tIns="9144" bIns="9144"/>
+          <a:lstStyle/>
+          <a:p>
+            <a:pPr algn="ctr"/>
+            <a:r>
+              <a:rPr sz="880" b="0" i="0">
+                <a:solidFill>
+                  <a:srgbClr val="1B2430"/>
+                </a:solidFill>
+                <a:latin typeface="微软雅黑"/>
+                <a:ea typeface="微软雅黑"/>
+                <a:cs typeface="微软雅黑"/>
+              </a:rPr>
+              <a:t>参数化 / 生成式</a:t>
+            </a:r>
+          </a:p>
+          <a:p>
+            <a:pPr algn="ctr"/>
+            <a:r>
+              <a:rPr sz="880" b="0" i="0">
+                <a:solidFill>
+                  <a:srgbClr val="1B2430"/>
+                </a:solidFill>
+                <a:latin typeface="微软雅黑"/>
+                <a:ea typeface="微软雅黑"/>
+                <a:cs typeface="微软雅黑"/>
+              </a:rPr>
+              <a:t>负载合成</a:t>
+            </a:r>
+          </a:p>
+        </p:txBody>
+      </p:sp>
+      <p:sp>
+        <p:nvSpPr>
+          <p:cNvPr id="46" name="Chevron 45"/>
+          <p:cNvSpPr/>
+          <p:nvPr/>
+        </p:nvSpPr>
+        <p:spPr>
+          <a:xfrm>
+            <a:off x="7271308" y="3575304"/>
+            <a:ext cx="1420977" cy="640080"/>
+          </a:xfrm>
+          <a:prstGeom prst="chevron">
+            <a:avLst>
+              <a:gd name="adj" fmla="val 22000"/>
+            </a:avLst>
+          </a:prstGeom>
+          <a:solidFill>
+            <a:srgbClr val="FDF3EA"/>
+          </a:solidFill>
+          <a:ln w="9525">
+            <a:solidFill>
+              <a:srgbClr val="FBE3CF"/>
+            </a:solidFill>
+          </a:ln>
+          <a:effectLst/>
+        </p:spPr>
+        <p:style>
+          <a:lnRef idx="1">
+            <a:schemeClr val="accent1"/>
+          </a:lnRef>
+          <a:fillRef idx="3">
+            <a:schemeClr val="accent1"/>
+          </a:fillRef>
+          <a:effectRef idx="2">
+            <a:schemeClr val="accent1"/>
+          </a:effectRef>
+          <a:fontRef idx="minor">
+            <a:schemeClr val="lt1"/>
+          </a:fontRef>
+        </p:style>
+        <p:txBody>
+          <a:bodyPr rtlCol="0" anchor="ctr" wrap="square" lIns="27432" rIns="27432" tIns="9144" bIns="9144"/>
+          <a:lstStyle/>
+          <a:p>
+            <a:pPr algn="ctr"/>
+            <a:r>
+              <a:rPr sz="880" b="0" i="0">
+                <a:solidFill>
+                  <a:srgbClr val="1B2430"/>
+                </a:solidFill>
+                <a:latin typeface="微软雅黑"/>
+                <a:ea typeface="微软雅黑"/>
+                <a:cs typeface="微软雅黑"/>
+              </a:rPr>
+              <a:t>分布 + 效用</a:t>
+            </a:r>
+          </a:p>
+          <a:p>
+            <a:pPr algn="ctr"/>
+            <a:r>
+              <a:rPr sz="880" b="0" i="0">
+                <a:solidFill>
+                  <a:srgbClr val="1B2430"/>
+                </a:solidFill>
+                <a:latin typeface="微软雅黑"/>
+                <a:ea typeface="微软雅黑"/>
+                <a:cs typeface="微软雅黑"/>
+              </a:rPr>
+              <a:t>保真校验</a:t>
+            </a:r>
+          </a:p>
+        </p:txBody>
+      </p:sp>
+      <p:sp>
+        <p:nvSpPr>
+          <p:cNvPr id="47" name="Chevron 46"/>
+          <p:cNvSpPr/>
+          <p:nvPr/>
+        </p:nvSpPr>
+        <p:spPr>
+          <a:xfrm>
+            <a:off x="8646566" y="3575304"/>
+            <a:ext cx="1420977" cy="640080"/>
+          </a:xfrm>
+          <a:prstGeom prst="chevron">
+            <a:avLst>
+              <a:gd name="adj" fmla="val 22000"/>
+            </a:avLst>
+          </a:prstGeom>
+          <a:solidFill>
+            <a:srgbClr val="FDF3EA"/>
+          </a:solidFill>
+          <a:ln w="9525">
+            <a:solidFill>
+              <a:srgbClr val="FBE3CF"/>
+            </a:solidFill>
+          </a:ln>
+          <a:effectLst/>
+        </p:spPr>
+        <p:style>
+          <a:lnRef idx="1">
+            <a:schemeClr val="accent1"/>
+          </a:lnRef>
+          <a:fillRef idx="3">
+            <a:schemeClr val="accent1"/>
+          </a:fillRef>
+          <a:effectRef idx="2">
+            <a:schemeClr val="accent1"/>
+          </a:effectRef>
+          <a:fontRef idx="minor">
+            <a:schemeClr val="lt1"/>
+          </a:fontRef>
+        </p:style>
+        <p:txBody>
+          <a:bodyPr rtlCol="0" anchor="ctr" wrap="square" lIns="27432" rIns="27432" tIns="9144" bIns="9144"/>
+          <a:lstStyle/>
+          <a:p>
+            <a:pPr algn="ctr"/>
+            <a:r>
+              <a:rPr sz="880" b="0" i="0">
+                <a:solidFill>
+                  <a:srgbClr val="1B2430"/>
+                </a:solidFill>
+                <a:latin typeface="微软雅黑"/>
+                <a:ea typeface="微软雅黑"/>
+                <a:cs typeface="微软雅黑"/>
+              </a:rPr>
+              <a:t>场景化负载库</a:t>
+            </a:r>
+          </a:p>
+          <a:p>
+            <a:pPr algn="ctr"/>
+            <a:r>
+              <a:rPr sz="880" b="0" i="0">
+                <a:solidFill>
+                  <a:srgbClr val="1B2430"/>
+                </a:solidFill>
+                <a:latin typeface="微软雅黑"/>
+                <a:ea typeface="微软雅黑"/>
+                <a:cs typeface="微软雅黑"/>
+              </a:rPr>
+              <a:t>版本管理</a:t>
+            </a:r>
+          </a:p>
+        </p:txBody>
+      </p:sp>
+      <p:sp>
+        <p:nvSpPr>
+          <p:cNvPr id="48" name="Rounded Rectangle 47"/>
+          <p:cNvSpPr/>
+          <p:nvPr/>
+        </p:nvSpPr>
+        <p:spPr>
+          <a:xfrm>
+            <a:off x="1371600" y="4352544"/>
+            <a:ext cx="8714232" cy="731520"/>
           </a:xfrm>
           <a:prstGeom prst="roundRect">
             <a:avLst>
-              <a:gd name="adj" fmla="val 5000"/>
+              <a:gd name="adj" fmla="val 8000"/>
             </a:avLst>
           </a:prstGeom>
           <a:solidFill>
@@ -6157,14 +6172,14 @@
       </p:sp>
       <p:sp>
         <p:nvSpPr>
-          <p:cNvPr id="42" name="TextBox 41"/>
+          <p:cNvPr id="49" name="TextBox 48"/>
           <p:cNvSpPr txBox="1"/>
           <p:nvPr/>
         </p:nvSpPr>
         <p:spPr>
           <a:xfrm>
-            <a:off x="2761488" y="4608576"/>
-            <a:ext cx="3950208" cy="1170432"/>
+            <a:off x="1426464" y="4352544"/>
+            <a:ext cx="1682496" cy="731520"/>
           </a:xfrm>
           <a:prstGeom prst="rect">
             <a:avLst/>
@@ -6172,10 +6187,10 @@
           <a:noFill/>
         </p:spPr>
         <p:txBody>
-          <a:bodyPr wrap="square" lIns="45720" rIns="45720" tIns="27432" bIns="27432" anchor="t"/>
-          <a:lstStyle/>
-          <a:p>
-            <a:pPr algn="l">
+          <a:bodyPr wrap="square" lIns="45720" rIns="45720" tIns="27432" bIns="27432" anchor="ctr"/>
+          <a:lstStyle/>
+          <a:p>
+            <a:pPr algn="ctr">
               <a:spcBef>
                 <a:spcPts val="0"/>
               </a:spcBef>
@@ -6184,7 +6199,7 @@
               </a:spcAft>
             </a:pPr>
             <a:r>
-              <a:rPr sz="1150" b="1" i="0">
+              <a:rPr sz="1000" b="1" i="0">
                 <a:solidFill>
                   <a:srgbClr val="C45A10"/>
                 </a:solidFill>
@@ -6192,33 +6207,11 @@
                 <a:ea typeface="微软雅黑"/>
                 <a:cs typeface="微软雅黑"/>
               </a:rPr>
-              <a:t>⑤ </a:t>
-            </a:r>
-            <a:r>
-              <a:rPr sz="1150" b="1" i="0">
-                <a:solidFill>
-                  <a:srgbClr val="1B2430"/>
-                </a:solidFill>
-                <a:latin typeface="微软雅黑"/>
-                <a:ea typeface="微软雅黑"/>
-                <a:cs typeface="微软雅黑"/>
-              </a:rPr>
-              <a:t>统一负载 IR 与多保真导入</a:t>
-            </a:r>
-            <a:r>
-              <a:rPr sz="800" b="0" i="0">
-                <a:solidFill>
-                  <a:srgbClr val="5C6B7A"/>
-                </a:solidFill>
-                <a:latin typeface="微软雅黑"/>
-                <a:ea typeface="微软雅黑"/>
-                <a:cs typeface="微软雅黑"/>
-              </a:rPr>
-              <a:t>  Workload IR</a:t>
-            </a:r>
-          </a:p>
-          <a:p>
-            <a:pPr algn="l">
+              <a:t>⑤ 统一负载 IR</a:t>
+            </a:r>
+          </a:p>
+          <a:p>
+            <a:pPr algn="ctr">
               <a:spcBef>
                 <a:spcPts val="0"/>
               </a:spcBef>
@@ -6227,7 +6220,7 @@
               </a:spcAft>
             </a:pPr>
             <a:r>
-              <a:rPr sz="880" b="1" i="0">
+              <a:rPr sz="1000" b="1" i="0">
                 <a:solidFill>
                   <a:srgbClr val="C45A10"/>
                 </a:solidFill>
@@ -6235,8 +6228,56 @@
                 <a:ea typeface="微软雅黑"/>
                 <a:cs typeface="微软雅黑"/>
               </a:rPr>
-              <a:t>▪ </a:t>
-            </a:r>
+              <a:t>与多保真导入</a:t>
+            </a:r>
+          </a:p>
+        </p:txBody>
+      </p:sp>
+      <p:sp>
+        <p:nvSpPr>
+          <p:cNvPr id="50" name="Rounded Rectangle 49"/>
+          <p:cNvSpPr/>
+          <p:nvPr/>
+        </p:nvSpPr>
+        <p:spPr>
+          <a:xfrm>
+            <a:off x="3145536" y="4416552"/>
+            <a:ext cx="1331366" cy="603504"/>
+          </a:xfrm>
+          <a:prstGeom prst="roundRect">
+            <a:avLst>
+              <a:gd name="adj" fmla="val 12000"/>
+            </a:avLst>
+          </a:prstGeom>
+          <a:solidFill>
+            <a:srgbClr val="FDF3EA"/>
+          </a:solidFill>
+          <a:ln w="9525">
+            <a:solidFill>
+              <a:srgbClr val="FBE3CF"/>
+            </a:solidFill>
+          </a:ln>
+          <a:effectLst/>
+        </p:spPr>
+        <p:style>
+          <a:lnRef idx="1">
+            <a:schemeClr val="accent1"/>
+          </a:lnRef>
+          <a:fillRef idx="3">
+            <a:schemeClr val="accent1"/>
+          </a:fillRef>
+          <a:effectRef idx="2">
+            <a:schemeClr val="accent1"/>
+          </a:effectRef>
+          <a:fontRef idx="minor">
+            <a:schemeClr val="lt1"/>
+          </a:fontRef>
+        </p:style>
+        <p:txBody>
+          <a:bodyPr rtlCol="0" anchor="ctr" wrap="square" lIns="27432" rIns="27432" tIns="9144" bIns="9144"/>
+          <a:lstStyle/>
+          <a:p>
+            <a:pPr algn="ctr"/>
             <a:r>
               <a:rPr sz="880" b="0" i="0">
                 <a:solidFill>
@@ -6246,29 +6287,70 @@
                 <a:ea typeface="微软雅黑"/>
                 <a:cs typeface="微软雅黑"/>
               </a:rPr>
-              <a:t>硬件无关执行图 IR（兼容 Chakra ET）：计算/通信/访存节点+依赖</a:t>
-            </a:r>
-          </a:p>
-          <a:p>
-            <a:pPr algn="l">
-              <a:spcBef>
-                <a:spcPts val="0"/>
-              </a:spcBef>
-              <a:spcAft>
-                <a:spcPts val="250"/>
-              </a:spcAft>
-            </a:pPr>
-            <a:r>
-              <a:rPr sz="880" b="1" i="0">
-                <a:solidFill>
-                  <a:srgbClr val="C45A10"/>
+              <a:t>硬件无关执行图 IR</a:t>
+            </a:r>
+          </a:p>
+          <a:p>
+            <a:pPr algn="ctr"/>
+            <a:r>
+              <a:rPr sz="880" b="0" i="0">
+                <a:solidFill>
+                  <a:srgbClr val="1B2430"/>
                 </a:solidFill>
                 <a:latin typeface="微软雅黑"/>
                 <a:ea typeface="微软雅黑"/>
                 <a:cs typeface="微软雅黑"/>
               </a:rPr>
-              <a:t>▪ </a:t>
-            </a:r>
+              <a:t>兼容 Chakra ET</a:t>
+            </a:r>
+          </a:p>
+        </p:txBody>
+      </p:sp>
+      <p:sp>
+        <p:nvSpPr>
+          <p:cNvPr id="51" name="Rounded Rectangle 50"/>
+          <p:cNvSpPr/>
+          <p:nvPr/>
+        </p:nvSpPr>
+        <p:spPr>
+          <a:xfrm>
+            <a:off x="4531766" y="4416552"/>
+            <a:ext cx="1331366" cy="603504"/>
+          </a:xfrm>
+          <a:prstGeom prst="roundRect">
+            <a:avLst>
+              <a:gd name="adj" fmla="val 12000"/>
+            </a:avLst>
+          </a:prstGeom>
+          <a:solidFill>
+            <a:srgbClr val="FDF3EA"/>
+          </a:solidFill>
+          <a:ln w="9525">
+            <a:solidFill>
+              <a:srgbClr val="FBE3CF"/>
+            </a:solidFill>
+          </a:ln>
+          <a:effectLst/>
+        </p:spPr>
+        <p:style>
+          <a:lnRef idx="1">
+            <a:schemeClr val="accent1"/>
+          </a:lnRef>
+          <a:fillRef idx="3">
+            <a:schemeClr val="accent1"/>
+          </a:fillRef>
+          <a:effectRef idx="2">
+            <a:schemeClr val="accent1"/>
+          </a:effectRef>
+          <a:fontRef idx="minor">
+            <a:schemeClr val="lt1"/>
+          </a:fontRef>
+        </p:style>
+        <p:txBody>
+          <a:bodyPr rtlCol="0" anchor="ctr" wrap="square" lIns="27432" rIns="27432" tIns="9144" bIns="9144"/>
+          <a:lstStyle/>
+          <a:p>
+            <a:pPr algn="ctr"/>
             <a:r>
               <a:rPr sz="880" b="0" i="0">
                 <a:solidFill>
@@ -6278,29 +6360,70 @@
                 <a:ea typeface="微软雅黑"/>
                 <a:cs typeface="微软雅黑"/>
               </a:rPr>
-              <a:t>L0 解析 → L1 算子图 → L2 包级，热点按需提升保真度</a:t>
-            </a:r>
-          </a:p>
-          <a:p>
-            <a:pPr algn="l">
-              <a:spcBef>
-                <a:spcPts val="0"/>
-              </a:spcBef>
-              <a:spcAft>
-                <a:spcPts val="250"/>
-              </a:spcAft>
-            </a:pPr>
-            <a:r>
-              <a:rPr sz="880" b="1" i="0">
-                <a:solidFill>
-                  <a:srgbClr val="C45A10"/>
+              <a:t>L0 解析 / L1 算子图</a:t>
+            </a:r>
+          </a:p>
+          <a:p>
+            <a:pPr algn="ctr"/>
+            <a:r>
+              <a:rPr sz="880" b="0" i="0">
+                <a:solidFill>
+                  <a:srgbClr val="1B2430"/>
                 </a:solidFill>
                 <a:latin typeface="微软雅黑"/>
                 <a:ea typeface="微软雅黑"/>
                 <a:cs typeface="微软雅黑"/>
               </a:rPr>
-              <a:t>▪ </a:t>
-            </a:r>
+              <a:t>/ L2 包级切换</a:t>
+            </a:r>
+          </a:p>
+        </p:txBody>
+      </p:sp>
+      <p:sp>
+        <p:nvSpPr>
+          <p:cNvPr id="52" name="Rounded Rectangle 51"/>
+          <p:cNvSpPr/>
+          <p:nvPr/>
+        </p:nvSpPr>
+        <p:spPr>
+          <a:xfrm>
+            <a:off x="5917996" y="4416552"/>
+            <a:ext cx="1331366" cy="603504"/>
+          </a:xfrm>
+          <a:prstGeom prst="roundRect">
+            <a:avLst>
+              <a:gd name="adj" fmla="val 12000"/>
+            </a:avLst>
+          </a:prstGeom>
+          <a:solidFill>
+            <a:srgbClr val="FDF3EA"/>
+          </a:solidFill>
+          <a:ln w="9525">
+            <a:solidFill>
+              <a:srgbClr val="FBE3CF"/>
+            </a:solidFill>
+          </a:ln>
+          <a:effectLst/>
+        </p:spPr>
+        <p:style>
+          <a:lnRef idx="1">
+            <a:schemeClr val="accent1"/>
+          </a:lnRef>
+          <a:fillRef idx="3">
+            <a:schemeClr val="accent1"/>
+          </a:fillRef>
+          <a:effectRef idx="2">
+            <a:schemeClr val="accent1"/>
+          </a:effectRef>
+          <a:fontRef idx="minor">
+            <a:schemeClr val="lt1"/>
+          </a:fontRef>
+        </p:style>
+        <p:txBody>
+          <a:bodyPr rtlCol="0" anchor="ctr" wrap="square" lIns="27432" rIns="27432" tIns="9144" bIns="9144"/>
+          <a:lstStyle/>
+          <a:p>
+            <a:pPr algn="ctr"/>
             <a:r>
               <a:rPr sz="880" b="0" i="0">
                 <a:solidFill>
@@ -6310,25 +6433,185 @@
                 <a:ea typeface="微软雅黑"/>
                 <a:cs typeface="微软雅黑"/>
               </a:rPr>
-              <a:t>集合通信分解为流下发网络仿真；访存/KV 流量下发内存仿真</a:t>
-            </a:r>
-          </a:p>
-        </p:txBody>
-      </p:sp>
-      <p:sp>
-        <p:nvSpPr>
-          <p:cNvPr id="43" name="Rounded Rectangle 42"/>
+              <a:t>集合通信</a:t>
+            </a:r>
+          </a:p>
+          <a:p>
+            <a:pPr algn="ctr"/>
+            <a:r>
+              <a:rPr sz="880" b="0" i="0">
+                <a:solidFill>
+                  <a:srgbClr val="1B2430"/>
+                </a:solidFill>
+                <a:latin typeface="微软雅黑"/>
+                <a:ea typeface="微软雅黑"/>
+                <a:cs typeface="微软雅黑"/>
+              </a:rPr>
+              <a:t>分解为网络流</a:t>
+            </a:r>
+          </a:p>
+        </p:txBody>
+      </p:sp>
+      <p:sp>
+        <p:nvSpPr>
+          <p:cNvPr id="53" name="Rounded Rectangle 52"/>
           <p:cNvSpPr/>
           <p:nvPr/>
         </p:nvSpPr>
         <p:spPr>
           <a:xfrm>
-            <a:off x="6821424" y="4581144"/>
-            <a:ext cx="2212848" cy="1216152"/>
+            <a:off x="7304227" y="4416552"/>
+            <a:ext cx="1331366" cy="603504"/>
           </a:xfrm>
           <a:prstGeom prst="roundRect">
             <a:avLst>
-              <a:gd name="adj" fmla="val 5000"/>
+              <a:gd name="adj" fmla="val 12000"/>
+            </a:avLst>
+          </a:prstGeom>
+          <a:solidFill>
+            <a:srgbClr val="FDF3EA"/>
+          </a:solidFill>
+          <a:ln w="9525">
+            <a:solidFill>
+              <a:srgbClr val="FBE3CF"/>
+            </a:solidFill>
+          </a:ln>
+          <a:effectLst/>
+        </p:spPr>
+        <p:style>
+          <a:lnRef idx="1">
+            <a:schemeClr val="accent1"/>
+          </a:lnRef>
+          <a:fillRef idx="3">
+            <a:schemeClr val="accent1"/>
+          </a:fillRef>
+          <a:effectRef idx="2">
+            <a:schemeClr val="accent1"/>
+          </a:effectRef>
+          <a:fontRef idx="minor">
+            <a:schemeClr val="lt1"/>
+          </a:fontRef>
+        </p:style>
+        <p:txBody>
+          <a:bodyPr rtlCol="0" anchor="ctr" wrap="square" lIns="27432" rIns="27432" tIns="9144" bIns="9144"/>
+          <a:lstStyle/>
+          <a:p>
+            <a:pPr algn="ctr"/>
+            <a:r>
+              <a:rPr sz="880" b="0" i="0">
+                <a:solidFill>
+                  <a:srgbClr val="1B2430"/>
+                </a:solidFill>
+                <a:latin typeface="微软雅黑"/>
+                <a:ea typeface="微软雅黑"/>
+                <a:cs typeface="微软雅黑"/>
+              </a:rPr>
+              <a:t>访存与 KV 流量</a:t>
+            </a:r>
+          </a:p>
+          <a:p>
+            <a:pPr algn="ctr"/>
+            <a:r>
+              <a:rPr sz="880" b="0" i="0">
+                <a:solidFill>
+                  <a:srgbClr val="1B2430"/>
+                </a:solidFill>
+                <a:latin typeface="微软雅黑"/>
+                <a:ea typeface="微软雅黑"/>
+                <a:cs typeface="微软雅黑"/>
+              </a:rPr>
+              <a:t>映射内存仿真</a:t>
+            </a:r>
+          </a:p>
+        </p:txBody>
+      </p:sp>
+      <p:sp>
+        <p:nvSpPr>
+          <p:cNvPr id="54" name="Rounded Rectangle 53"/>
+          <p:cNvSpPr/>
+          <p:nvPr/>
+        </p:nvSpPr>
+        <p:spPr>
+          <a:xfrm>
+            <a:off x="8690457" y="4416552"/>
+            <a:ext cx="1331366" cy="603504"/>
+          </a:xfrm>
+          <a:prstGeom prst="roundRect">
+            <a:avLst>
+              <a:gd name="adj" fmla="val 12000"/>
+            </a:avLst>
+          </a:prstGeom>
+          <a:solidFill>
+            <a:srgbClr val="FDF3EA"/>
+          </a:solidFill>
+          <a:ln w="9525">
+            <a:solidFill>
+              <a:srgbClr val="FBE3CF"/>
+            </a:solidFill>
+          </a:ln>
+          <a:effectLst/>
+        </p:spPr>
+        <p:style>
+          <a:lnRef idx="1">
+            <a:schemeClr val="accent1"/>
+          </a:lnRef>
+          <a:fillRef idx="3">
+            <a:schemeClr val="accent1"/>
+          </a:fillRef>
+          <a:effectRef idx="2">
+            <a:schemeClr val="accent1"/>
+          </a:effectRef>
+          <a:fontRef idx="minor">
+            <a:schemeClr val="lt1"/>
+          </a:fontRef>
+        </p:style>
+        <p:txBody>
+          <a:bodyPr rtlCol="0" anchor="ctr" wrap="square" lIns="27432" rIns="27432" tIns="9144" bIns="9144"/>
+          <a:lstStyle/>
+          <a:p>
+            <a:pPr algn="ctr"/>
+            <a:r>
+              <a:rPr sz="880" b="0" i="0">
+                <a:solidFill>
+                  <a:srgbClr val="1B2430"/>
+                </a:solidFill>
+                <a:latin typeface="微软雅黑"/>
+                <a:ea typeface="微软雅黑"/>
+                <a:cs typeface="微软雅黑"/>
+              </a:rPr>
+              <a:t>代表迭代</a:t>
+            </a:r>
+          </a:p>
+          <a:p>
+            <a:pPr algn="ctr"/>
+            <a:r>
+              <a:rPr sz="880" b="0" i="0">
+                <a:solidFill>
+                  <a:srgbClr val="1B2430"/>
+                </a:solidFill>
+                <a:latin typeface="微软雅黑"/>
+                <a:ea typeface="微软雅黑"/>
+                <a:cs typeface="微软雅黑"/>
+              </a:rPr>
+              <a:t>采样加速</a:t>
+            </a:r>
+          </a:p>
+        </p:txBody>
+      </p:sp>
+      <p:sp>
+        <p:nvSpPr>
+          <p:cNvPr id="55" name="Rounded Rectangle 54"/>
+          <p:cNvSpPr/>
+          <p:nvPr/>
+        </p:nvSpPr>
+        <p:spPr>
+          <a:xfrm>
+            <a:off x="10158984" y="1773936"/>
+            <a:ext cx="1627632" cy="3310128"/>
+          </a:xfrm>
+          <a:prstGeom prst="roundRect">
+            <a:avLst>
+              <a:gd name="adj" fmla="val 4000"/>
             </a:avLst>
           </a:prstGeom>
           <a:solidFill>
@@ -6365,14 +6648,14 @@
       </p:sp>
       <p:sp>
         <p:nvSpPr>
-          <p:cNvPr id="44" name="TextBox 43"/>
+          <p:cNvPr id="56" name="TextBox 55"/>
           <p:cNvSpPr txBox="1"/>
           <p:nvPr/>
         </p:nvSpPr>
         <p:spPr>
           <a:xfrm>
-            <a:off x="6876288" y="4608576"/>
-            <a:ext cx="2121408" cy="1170432"/>
+            <a:off x="10195560" y="1801368"/>
+            <a:ext cx="1554480" cy="457200"/>
           </a:xfrm>
           <a:prstGeom prst="rect">
             <a:avLst/>
@@ -6380,10 +6663,10 @@
           <a:noFill/>
         </p:spPr>
         <p:txBody>
-          <a:bodyPr wrap="square" lIns="45720" rIns="45720" tIns="27432" bIns="27432" anchor="t"/>
-          <a:lstStyle/>
-          <a:p>
-            <a:pPr algn="l">
+          <a:bodyPr wrap="square" lIns="45720" rIns="45720" tIns="27432" bIns="27432" anchor="ctr"/>
+          <a:lstStyle/>
+          <a:p>
+            <a:pPr algn="ctr">
               <a:spcBef>
                 <a:spcPts val="0"/>
               </a:spcBef>
@@ -6392,7 +6675,7 @@
               </a:spcAft>
             </a:pPr>
             <a:r>
-              <a:rPr sz="1150" b="1" i="0">
+              <a:rPr sz="1000" b="1" i="0">
                 <a:solidFill>
                   <a:srgbClr val="C45A10"/>
                 </a:solidFill>
@@ -6400,33 +6683,11 @@
                 <a:ea typeface="微软雅黑"/>
                 <a:cs typeface="微软雅黑"/>
               </a:rPr>
-              <a:t>⑥ </a:t>
-            </a:r>
-            <a:r>
-              <a:rPr sz="1150" b="1" i="0">
-                <a:solidFill>
-                  <a:srgbClr val="1B2430"/>
-                </a:solidFill>
-                <a:latin typeface="微软雅黑"/>
-                <a:ea typeface="微软雅黑"/>
-                <a:cs typeface="微软雅黑"/>
-              </a:rPr>
-              <a:t>闭环校准</a:t>
-            </a:r>
-            <a:r>
-              <a:rPr sz="800" b="0" i="0">
-                <a:solidFill>
-                  <a:srgbClr val="5C6B7A"/>
-                </a:solidFill>
-                <a:latin typeface="微软雅黑"/>
-                <a:ea typeface="微软雅黑"/>
-                <a:cs typeface="微软雅黑"/>
-              </a:rPr>
-              <a:t>  Calibration</a:t>
-            </a:r>
-          </a:p>
-          <a:p>
-            <a:pPr algn="l">
+              <a:t>⑥ 基于实测对标的</a:t>
+            </a:r>
+          </a:p>
+          <a:p>
+            <a:pPr algn="ctr">
               <a:spcBef>
                 <a:spcPts val="0"/>
               </a:spcBef>
@@ -6435,7 +6696,7 @@
               </a:spcAft>
             </a:pPr>
             <a:r>
-              <a:rPr sz="880" b="1" i="0">
+              <a:rPr sz="1000" b="1" i="0">
                 <a:solidFill>
                   <a:srgbClr val="C45A10"/>
                 </a:solidFill>
@@ -6443,8 +6704,56 @@
                 <a:ea typeface="微软雅黑"/>
                 <a:cs typeface="微软雅黑"/>
               </a:rPr>
-              <a:t>▪ </a:t>
-            </a:r>
+              <a:t>闭环校准</a:t>
+            </a:r>
+          </a:p>
+        </p:txBody>
+      </p:sp>
+      <p:sp>
+        <p:nvSpPr>
+          <p:cNvPr id="57" name="Rounded Rectangle 56"/>
+          <p:cNvSpPr/>
+          <p:nvPr/>
+        </p:nvSpPr>
+        <p:spPr>
+          <a:xfrm>
+            <a:off x="10222992" y="2304288"/>
+            <a:ext cx="1499616" cy="499262"/>
+          </a:xfrm>
+          <a:prstGeom prst="roundRect">
+            <a:avLst>
+              <a:gd name="adj" fmla="val 12000"/>
+            </a:avLst>
+          </a:prstGeom>
+          <a:solidFill>
+            <a:srgbClr val="FDF3EA"/>
+          </a:solidFill>
+          <a:ln w="9525">
+            <a:solidFill>
+              <a:srgbClr val="FBE3CF"/>
+            </a:solidFill>
+          </a:ln>
+          <a:effectLst/>
+        </p:spPr>
+        <p:style>
+          <a:lnRef idx="1">
+            <a:schemeClr val="accent1"/>
+          </a:lnRef>
+          <a:fillRef idx="3">
+            <a:schemeClr val="accent1"/>
+          </a:fillRef>
+          <a:effectRef idx="2">
+            <a:schemeClr val="accent1"/>
+          </a:effectRef>
+          <a:fontRef idx="minor">
+            <a:schemeClr val="lt1"/>
+          </a:fontRef>
+        </p:style>
+        <p:txBody>
+          <a:bodyPr rtlCol="0" anchor="ctr" wrap="square" lIns="27432" rIns="27432" tIns="9144" bIns="9144"/>
+          <a:lstStyle/>
+          <a:p>
+            <a:pPr algn="ctr"/>
             <a:r>
               <a:rPr sz="880" b="0" i="0">
                 <a:solidFill>
@@ -6454,11 +6763,406 @@
                 <a:ea typeface="微软雅黑"/>
                 <a:cs typeface="微软雅黑"/>
               </a:rPr>
-              <a:t>小规模实测对标，误差回灌代价模型</a:t>
-            </a:r>
-          </a:p>
-          <a:p>
-            <a:pPr algn="l">
+              <a:t>小规模集群实测对标</a:t>
+            </a:r>
+          </a:p>
+        </p:txBody>
+      </p:sp>
+      <p:sp>
+        <p:nvSpPr>
+          <p:cNvPr id="58" name="Rounded Rectangle 57"/>
+          <p:cNvSpPr/>
+          <p:nvPr/>
+        </p:nvSpPr>
+        <p:spPr>
+          <a:xfrm>
+            <a:off x="10222992" y="2858414"/>
+            <a:ext cx="1499616" cy="499262"/>
+          </a:xfrm>
+          <a:prstGeom prst="roundRect">
+            <a:avLst>
+              <a:gd name="adj" fmla="val 12000"/>
+            </a:avLst>
+          </a:prstGeom>
+          <a:solidFill>
+            <a:srgbClr val="FDF3EA"/>
+          </a:solidFill>
+          <a:ln w="9525">
+            <a:solidFill>
+              <a:srgbClr val="FBE3CF"/>
+            </a:solidFill>
+          </a:ln>
+          <a:effectLst/>
+        </p:spPr>
+        <p:style>
+          <a:lnRef idx="1">
+            <a:schemeClr val="accent1"/>
+          </a:lnRef>
+          <a:fillRef idx="3">
+            <a:schemeClr val="accent1"/>
+          </a:fillRef>
+          <a:effectRef idx="2">
+            <a:schemeClr val="accent1"/>
+          </a:effectRef>
+          <a:fontRef idx="minor">
+            <a:schemeClr val="lt1"/>
+          </a:fontRef>
+        </p:style>
+        <p:txBody>
+          <a:bodyPr rtlCol="0" anchor="ctr" wrap="square" lIns="27432" rIns="27432" tIns="9144" bIns="9144"/>
+          <a:lstStyle/>
+          <a:p>
+            <a:pPr algn="ctr"/>
+            <a:r>
+              <a:rPr sz="880" b="0" i="0">
+                <a:solidFill>
+                  <a:srgbClr val="1B2430"/>
+                </a:solidFill>
+                <a:latin typeface="微软雅黑"/>
+                <a:ea typeface="微软雅黑"/>
+                <a:cs typeface="微软雅黑"/>
+              </a:rPr>
+              <a:t>分层误差归因</a:t>
+            </a:r>
+          </a:p>
+        </p:txBody>
+      </p:sp>
+      <p:sp>
+        <p:nvSpPr>
+          <p:cNvPr id="59" name="Rounded Rectangle 58"/>
+          <p:cNvSpPr/>
+          <p:nvPr/>
+        </p:nvSpPr>
+        <p:spPr>
+          <a:xfrm>
+            <a:off x="10222992" y="3412540"/>
+            <a:ext cx="1499616" cy="499262"/>
+          </a:xfrm>
+          <a:prstGeom prst="roundRect">
+            <a:avLst>
+              <a:gd name="adj" fmla="val 12000"/>
+            </a:avLst>
+          </a:prstGeom>
+          <a:solidFill>
+            <a:srgbClr val="FDF3EA"/>
+          </a:solidFill>
+          <a:ln w="9525">
+            <a:solidFill>
+              <a:srgbClr val="FBE3CF"/>
+            </a:solidFill>
+          </a:ln>
+          <a:effectLst/>
+        </p:spPr>
+        <p:style>
+          <a:lnRef idx="1">
+            <a:schemeClr val="accent1"/>
+          </a:lnRef>
+          <a:fillRef idx="3">
+            <a:schemeClr val="accent1"/>
+          </a:fillRef>
+          <a:effectRef idx="2">
+            <a:schemeClr val="accent1"/>
+          </a:effectRef>
+          <a:fontRef idx="minor">
+            <a:schemeClr val="lt1"/>
+          </a:fontRef>
+        </p:style>
+        <p:txBody>
+          <a:bodyPr rtlCol="0" anchor="ctr" wrap="square" lIns="27432" rIns="27432" tIns="9144" bIns="9144"/>
+          <a:lstStyle/>
+          <a:p>
+            <a:pPr algn="ctr"/>
+            <a:r>
+              <a:rPr sz="880" b="0" i="0">
+                <a:solidFill>
+                  <a:srgbClr val="1B2430"/>
+                </a:solidFill>
+                <a:latin typeface="微软雅黑"/>
+                <a:ea typeface="微软雅黑"/>
+                <a:cs typeface="微软雅黑"/>
+              </a:rPr>
+              <a:t>代价模型系数回灌</a:t>
+            </a:r>
+          </a:p>
+        </p:txBody>
+      </p:sp>
+      <p:sp>
+        <p:nvSpPr>
+          <p:cNvPr id="60" name="Rounded Rectangle 59"/>
+          <p:cNvSpPr/>
+          <p:nvPr/>
+        </p:nvSpPr>
+        <p:spPr>
+          <a:xfrm>
+            <a:off x="10222992" y="3966667"/>
+            <a:ext cx="1499616" cy="499262"/>
+          </a:xfrm>
+          <a:prstGeom prst="roundRect">
+            <a:avLst>
+              <a:gd name="adj" fmla="val 12000"/>
+            </a:avLst>
+          </a:prstGeom>
+          <a:solidFill>
+            <a:srgbClr val="FDF3EA"/>
+          </a:solidFill>
+          <a:ln w="9525">
+            <a:solidFill>
+              <a:srgbClr val="FBE3CF"/>
+            </a:solidFill>
+          </a:ln>
+          <a:effectLst/>
+        </p:spPr>
+        <p:style>
+          <a:lnRef idx="1">
+            <a:schemeClr val="accent1"/>
+          </a:lnRef>
+          <a:fillRef idx="3">
+            <a:schemeClr val="accent1"/>
+          </a:fillRef>
+          <a:effectRef idx="2">
+            <a:schemeClr val="accent1"/>
+          </a:effectRef>
+          <a:fontRef idx="minor">
+            <a:schemeClr val="lt1"/>
+          </a:fontRef>
+        </p:style>
+        <p:txBody>
+          <a:bodyPr rtlCol="0" anchor="ctr" wrap="square" lIns="27432" rIns="27432" tIns="9144" bIns="9144"/>
+          <a:lstStyle/>
+          <a:p>
+            <a:pPr algn="ctr"/>
+            <a:r>
+              <a:rPr sz="880" b="0" i="0">
+                <a:solidFill>
+                  <a:srgbClr val="1B2430"/>
+                </a:solidFill>
+                <a:latin typeface="微软雅黑"/>
+                <a:ea typeface="微软雅黑"/>
+                <a:cs typeface="微软雅黑"/>
+              </a:rPr>
+              <a:t>分布保真评估</a:t>
+            </a:r>
+          </a:p>
+        </p:txBody>
+      </p:sp>
+      <p:sp>
+        <p:nvSpPr>
+          <p:cNvPr id="61" name="Rounded Rectangle 60"/>
+          <p:cNvSpPr/>
+          <p:nvPr/>
+        </p:nvSpPr>
+        <p:spPr>
+          <a:xfrm>
+            <a:off x="10222992" y="4520793"/>
+            <a:ext cx="1499616" cy="499262"/>
+          </a:xfrm>
+          <a:prstGeom prst="roundRect">
+            <a:avLst>
+              <a:gd name="adj" fmla="val 12000"/>
+            </a:avLst>
+          </a:prstGeom>
+          <a:solidFill>
+            <a:srgbClr val="FDF3EA"/>
+          </a:solidFill>
+          <a:ln w="9525">
+            <a:solidFill>
+              <a:srgbClr val="FBE3CF"/>
+            </a:solidFill>
+          </a:ln>
+          <a:effectLst/>
+        </p:spPr>
+        <p:style>
+          <a:lnRef idx="1">
+            <a:schemeClr val="accent1"/>
+          </a:lnRef>
+          <a:fillRef idx="3">
+            <a:schemeClr val="accent1"/>
+          </a:fillRef>
+          <a:effectRef idx="2">
+            <a:schemeClr val="accent1"/>
+          </a:effectRef>
+          <a:fontRef idx="minor">
+            <a:schemeClr val="lt1"/>
+          </a:fontRef>
+        </p:style>
+        <p:txBody>
+          <a:bodyPr rtlCol="0" anchor="ctr" wrap="square" lIns="27432" rIns="27432" tIns="9144" bIns="9144"/>
+          <a:lstStyle/>
+          <a:p>
+            <a:pPr algn="ctr"/>
+            <a:r>
+              <a:rPr sz="880" b="0" i="0">
+                <a:solidFill>
+                  <a:srgbClr val="1B2430"/>
+                </a:solidFill>
+                <a:latin typeface="微软雅黑"/>
+                <a:ea typeface="微软雅黑"/>
+                <a:cs typeface="微软雅黑"/>
+              </a:rPr>
+              <a:t>效用保真评估</a:t>
+            </a:r>
+          </a:p>
+        </p:txBody>
+      </p:sp>
+      <p:sp>
+        <p:nvSpPr>
+          <p:cNvPr id="62" name="Down Arrow 61"/>
+          <p:cNvSpPr/>
+          <p:nvPr/>
+        </p:nvSpPr>
+        <p:spPr>
+          <a:xfrm>
+            <a:off x="5582412" y="5184648"/>
+            <a:ext cx="292608" cy="128016"/>
+          </a:xfrm>
+          <a:prstGeom prst="downArrow">
+            <a:avLst>
+              <a:gd name="adj1" fmla="val 50000"/>
+              <a:gd name="adj2" fmla="val 50000"/>
+            </a:avLst>
+          </a:prstGeom>
+          <a:solidFill>
+            <a:srgbClr val="7A8896"/>
+          </a:solidFill>
+          <a:ln>
+            <a:noFill/>
+          </a:ln>
+          <a:effectLst/>
+        </p:spPr>
+        <p:style>
+          <a:lnRef idx="1">
+            <a:schemeClr val="accent1"/>
+          </a:lnRef>
+          <a:fillRef idx="3">
+            <a:schemeClr val="accent1"/>
+          </a:fillRef>
+          <a:effectRef idx="2">
+            <a:schemeClr val="accent1"/>
+          </a:effectRef>
+          <a:fontRef idx="minor">
+            <a:schemeClr val="lt1"/>
+          </a:fontRef>
+        </p:style>
+        <p:txBody>
+          <a:bodyPr rtlCol="0" anchor="ctr"/>
+          <a:lstStyle/>
+          <a:p>
+            <a:pPr algn="ctr"/>
+          </a:p>
+        </p:txBody>
+      </p:sp>
+      <p:sp>
+        <p:nvSpPr>
+          <p:cNvPr id="63" name="Up Arrow 62"/>
+          <p:cNvSpPr/>
+          <p:nvPr/>
+        </p:nvSpPr>
+        <p:spPr>
+          <a:xfrm>
+            <a:off x="10826496" y="5184648"/>
+            <a:ext cx="292608" cy="128016"/>
+          </a:xfrm>
+          <a:prstGeom prst="upArrow">
+            <a:avLst>
+              <a:gd name="adj1" fmla="val 50000"/>
+              <a:gd name="adj2" fmla="val 50000"/>
+            </a:avLst>
+          </a:prstGeom>
+          <a:solidFill>
+            <a:srgbClr val="C45A10"/>
+          </a:solidFill>
+          <a:ln>
+            <a:noFill/>
+          </a:ln>
+          <a:effectLst/>
+        </p:spPr>
+        <p:style>
+          <a:lnRef idx="1">
+            <a:schemeClr val="accent1"/>
+          </a:lnRef>
+          <a:fillRef idx="3">
+            <a:schemeClr val="accent1"/>
+          </a:fillRef>
+          <a:effectRef idx="2">
+            <a:schemeClr val="accent1"/>
+          </a:effectRef>
+          <a:fontRef idx="minor">
+            <a:schemeClr val="lt1"/>
+          </a:fontRef>
+        </p:style>
+        <p:txBody>
+          <a:bodyPr rtlCol="0" anchor="ctr"/>
+          <a:lstStyle/>
+          <a:p>
+            <a:pPr algn="ctr"/>
+          </a:p>
+        </p:txBody>
+      </p:sp>
+      <p:sp>
+        <p:nvSpPr>
+          <p:cNvPr id="64" name="Rectangle 63"/>
+          <p:cNvSpPr/>
+          <p:nvPr/>
+        </p:nvSpPr>
+        <p:spPr>
+          <a:xfrm>
+            <a:off x="329184" y="5340096"/>
+            <a:ext cx="896112" cy="420624"/>
+          </a:xfrm>
+          <a:prstGeom prst="rect">
+            <a:avLst/>
+          </a:prstGeom>
+          <a:solidFill>
+            <a:srgbClr val="5C6B7A"/>
+          </a:solidFill>
+          <a:ln>
+            <a:noFill/>
+          </a:ln>
+          <a:effectLst/>
+        </p:spPr>
+        <p:style>
+          <a:lnRef idx="1">
+            <a:schemeClr val="accent1"/>
+          </a:lnRef>
+          <a:fillRef idx="3">
+            <a:schemeClr val="accent1"/>
+          </a:fillRef>
+          <a:effectRef idx="2">
+            <a:schemeClr val="accent1"/>
+          </a:effectRef>
+          <a:fontRef idx="minor">
+            <a:schemeClr val="lt1"/>
+          </a:fontRef>
+        </p:style>
+        <p:txBody>
+          <a:bodyPr rtlCol="0" anchor="ctr"/>
+          <a:lstStyle/>
+          <a:p>
+            <a:pPr algn="ctr"/>
+          </a:p>
+        </p:txBody>
+      </p:sp>
+      <p:sp>
+        <p:nvSpPr>
+          <p:cNvPr id="65" name="TextBox 64"/>
+          <p:cNvSpPr txBox="1"/>
+          <p:nvPr/>
+        </p:nvSpPr>
+        <p:spPr>
+          <a:xfrm>
+            <a:off x="329184" y="5340096"/>
+            <a:ext cx="896112" cy="420624"/>
+          </a:xfrm>
+          <a:prstGeom prst="rect">
+            <a:avLst/>
+          </a:prstGeom>
+          <a:noFill/>
+        </p:spPr>
+        <p:txBody>
+          <a:bodyPr wrap="square" lIns="45720" rIns="45720" tIns="27432" bIns="27432" anchor="ctr"/>
+          <a:lstStyle/>
+          <a:p>
+            <a:pPr algn="ctr">
               <a:spcBef>
                 <a:spcPts val="0"/>
               </a:spcBef>
@@ -6467,109 +7171,19 @@
               </a:spcAft>
             </a:pPr>
             <a:r>
-              <a:rPr sz="880" b="1" i="0">
-                <a:solidFill>
-                  <a:srgbClr val="C45A10"/>
+              <a:rPr sz="1050" b="1" i="0">
+                <a:solidFill>
+                  <a:srgbClr val="FFFFFF"/>
                 </a:solidFill>
                 <a:latin typeface="微软雅黑"/>
                 <a:ea typeface="微软雅黑"/>
                 <a:cs typeface="微软雅黑"/>
               </a:rPr>
-              <a:t>▪ </a:t>
-            </a:r>
-            <a:r>
-              <a:rPr sz="880" b="1" i="0">
-                <a:solidFill>
-                  <a:srgbClr val="1B2430"/>
-                </a:solidFill>
-                <a:latin typeface="微软雅黑"/>
-                <a:ea typeface="微软雅黑"/>
-                <a:cs typeface="微软雅黑"/>
-              </a:rPr>
-              <a:t>双保真：</a:t>
-            </a:r>
-            <a:r>
-              <a:rPr sz="880" b="0" i="0">
-                <a:solidFill>
-                  <a:srgbClr val="1B2430"/>
-                </a:solidFill>
-                <a:latin typeface="微软雅黑"/>
-                <a:ea typeface="微软雅黑"/>
-                <a:cs typeface="微软雅黑"/>
-              </a:rPr>
-              <a:t>分布保真 + 效用保真（结论一致）</a:t>
-            </a:r>
-          </a:p>
-        </p:txBody>
-      </p:sp>
-      <p:sp>
-        <p:nvSpPr>
-          <p:cNvPr id="45" name="Right Arrow 44"/>
-          <p:cNvSpPr/>
-          <p:nvPr/>
-        </p:nvSpPr>
-        <p:spPr>
-          <a:xfrm>
-            <a:off x="9162288" y="3246120"/>
-            <a:ext cx="219456" cy="384048"/>
-          </a:xfrm>
-          <a:prstGeom prst="rightArrow">
-            <a:avLst>
-              <a:gd name="adj1" fmla="val 50000"/>
-              <a:gd name="adj2" fmla="val 50000"/>
-            </a:avLst>
-          </a:prstGeom>
-          <a:solidFill>
-            <a:srgbClr val="C45A10"/>
-          </a:solidFill>
-          <a:ln>
-            <a:noFill/>
-          </a:ln>
-          <a:effectLst/>
-        </p:spPr>
-        <p:style>
-          <a:lnRef idx="1">
-            <a:schemeClr val="accent1"/>
-          </a:lnRef>
-          <a:fillRef idx="3">
-            <a:schemeClr val="accent1"/>
-          </a:fillRef>
-          <a:effectRef idx="2">
-            <a:schemeClr val="accent1"/>
-          </a:effectRef>
-          <a:fontRef idx="minor">
-            <a:schemeClr val="lt1"/>
-          </a:fontRef>
-        </p:style>
-        <p:txBody>
-          <a:bodyPr rtlCol="0" anchor="ctr"/>
-          <a:lstStyle/>
-          <a:p>
-            <a:pPr algn="ctr"/>
-          </a:p>
-        </p:txBody>
-      </p:sp>
-      <p:sp>
-        <p:nvSpPr>
-          <p:cNvPr id="46" name="TextBox 45"/>
-          <p:cNvSpPr txBox="1"/>
-          <p:nvPr/>
-        </p:nvSpPr>
-        <p:spPr>
-          <a:xfrm>
-            <a:off x="9418320" y="1143000"/>
-            <a:ext cx="2441448" cy="256032"/>
-          </a:xfrm>
-          <a:prstGeom prst="rect">
-            <a:avLst/>
-          </a:prstGeom>
-          <a:noFill/>
-        </p:spPr>
-        <p:txBody>
-          <a:bodyPr wrap="square" lIns="45720" rIns="45720" tIns="27432" bIns="27432" anchor="t"/>
-          <a:lstStyle/>
-          <a:p>
-            <a:pPr algn="l">
+              <a:t>仿真内核</a:t>
+            </a:r>
+          </a:p>
+          <a:p>
+            <a:pPr algn="ctr">
               <a:spcBef>
                 <a:spcPts val="0"/>
               </a:spcBef>
@@ -6578,44 +7192,33 @@
               </a:spcAft>
             </a:pPr>
             <a:r>
-              <a:rPr sz="1150" b="1" i="0">
-                <a:solidFill>
-                  <a:srgbClr val="123E6E"/>
+              <a:rPr sz="800" b="0" i="0">
+                <a:solidFill>
+                  <a:srgbClr val="FFFFFF"/>
                 </a:solidFill>
                 <a:latin typeface="微软雅黑"/>
                 <a:ea typeface="微软雅黑"/>
                 <a:cs typeface="微软雅黑"/>
               </a:rPr>
-              <a:t>底层仿真内核</a:t>
-            </a:r>
-            <a:r>
-              <a:rPr sz="900" b="1" i="0">
-                <a:solidFill>
-                  <a:srgbClr val="3D862C"/>
-                </a:solidFill>
-                <a:latin typeface="微软雅黑"/>
-                <a:ea typeface="微软雅黑"/>
-                <a:cs typeface="微软雅黑"/>
-              </a:rPr>
-              <a:t>  已具备</a:t>
-            </a:r>
-          </a:p>
-        </p:txBody>
-      </p:sp>
-      <p:sp>
-        <p:nvSpPr>
-          <p:cNvPr id="47" name="Rounded Rectangle 46"/>
+              <a:t>已具备</a:t>
+            </a:r>
+          </a:p>
+        </p:txBody>
+      </p:sp>
+      <p:sp>
+        <p:nvSpPr>
+          <p:cNvPr id="66" name="Rounded Rectangle 65"/>
           <p:cNvSpPr/>
           <p:nvPr/>
         </p:nvSpPr>
         <p:spPr>
           <a:xfrm>
-            <a:off x="9418320" y="1417320"/>
-            <a:ext cx="777240" cy="384048"/>
+            <a:off x="1298448" y="5340096"/>
+            <a:ext cx="3471672" cy="420624"/>
           </a:xfrm>
           <a:prstGeom prst="roundRect">
             <a:avLst>
-              <a:gd name="adj" fmla="val 15000"/>
+              <a:gd name="adj" fmla="val 12000"/>
             </a:avLst>
           </a:prstGeom>
           <a:solidFill>
@@ -6648,9 +7251,9 @@
           <a:p>
             <a:pPr algn="ctr"/>
             <a:r>
-              <a:rPr sz="880" b="1" i="0">
-                <a:solidFill>
-                  <a:srgbClr val="5C6B7A"/>
+              <a:rPr sz="1000" b="0" i="0">
+                <a:solidFill>
+                  <a:srgbClr val="1B2430"/>
                 </a:solidFill>
                 <a:latin typeface="微软雅黑"/>
                 <a:ea typeface="微软雅黑"/>
@@ -6663,18 +7266,18 @@
       </p:sp>
       <p:sp>
         <p:nvSpPr>
-          <p:cNvPr id="48" name="Rounded Rectangle 47"/>
+          <p:cNvPr id="67" name="Rounded Rectangle 66"/>
           <p:cNvSpPr/>
           <p:nvPr/>
         </p:nvSpPr>
         <p:spPr>
           <a:xfrm>
-            <a:off x="10250424" y="1417320"/>
-            <a:ext cx="777240" cy="384048"/>
+            <a:off x="4843272" y="5340096"/>
+            <a:ext cx="3471672" cy="420624"/>
           </a:xfrm>
           <a:prstGeom prst="roundRect">
             <a:avLst>
-              <a:gd name="adj" fmla="val 15000"/>
+              <a:gd name="adj" fmla="val 12000"/>
             </a:avLst>
           </a:prstGeom>
           <a:solidFill>
@@ -6707,33 +7310,33 @@
           <a:p>
             <a:pPr algn="ctr"/>
             <a:r>
-              <a:rPr sz="880" b="1" i="0">
-                <a:solidFill>
-                  <a:srgbClr val="5C6B7A"/>
+              <a:rPr sz="1000" b="0" i="0">
+                <a:solidFill>
+                  <a:srgbClr val="1B2430"/>
                 </a:solidFill>
                 <a:latin typeface="微软雅黑"/>
                 <a:ea typeface="微软雅黑"/>
                 <a:cs typeface="微软雅黑"/>
               </a:rPr>
-              <a:t>内存/存储</a:t>
-            </a:r>
-          </a:p>
-        </p:txBody>
-      </p:sp>
-      <p:sp>
-        <p:nvSpPr>
-          <p:cNvPr id="49" name="Rounded Rectangle 48"/>
+              <a:t>内存 / 存储仿真</a:t>
+            </a:r>
+          </a:p>
+        </p:txBody>
+      </p:sp>
+      <p:sp>
+        <p:nvSpPr>
+          <p:cNvPr id="68" name="Rounded Rectangle 67"/>
           <p:cNvSpPr/>
           <p:nvPr/>
         </p:nvSpPr>
         <p:spPr>
           <a:xfrm>
-            <a:off x="11082528" y="1417320"/>
-            <a:ext cx="777240" cy="384048"/>
+            <a:off x="8388096" y="5340096"/>
+            <a:ext cx="3471672" cy="420624"/>
           </a:xfrm>
           <a:prstGeom prst="roundRect">
             <a:avLst>
-              <a:gd name="adj" fmla="val 15000"/>
+              <a:gd name="adj" fmla="val 12000"/>
             </a:avLst>
           </a:prstGeom>
           <a:solidFill>
@@ -6766,9 +7369,9 @@
           <a:p>
             <a:pPr algn="ctr"/>
             <a:r>
-              <a:rPr sz="880" b="1" i="0">
-                <a:solidFill>
-                  <a:srgbClr val="5C6B7A"/>
+              <a:rPr sz="1000" b="0" i="0">
+                <a:solidFill>
+                  <a:srgbClr val="1B2430"/>
                 </a:solidFill>
                 <a:latin typeface="微软雅黑"/>
                 <a:ea typeface="微软雅黑"/>
@@ -6781,14 +7384,105 @@
       </p:sp>
       <p:sp>
         <p:nvSpPr>
-          <p:cNvPr id="50" name="TextBox 49"/>
+          <p:cNvPr id="69" name="Down Arrow 68"/>
+          <p:cNvSpPr/>
+          <p:nvPr/>
+        </p:nvSpPr>
+        <p:spPr>
+          <a:xfrm>
+            <a:off x="6432804" y="5788152"/>
+            <a:ext cx="292608" cy="128016"/>
+          </a:xfrm>
+          <a:prstGeom prst="downArrow">
+            <a:avLst>
+              <a:gd name="adj1" fmla="val 50000"/>
+              <a:gd name="adj2" fmla="val 50000"/>
+            </a:avLst>
+          </a:prstGeom>
+          <a:solidFill>
+            <a:srgbClr val="7A8896"/>
+          </a:solidFill>
+          <a:ln>
+            <a:noFill/>
+          </a:ln>
+          <a:effectLst/>
+        </p:spPr>
+        <p:style>
+          <a:lnRef idx="1">
+            <a:schemeClr val="accent1"/>
+          </a:lnRef>
+          <a:fillRef idx="3">
+            <a:schemeClr val="accent1"/>
+          </a:fillRef>
+          <a:effectRef idx="2">
+            <a:schemeClr val="accent1"/>
+          </a:effectRef>
+          <a:fontRef idx="minor">
+            <a:schemeClr val="lt1"/>
+          </a:fontRef>
+        </p:style>
+        <p:txBody>
+          <a:bodyPr rtlCol="0" anchor="ctr"/>
+          <a:lstStyle/>
+          <a:p>
+            <a:pPr algn="ctr"/>
+          </a:p>
+        </p:txBody>
+      </p:sp>
+      <p:sp>
+        <p:nvSpPr>
+          <p:cNvPr id="70" name="Rectangle 69"/>
+          <p:cNvSpPr/>
+          <p:nvPr/>
+        </p:nvSpPr>
+        <p:spPr>
+          <a:xfrm>
+            <a:off x="329184" y="5943600"/>
+            <a:ext cx="896112" cy="420624"/>
+          </a:xfrm>
+          <a:prstGeom prst="rect">
+            <a:avLst/>
+          </a:prstGeom>
+          <a:solidFill>
+            <a:srgbClr val="3D862C"/>
+          </a:solidFill>
+          <a:ln>
+            <a:noFill/>
+          </a:ln>
+          <a:effectLst/>
+        </p:spPr>
+        <p:style>
+          <a:lnRef idx="1">
+            <a:schemeClr val="accent1"/>
+          </a:lnRef>
+          <a:fillRef idx="3">
+            <a:schemeClr val="accent1"/>
+          </a:fillRef>
+          <a:effectRef idx="2">
+            <a:schemeClr val="accent1"/>
+          </a:effectRef>
+          <a:fontRef idx="minor">
+            <a:schemeClr val="lt1"/>
+          </a:fontRef>
+        </p:style>
+        <p:txBody>
+          <a:bodyPr rtlCol="0" anchor="ctr"/>
+          <a:lstStyle/>
+          <a:p>
+            <a:pPr algn="ctr"/>
+          </a:p>
+        </p:txBody>
+      </p:sp>
+      <p:sp>
+        <p:nvSpPr>
+          <p:cNvPr id="71" name="TextBox 70"/>
           <p:cNvSpPr txBox="1"/>
           <p:nvPr/>
         </p:nvSpPr>
         <p:spPr>
           <a:xfrm>
-            <a:off x="9418320" y="1911096"/>
-            <a:ext cx="2441448" cy="256032"/>
+            <a:off x="329184" y="5943600"/>
+            <a:ext cx="896112" cy="420624"/>
           </a:xfrm>
           <a:prstGeom prst="rect">
             <a:avLst/>
@@ -6796,7 +7490,443 @@
           <a:noFill/>
         </p:spPr>
         <p:txBody>
-          <a:bodyPr wrap="square" lIns="45720" rIns="45720" tIns="27432" bIns="27432" anchor="t"/>
+          <a:bodyPr wrap="square" lIns="45720" rIns="45720" tIns="27432" bIns="27432" anchor="ctr"/>
+          <a:lstStyle/>
+          <a:p>
+            <a:pPr algn="ctr">
+              <a:spcBef>
+                <a:spcPts val="0"/>
+              </a:spcBef>
+              <a:spcAft>
+                <a:spcPts val="250"/>
+              </a:spcAft>
+            </a:pPr>
+            <a:r>
+              <a:rPr sz="1050" b="1" i="0">
+                <a:solidFill>
+                  <a:srgbClr val="FFFFFF"/>
+                </a:solidFill>
+                <a:latin typeface="微软雅黑"/>
+                <a:ea typeface="微软雅黑"/>
+                <a:cs typeface="微软雅黑"/>
+              </a:rPr>
+              <a:t>设计输出</a:t>
+            </a:r>
+          </a:p>
+          <a:p>
+            <a:pPr algn="ctr">
+              <a:spcBef>
+                <a:spcPts val="0"/>
+              </a:spcBef>
+              <a:spcAft>
+                <a:spcPts val="250"/>
+              </a:spcAft>
+            </a:pPr>
+            <a:r>
+              <a:rPr sz="800" b="0" i="0">
+                <a:solidFill>
+                  <a:srgbClr val="FFFFFF"/>
+                </a:solidFill>
+                <a:latin typeface="微软雅黑"/>
+                <a:ea typeface="微软雅黑"/>
+                <a:cs typeface="微软雅黑"/>
+              </a:rPr>
+              <a:t>DSE</a:t>
+            </a:r>
+          </a:p>
+        </p:txBody>
+      </p:sp>
+      <p:sp>
+        <p:nvSpPr>
+          <p:cNvPr id="72" name="Rounded Rectangle 71"/>
+          <p:cNvSpPr/>
+          <p:nvPr/>
+        </p:nvSpPr>
+        <p:spPr>
+          <a:xfrm>
+            <a:off x="1298448" y="5943600"/>
+            <a:ext cx="2053742" cy="420624"/>
+          </a:xfrm>
+          <a:prstGeom prst="roundRect">
+            <a:avLst>
+              <a:gd name="adj" fmla="val 12000"/>
+            </a:avLst>
+          </a:prstGeom>
+          <a:solidFill>
+            <a:srgbClr val="E8F3E2"/>
+          </a:solidFill>
+          <a:ln>
+            <a:noFill/>
+          </a:ln>
+          <a:effectLst/>
+        </p:spPr>
+        <p:style>
+          <a:lnRef idx="1">
+            <a:schemeClr val="accent1"/>
+          </a:lnRef>
+          <a:fillRef idx="3">
+            <a:schemeClr val="accent1"/>
+          </a:fillRef>
+          <a:effectRef idx="2">
+            <a:schemeClr val="accent1"/>
+          </a:effectRef>
+          <a:fontRef idx="minor">
+            <a:schemeClr val="lt1"/>
+          </a:fontRef>
+        </p:style>
+        <p:txBody>
+          <a:bodyPr rtlCol="0" anchor="ctr" wrap="square" lIns="27432" rIns="27432" tIns="9144" bIns="9144"/>
+          <a:lstStyle/>
+          <a:p>
+            <a:pPr algn="ctr"/>
+            <a:r>
+              <a:rPr sz="950" b="0" i="0">
+                <a:solidFill>
+                  <a:srgbClr val="1B2430"/>
+                </a:solidFill>
+                <a:latin typeface="微软雅黑"/>
+                <a:ea typeface="微软雅黑"/>
+                <a:cs typeface="微软雅黑"/>
+              </a:rPr>
+              <a:t>超节点规模与组网拓扑</a:t>
+            </a:r>
+          </a:p>
+        </p:txBody>
+      </p:sp>
+      <p:sp>
+        <p:nvSpPr>
+          <p:cNvPr id="73" name="Rounded Rectangle 72"/>
+          <p:cNvSpPr/>
+          <p:nvPr/>
+        </p:nvSpPr>
+        <p:spPr>
+          <a:xfrm>
+            <a:off x="3425342" y="5943600"/>
+            <a:ext cx="2053742" cy="420624"/>
+          </a:xfrm>
+          <a:prstGeom prst="roundRect">
+            <a:avLst>
+              <a:gd name="adj" fmla="val 12000"/>
+            </a:avLst>
+          </a:prstGeom>
+          <a:solidFill>
+            <a:srgbClr val="E8F3E2"/>
+          </a:solidFill>
+          <a:ln>
+            <a:noFill/>
+          </a:ln>
+          <a:effectLst/>
+        </p:spPr>
+        <p:style>
+          <a:lnRef idx="1">
+            <a:schemeClr val="accent1"/>
+          </a:lnRef>
+          <a:fillRef idx="3">
+            <a:schemeClr val="accent1"/>
+          </a:fillRef>
+          <a:effectRef idx="2">
+            <a:schemeClr val="accent1"/>
+          </a:effectRef>
+          <a:fontRef idx="minor">
+            <a:schemeClr val="lt1"/>
+          </a:fontRef>
+        </p:style>
+        <p:txBody>
+          <a:bodyPr rtlCol="0" anchor="ctr" wrap="square" lIns="27432" rIns="27432" tIns="9144" bIns="9144"/>
+          <a:lstStyle/>
+          <a:p>
+            <a:pPr algn="ctr"/>
+            <a:r>
+              <a:rPr sz="950" b="0" i="0">
+                <a:solidFill>
+                  <a:srgbClr val="1B2430"/>
+                </a:solidFill>
+                <a:latin typeface="微软雅黑"/>
+                <a:ea typeface="微软雅黑"/>
+                <a:cs typeface="微软雅黑"/>
+              </a:rPr>
+              <a:t>Scale-up / Scale-out 带宽配比</a:t>
+            </a:r>
+          </a:p>
+        </p:txBody>
+      </p:sp>
+      <p:sp>
+        <p:nvSpPr>
+          <p:cNvPr id="74" name="Rounded Rectangle 73"/>
+          <p:cNvSpPr/>
+          <p:nvPr/>
+        </p:nvSpPr>
+        <p:spPr>
+          <a:xfrm>
+            <a:off x="5552236" y="5943600"/>
+            <a:ext cx="2053742" cy="420624"/>
+          </a:xfrm>
+          <a:prstGeom prst="roundRect">
+            <a:avLst>
+              <a:gd name="adj" fmla="val 12000"/>
+            </a:avLst>
+          </a:prstGeom>
+          <a:solidFill>
+            <a:srgbClr val="E8F3E2"/>
+          </a:solidFill>
+          <a:ln>
+            <a:noFill/>
+          </a:ln>
+          <a:effectLst/>
+        </p:spPr>
+        <p:style>
+          <a:lnRef idx="1">
+            <a:schemeClr val="accent1"/>
+          </a:lnRef>
+          <a:fillRef idx="3">
+            <a:schemeClr val="accent1"/>
+          </a:fillRef>
+          <a:effectRef idx="2">
+            <a:schemeClr val="accent1"/>
+          </a:effectRef>
+          <a:fontRef idx="minor">
+            <a:schemeClr val="lt1"/>
+          </a:fontRef>
+        </p:style>
+        <p:txBody>
+          <a:bodyPr rtlCol="0" anchor="ctr" wrap="square" lIns="27432" rIns="27432" tIns="9144" bIns="9144"/>
+          <a:lstStyle/>
+          <a:p>
+            <a:pPr algn="ctr"/>
+            <a:r>
+              <a:rPr sz="950" b="0" i="0">
+                <a:solidFill>
+                  <a:srgbClr val="1B2430"/>
+                </a:solidFill>
+                <a:latin typeface="微软雅黑"/>
+                <a:ea typeface="微软雅黑"/>
+                <a:cs typeface="微软雅黑"/>
+              </a:rPr>
+              <a:t>HBM / 池化内存 / 存储层级容量</a:t>
+            </a:r>
+          </a:p>
+        </p:txBody>
+      </p:sp>
+      <p:sp>
+        <p:nvSpPr>
+          <p:cNvPr id="75" name="Rounded Rectangle 74"/>
+          <p:cNvSpPr/>
+          <p:nvPr/>
+        </p:nvSpPr>
+        <p:spPr>
+          <a:xfrm>
+            <a:off x="7679131" y="5943600"/>
+            <a:ext cx="2053742" cy="420624"/>
+          </a:xfrm>
+          <a:prstGeom prst="roundRect">
+            <a:avLst>
+              <a:gd name="adj" fmla="val 12000"/>
+            </a:avLst>
+          </a:prstGeom>
+          <a:solidFill>
+            <a:srgbClr val="E8F3E2"/>
+          </a:solidFill>
+          <a:ln>
+            <a:noFill/>
+          </a:ln>
+          <a:effectLst/>
+        </p:spPr>
+        <p:style>
+          <a:lnRef idx="1">
+            <a:schemeClr val="accent1"/>
+          </a:lnRef>
+          <a:fillRef idx="3">
+            <a:schemeClr val="accent1"/>
+          </a:fillRef>
+          <a:effectRef idx="2">
+            <a:schemeClr val="accent1"/>
+          </a:effectRef>
+          <a:fontRef idx="minor">
+            <a:schemeClr val="lt1"/>
+          </a:fontRef>
+        </p:style>
+        <p:txBody>
+          <a:bodyPr rtlCol="0" anchor="ctr" wrap="square" lIns="27432" rIns="27432" tIns="9144" bIns="9144"/>
+          <a:lstStyle/>
+          <a:p>
+            <a:pPr algn="ctr"/>
+            <a:r>
+              <a:rPr sz="950" b="0" i="0">
+                <a:solidFill>
+                  <a:srgbClr val="1B2430"/>
+                </a:solidFill>
+                <a:latin typeface="微软雅黑"/>
+                <a:ea typeface="微软雅黑"/>
+                <a:cs typeface="微软雅黑"/>
+              </a:rPr>
+              <a:t>PD 配比与并行策略</a:t>
+            </a:r>
+          </a:p>
+        </p:txBody>
+      </p:sp>
+      <p:sp>
+        <p:nvSpPr>
+          <p:cNvPr id="76" name="Rounded Rectangle 75"/>
+          <p:cNvSpPr/>
+          <p:nvPr/>
+        </p:nvSpPr>
+        <p:spPr>
+          <a:xfrm>
+            <a:off x="9806025" y="5943600"/>
+            <a:ext cx="2053742" cy="420624"/>
+          </a:xfrm>
+          <a:prstGeom prst="roundRect">
+            <a:avLst>
+              <a:gd name="adj" fmla="val 12000"/>
+            </a:avLst>
+          </a:prstGeom>
+          <a:solidFill>
+            <a:srgbClr val="E8F3E2"/>
+          </a:solidFill>
+          <a:ln>
+            <a:noFill/>
+          </a:ln>
+          <a:effectLst/>
+        </p:spPr>
+        <p:style>
+          <a:lnRef idx="1">
+            <a:schemeClr val="accent1"/>
+          </a:lnRef>
+          <a:fillRef idx="3">
+            <a:schemeClr val="accent1"/>
+          </a:fillRef>
+          <a:effectRef idx="2">
+            <a:schemeClr val="accent1"/>
+          </a:effectRef>
+          <a:fontRef idx="minor">
+            <a:schemeClr val="lt1"/>
+          </a:fontRef>
+        </p:style>
+        <p:txBody>
+          <a:bodyPr rtlCol="0" anchor="ctr" wrap="square" lIns="27432" rIns="27432" tIns="9144" bIns="9144"/>
+          <a:lstStyle/>
+          <a:p>
+            <a:pPr algn="ctr"/>
+            <a:r>
+              <a:rPr sz="950" b="0" i="0">
+                <a:solidFill>
+                  <a:srgbClr val="1B2430"/>
+                </a:solidFill>
+                <a:latin typeface="微软雅黑"/>
+                <a:ea typeface="微软雅黑"/>
+                <a:cs typeface="微软雅黑"/>
+              </a:rPr>
+              <a:t>瓶颈定位与 TCO / 能效评估</a:t>
+            </a:r>
+          </a:p>
+        </p:txBody>
+      </p:sp>
+      <p:sp>
+        <p:nvSpPr>
+          <p:cNvPr id="77" name="Rectangle 76"/>
+          <p:cNvSpPr/>
+          <p:nvPr/>
+        </p:nvSpPr>
+        <p:spPr>
+          <a:xfrm>
+            <a:off x="0" y="6638544"/>
+            <a:ext cx="12191695" cy="219456"/>
+          </a:xfrm>
+          <a:prstGeom prst="rect">
+            <a:avLst/>
+          </a:prstGeom>
+          <a:solidFill>
+            <a:srgbClr val="E9ECF0"/>
+          </a:solidFill>
+          <a:ln>
+            <a:noFill/>
+          </a:ln>
+          <a:effectLst/>
+        </p:spPr>
+        <p:style>
+          <a:lnRef idx="1">
+            <a:schemeClr val="accent1"/>
+          </a:lnRef>
+          <a:fillRef idx="3">
+            <a:schemeClr val="accent1"/>
+          </a:fillRef>
+          <a:effectRef idx="2">
+            <a:schemeClr val="accent1"/>
+          </a:effectRef>
+          <a:fontRef idx="minor">
+            <a:schemeClr val="lt1"/>
+          </a:fontRef>
+        </p:style>
+        <p:txBody>
+          <a:bodyPr rtlCol="0" anchor="ctr"/>
+          <a:lstStyle/>
+          <a:p>
+            <a:pPr algn="ctr"/>
+          </a:p>
+        </p:txBody>
+      </p:sp>
+      <p:sp>
+        <p:nvSpPr>
+          <p:cNvPr id="78" name="Rectangle 77"/>
+          <p:cNvSpPr/>
+          <p:nvPr/>
+        </p:nvSpPr>
+        <p:spPr>
+          <a:xfrm>
+            <a:off x="0" y="6638544"/>
+            <a:ext cx="146304" cy="219456"/>
+          </a:xfrm>
+          <a:prstGeom prst="rect">
+            <a:avLst/>
+          </a:prstGeom>
+          <a:solidFill>
+            <a:srgbClr val="1A5FA8"/>
+          </a:solidFill>
+          <a:ln>
+            <a:noFill/>
+          </a:ln>
+          <a:effectLst/>
+        </p:spPr>
+        <p:style>
+          <a:lnRef idx="1">
+            <a:schemeClr val="accent1"/>
+          </a:lnRef>
+          <a:fillRef idx="3">
+            <a:schemeClr val="accent1"/>
+          </a:fillRef>
+          <a:effectRef idx="2">
+            <a:schemeClr val="accent1"/>
+          </a:effectRef>
+          <a:fontRef idx="minor">
+            <a:schemeClr val="lt1"/>
+          </a:fontRef>
+        </p:style>
+        <p:txBody>
+          <a:bodyPr rtlCol="0" anchor="ctr"/>
+          <a:lstStyle/>
+          <a:p>
+            <a:pPr algn="ctr"/>
+          </a:p>
+        </p:txBody>
+      </p:sp>
+      <p:sp>
+        <p:nvSpPr>
+          <p:cNvPr id="79" name="TextBox 78"/>
+          <p:cNvSpPr txBox="1"/>
+          <p:nvPr/>
+        </p:nvSpPr>
+        <p:spPr>
+          <a:xfrm>
+            <a:off x="329184" y="6638544"/>
+            <a:ext cx="10058400" cy="219456"/>
+          </a:xfrm>
+          <a:prstGeom prst="rect">
+            <a:avLst/>
+          </a:prstGeom>
+          <a:noFill/>
+        </p:spPr>
+        <p:txBody>
+          <a:bodyPr wrap="square" lIns="45720" rIns="45720" tIns="27432" bIns="27432" anchor="ctr"/>
           <a:lstStyle/>
           <a:p>
             <a:pPr algn="l">
@@ -6808,1255 +7938,6 @@
               </a:spcAft>
             </a:pPr>
             <a:r>
-              <a:rPr sz="1150" b="1" i="0">
-                <a:solidFill>
-                  <a:srgbClr val="123E6E"/>
-                </a:solidFill>
-                <a:latin typeface="微软雅黑"/>
-                <a:ea typeface="微软雅黑"/>
-                <a:cs typeface="微软雅黑"/>
-              </a:rPr>
-              <a:t>设计输出（DSE）</a:t>
-            </a:r>
-          </a:p>
-        </p:txBody>
-      </p:sp>
-      <p:sp>
-        <p:nvSpPr>
-          <p:cNvPr id="51" name="Rounded Rectangle 50"/>
-          <p:cNvSpPr/>
-          <p:nvPr/>
-        </p:nvSpPr>
-        <p:spPr>
-          <a:xfrm>
-            <a:off x="9418320" y="2185416"/>
-            <a:ext cx="2441448" cy="1371600"/>
-          </a:xfrm>
-          <a:prstGeom prst="roundRect">
-            <a:avLst>
-              <a:gd name="adj" fmla="val 5000"/>
-            </a:avLst>
-          </a:prstGeom>
-          <a:solidFill>
-            <a:srgbClr val="E8F3E2"/>
-          </a:solidFill>
-          <a:ln>
-            <a:noFill/>
-          </a:ln>
-          <a:effectLst/>
-        </p:spPr>
-        <p:style>
-          <a:lnRef idx="1">
-            <a:schemeClr val="accent1"/>
-          </a:lnRef>
-          <a:fillRef idx="3">
-            <a:schemeClr val="accent1"/>
-          </a:fillRef>
-          <a:effectRef idx="2">
-            <a:schemeClr val="accent1"/>
-          </a:effectRef>
-          <a:fontRef idx="minor">
-            <a:schemeClr val="lt1"/>
-          </a:fontRef>
-        </p:style>
-        <p:txBody>
-          <a:bodyPr rtlCol="0" anchor="ctr"/>
-          <a:lstStyle/>
-          <a:p>
-            <a:pPr algn="ctr"/>
-          </a:p>
-        </p:txBody>
-      </p:sp>
-      <p:sp>
-        <p:nvSpPr>
-          <p:cNvPr id="52" name="TextBox 51"/>
-          <p:cNvSpPr txBox="1"/>
-          <p:nvPr/>
-        </p:nvSpPr>
-        <p:spPr>
-          <a:xfrm>
-            <a:off x="9473184" y="2221992"/>
-            <a:ext cx="2350008" cy="1316736"/>
-          </a:xfrm>
-          <a:prstGeom prst="rect">
-            <a:avLst/>
-          </a:prstGeom>
-          <a:noFill/>
-        </p:spPr>
-        <p:txBody>
-          <a:bodyPr wrap="square" lIns="45720" rIns="45720" tIns="27432" bIns="27432" anchor="t"/>
-          <a:lstStyle/>
-          <a:p>
-            <a:pPr algn="l">
-              <a:spcBef>
-                <a:spcPts val="0"/>
-              </a:spcBef>
-              <a:spcAft>
-                <a:spcPts val="250"/>
-              </a:spcAft>
-            </a:pPr>
-            <a:r>
-              <a:rPr sz="900" b="1" i="0">
-                <a:solidFill>
-                  <a:srgbClr val="3D862C"/>
-                </a:solidFill>
-                <a:latin typeface="微软雅黑"/>
-                <a:ea typeface="微软雅黑"/>
-                <a:cs typeface="微软雅黑"/>
-              </a:rPr>
-              <a:t>▪ </a:t>
-            </a:r>
-            <a:r>
-              <a:rPr sz="900" b="0" i="0">
-                <a:solidFill>
-                  <a:srgbClr val="1B2430"/>
-                </a:solidFill>
-                <a:latin typeface="微软雅黑"/>
-                <a:ea typeface="微软雅黑"/>
-                <a:cs typeface="微软雅黑"/>
-              </a:rPr>
-              <a:t>超节点规模与组网拓扑</a:t>
-            </a:r>
-          </a:p>
-          <a:p>
-            <a:pPr algn="l">
-              <a:spcBef>
-                <a:spcPts val="0"/>
-              </a:spcBef>
-              <a:spcAft>
-                <a:spcPts val="250"/>
-              </a:spcAft>
-            </a:pPr>
-            <a:r>
-              <a:rPr sz="900" b="1" i="0">
-                <a:solidFill>
-                  <a:srgbClr val="3D862C"/>
-                </a:solidFill>
-                <a:latin typeface="微软雅黑"/>
-                <a:ea typeface="微软雅黑"/>
-                <a:cs typeface="微软雅黑"/>
-              </a:rPr>
-              <a:t>▪ </a:t>
-            </a:r>
-            <a:r>
-              <a:rPr sz="900" b="0" i="0">
-                <a:solidFill>
-                  <a:srgbClr val="1B2430"/>
-                </a:solidFill>
-                <a:latin typeface="微软雅黑"/>
-                <a:ea typeface="微软雅黑"/>
-                <a:cs typeface="微软雅黑"/>
-              </a:rPr>
-              <a:t>Scale-up/Scale-out 带宽配比</a:t>
-            </a:r>
-          </a:p>
-          <a:p>
-            <a:pPr algn="l">
-              <a:spcBef>
-                <a:spcPts val="0"/>
-              </a:spcBef>
-              <a:spcAft>
-                <a:spcPts val="250"/>
-              </a:spcAft>
-            </a:pPr>
-            <a:r>
-              <a:rPr sz="900" b="1" i="0">
-                <a:solidFill>
-                  <a:srgbClr val="3D862C"/>
-                </a:solidFill>
-                <a:latin typeface="微软雅黑"/>
-                <a:ea typeface="微软雅黑"/>
-                <a:cs typeface="微软雅黑"/>
-              </a:rPr>
-              <a:t>▪ </a:t>
-            </a:r>
-            <a:r>
-              <a:rPr sz="900" b="0" i="0">
-                <a:solidFill>
-                  <a:srgbClr val="1B2430"/>
-                </a:solidFill>
-                <a:latin typeface="微软雅黑"/>
-                <a:ea typeface="微软雅黑"/>
-                <a:cs typeface="微软雅黑"/>
-              </a:rPr>
-              <a:t>HBM/池化内存/存储层级容量</a:t>
-            </a:r>
-          </a:p>
-          <a:p>
-            <a:pPr algn="l">
-              <a:spcBef>
-                <a:spcPts val="0"/>
-              </a:spcBef>
-              <a:spcAft>
-                <a:spcPts val="250"/>
-              </a:spcAft>
-            </a:pPr>
-            <a:r>
-              <a:rPr sz="900" b="1" i="0">
-                <a:solidFill>
-                  <a:srgbClr val="3D862C"/>
-                </a:solidFill>
-                <a:latin typeface="微软雅黑"/>
-                <a:ea typeface="微软雅黑"/>
-                <a:cs typeface="微软雅黑"/>
-              </a:rPr>
-              <a:t>▪ </a:t>
-            </a:r>
-            <a:r>
-              <a:rPr sz="900" b="0" i="0">
-                <a:solidFill>
-                  <a:srgbClr val="1B2430"/>
-                </a:solidFill>
-                <a:latin typeface="微软雅黑"/>
-                <a:ea typeface="微软雅黑"/>
-                <a:cs typeface="微软雅黑"/>
-              </a:rPr>
-              <a:t>PD 配比、调度与并行策略</a:t>
-            </a:r>
-          </a:p>
-          <a:p>
-            <a:pPr algn="l">
-              <a:spcBef>
-                <a:spcPts val="0"/>
-              </a:spcBef>
-              <a:spcAft>
-                <a:spcPts val="250"/>
-              </a:spcAft>
-            </a:pPr>
-            <a:r>
-              <a:rPr sz="900" b="1" i="0">
-                <a:solidFill>
-                  <a:srgbClr val="3D862C"/>
-                </a:solidFill>
-                <a:latin typeface="微软雅黑"/>
-                <a:ea typeface="微软雅黑"/>
-                <a:cs typeface="微软雅黑"/>
-              </a:rPr>
-              <a:t>▪ </a:t>
-            </a:r>
-            <a:r>
-              <a:rPr sz="900" b="0" i="0">
-                <a:solidFill>
-                  <a:srgbClr val="1B2430"/>
-                </a:solidFill>
-                <a:latin typeface="微软雅黑"/>
-                <a:ea typeface="微软雅黑"/>
-                <a:cs typeface="微软雅黑"/>
-              </a:rPr>
-              <a:t>瓶颈定位与 TCO/能效评估</a:t>
-            </a:r>
-          </a:p>
-        </p:txBody>
-      </p:sp>
-      <p:sp>
-        <p:nvSpPr>
-          <p:cNvPr id="53" name="TextBox 52"/>
-          <p:cNvSpPr txBox="1"/>
-          <p:nvPr/>
-        </p:nvSpPr>
-        <p:spPr>
-          <a:xfrm>
-            <a:off x="9418320" y="3666744"/>
-            <a:ext cx="2441448" cy="256032"/>
-          </a:xfrm>
-          <a:prstGeom prst="rect">
-            <a:avLst/>
-          </a:prstGeom>
-          <a:noFill/>
-        </p:spPr>
-        <p:txBody>
-          <a:bodyPr wrap="square" lIns="45720" rIns="45720" tIns="27432" bIns="27432" anchor="t"/>
-          <a:lstStyle/>
-          <a:p>
-            <a:pPr algn="l">
-              <a:spcBef>
-                <a:spcPts val="0"/>
-              </a:spcBef>
-              <a:spcAft>
-                <a:spcPts val="250"/>
-              </a:spcAft>
-            </a:pPr>
-            <a:r>
-              <a:rPr sz="1150" b="1" i="0">
-                <a:solidFill>
-                  <a:srgbClr val="123E6E"/>
-                </a:solidFill>
-                <a:latin typeface="微软雅黑"/>
-                <a:ea typeface="微软雅黑"/>
-                <a:cs typeface="微软雅黑"/>
-              </a:rPr>
-              <a:t>业界对标与切入点</a:t>
-            </a:r>
-          </a:p>
-        </p:txBody>
-      </p:sp>
-      <p:sp>
-        <p:nvSpPr>
-          <p:cNvPr id="54" name="Rounded Rectangle 53"/>
-          <p:cNvSpPr/>
-          <p:nvPr/>
-        </p:nvSpPr>
-        <p:spPr>
-          <a:xfrm>
-            <a:off x="9418320" y="3941064"/>
-            <a:ext cx="2441448" cy="1929384"/>
-          </a:xfrm>
-          <a:prstGeom prst="roundRect">
-            <a:avLst>
-              <a:gd name="adj" fmla="val 5000"/>
-            </a:avLst>
-          </a:prstGeom>
-          <a:solidFill>
-            <a:srgbClr val="FFFFFF"/>
-          </a:solidFill>
-          <a:ln w="11430">
-            <a:solidFill>
-              <a:srgbClr val="D0D8E0"/>
-            </a:solidFill>
-          </a:ln>
-          <a:effectLst/>
-        </p:spPr>
-        <p:style>
-          <a:lnRef idx="1">
-            <a:schemeClr val="accent1"/>
-          </a:lnRef>
-          <a:fillRef idx="3">
-            <a:schemeClr val="accent1"/>
-          </a:fillRef>
-          <a:effectRef idx="2">
-            <a:schemeClr val="accent1"/>
-          </a:effectRef>
-          <a:fontRef idx="minor">
-            <a:schemeClr val="lt1"/>
-          </a:fontRef>
-        </p:style>
-        <p:txBody>
-          <a:bodyPr rtlCol="0" anchor="ctr"/>
-          <a:lstStyle/>
-          <a:p>
-            <a:pPr algn="ctr"/>
-          </a:p>
-        </p:txBody>
-      </p:sp>
-      <p:sp>
-        <p:nvSpPr>
-          <p:cNvPr id="55" name="TextBox 54"/>
-          <p:cNvSpPr txBox="1"/>
-          <p:nvPr/>
-        </p:nvSpPr>
-        <p:spPr>
-          <a:xfrm>
-            <a:off x="9473184" y="3968496"/>
-            <a:ext cx="2350008" cy="1883664"/>
-          </a:xfrm>
-          <a:prstGeom prst="rect">
-            <a:avLst/>
-          </a:prstGeom>
-          <a:noFill/>
-        </p:spPr>
-        <p:txBody>
-          <a:bodyPr wrap="square" lIns="45720" rIns="45720" tIns="27432" bIns="27432" anchor="t"/>
-          <a:lstStyle/>
-          <a:p>
-            <a:pPr algn="l">
-              <a:spcBef>
-                <a:spcPts val="0"/>
-              </a:spcBef>
-              <a:spcAft>
-                <a:spcPts val="250"/>
-              </a:spcAft>
-            </a:pPr>
-            <a:r>
-              <a:rPr sz="850" b="1" i="0">
-                <a:solidFill>
-                  <a:srgbClr val="1A5FA8"/>
-                </a:solidFill>
-                <a:latin typeface="微软雅黑"/>
-                <a:ea typeface="微软雅黑"/>
-                <a:cs typeface="微软雅黑"/>
-              </a:rPr>
-              <a:t>ASTRA-sim 2.0+Chakra</a:t>
-            </a:r>
-            <a:r>
-              <a:rPr sz="850" b="0" i="0">
-                <a:solidFill>
-                  <a:srgbClr val="1B2430"/>
-                </a:solidFill>
-                <a:latin typeface="微软雅黑"/>
-                <a:ea typeface="微软雅黑"/>
-                <a:cs typeface="微软雅黑"/>
-              </a:rPr>
-              <a:t>：图式执行 Trace IR</a:t>
-            </a:r>
-          </a:p>
-          <a:p>
-            <a:pPr algn="l">
-              <a:spcBef>
-                <a:spcPts val="0"/>
-              </a:spcBef>
-              <a:spcAft>
-                <a:spcPts val="250"/>
-              </a:spcAft>
-            </a:pPr>
-            <a:r>
-              <a:rPr sz="850" b="1" i="0">
-                <a:solidFill>
-                  <a:srgbClr val="1A5FA8"/>
-                </a:solidFill>
-                <a:latin typeface="微软雅黑"/>
-                <a:ea typeface="微软雅黑"/>
-                <a:cs typeface="微软雅黑"/>
-              </a:rPr>
-              <a:t>SimAI+AICB</a:t>
-            </a:r>
-            <a:r>
-              <a:rPr sz="850" b="0" i="0">
-                <a:solidFill>
-                  <a:srgbClr val="1B2430"/>
-                </a:solidFill>
-                <a:latin typeface="微软雅黑"/>
-                <a:ea typeface="微软雅黑"/>
-                <a:cs typeface="微软雅黑"/>
-              </a:rPr>
-              <a:t>（阿里）：训练通信负载生成</a:t>
-            </a:r>
-          </a:p>
-          <a:p>
-            <a:pPr algn="l">
-              <a:spcBef>
-                <a:spcPts val="0"/>
-              </a:spcBef>
-              <a:spcAft>
-                <a:spcPts val="250"/>
-              </a:spcAft>
-            </a:pPr>
-            <a:r>
-              <a:rPr sz="850" b="1" i="0">
-                <a:solidFill>
-                  <a:srgbClr val="1A5FA8"/>
-                </a:solidFill>
-                <a:latin typeface="微软雅黑"/>
-                <a:ea typeface="微软雅黑"/>
-                <a:cs typeface="微软雅黑"/>
-              </a:rPr>
-              <a:t>Vidur</a:t>
-            </a:r>
-            <a:r>
-              <a:rPr sz="850" b="0" i="0">
-                <a:solidFill>
-                  <a:srgbClr val="1B2430"/>
-                </a:solidFill>
-                <a:latin typeface="微软雅黑"/>
-                <a:ea typeface="微软雅黑"/>
-                <a:cs typeface="微软雅黑"/>
-              </a:rPr>
-              <a:t>（微软）：算子画像+请求分布驱动推理</a:t>
-            </a:r>
-          </a:p>
-          <a:p>
-            <a:pPr algn="l">
-              <a:spcBef>
-                <a:spcPts val="0"/>
-              </a:spcBef>
-              <a:spcAft>
-                <a:spcPts val="250"/>
-              </a:spcAft>
-            </a:pPr>
-            <a:r>
-              <a:rPr sz="850" b="1" i="0">
-                <a:solidFill>
-                  <a:srgbClr val="1A5FA8"/>
-                </a:solidFill>
-                <a:latin typeface="微软雅黑"/>
-                <a:ea typeface="微软雅黑"/>
-                <a:cs typeface="微软雅黑"/>
-              </a:rPr>
-              <a:t>NVIDIA DSX</a:t>
-            </a:r>
-            <a:r>
-              <a:rPr sz="850" b="0" i="0">
-                <a:solidFill>
-                  <a:srgbClr val="1B2430"/>
-                </a:solidFill>
-                <a:latin typeface="微软雅黑"/>
-                <a:ea typeface="微软雅黑"/>
-                <a:cs typeface="微软雅黑"/>
-              </a:rPr>
-              <a:t>：AI 工厂数字孪生蓝图</a:t>
-            </a:r>
-          </a:p>
-          <a:p>
-            <a:pPr algn="l">
-              <a:spcBef>
-                <a:spcPts val="0"/>
-              </a:spcBef>
-              <a:spcAft>
-                <a:spcPts val="250"/>
-              </a:spcAft>
-            </a:pPr>
-            <a:r>
-              <a:rPr sz="850" b="1" i="0">
-                <a:solidFill>
-                  <a:srgbClr val="C45A10"/>
-                </a:solidFill>
-                <a:latin typeface="微软雅黑"/>
-                <a:ea typeface="微软雅黑"/>
-                <a:cs typeface="微软雅黑"/>
-              </a:rPr>
-              <a:t>短板：</a:t>
-            </a:r>
-            <a:r>
-              <a:rPr sz="850" b="0" i="0">
-                <a:solidFill>
-                  <a:srgbClr val="1B2430"/>
-                </a:solidFill>
-                <a:latin typeface="微软雅黑"/>
-                <a:ea typeface="微软雅黑"/>
-                <a:cs typeface="微软雅黑"/>
-              </a:rPr>
-              <a:t>负载多为回放或简单分布，缺少面向未来模型与超大规模的可外推负载工程</a:t>
-            </a:r>
-          </a:p>
-        </p:txBody>
-      </p:sp>
-      <p:sp>
-        <p:nvSpPr>
-          <p:cNvPr id="56" name="Rectangle 55"/>
-          <p:cNvSpPr/>
-          <p:nvPr/>
-        </p:nvSpPr>
-        <p:spPr>
-          <a:xfrm>
-            <a:off x="329184" y="5943600"/>
-            <a:ext cx="11530584" cy="621792"/>
-          </a:xfrm>
-          <a:prstGeom prst="rect">
-            <a:avLst/>
-          </a:prstGeom>
-          <a:solidFill>
-            <a:srgbClr val="FFFFFF"/>
-          </a:solidFill>
-          <a:ln w="9525">
-            <a:solidFill>
-              <a:srgbClr val="D0D8E0"/>
-            </a:solidFill>
-          </a:ln>
-          <a:effectLst/>
-        </p:spPr>
-        <p:style>
-          <a:lnRef idx="1">
-            <a:schemeClr val="accent1"/>
-          </a:lnRef>
-          <a:fillRef idx="3">
-            <a:schemeClr val="accent1"/>
-          </a:fillRef>
-          <a:effectRef idx="2">
-            <a:schemeClr val="accent1"/>
-          </a:effectRef>
-          <a:fontRef idx="minor">
-            <a:schemeClr val="lt1"/>
-          </a:fontRef>
-        </p:style>
-        <p:txBody>
-          <a:bodyPr rtlCol="0" anchor="ctr"/>
-          <a:lstStyle/>
-          <a:p>
-            <a:pPr algn="ctr"/>
-          </a:p>
-        </p:txBody>
-      </p:sp>
-      <p:sp>
-        <p:nvSpPr>
-          <p:cNvPr id="57" name="Rectangle 56"/>
-          <p:cNvSpPr/>
-          <p:nvPr/>
-        </p:nvSpPr>
-        <p:spPr>
-          <a:xfrm>
-            <a:off x="329184" y="5943600"/>
-            <a:ext cx="1188720" cy="621792"/>
-          </a:xfrm>
-          <a:prstGeom prst="rect">
-            <a:avLst/>
-          </a:prstGeom>
-          <a:solidFill>
-            <a:srgbClr val="1A5FA8"/>
-          </a:solidFill>
-          <a:ln>
-            <a:noFill/>
-          </a:ln>
-          <a:effectLst/>
-        </p:spPr>
-        <p:style>
-          <a:lnRef idx="1">
-            <a:schemeClr val="accent1"/>
-          </a:lnRef>
-          <a:fillRef idx="3">
-            <a:schemeClr val="accent1"/>
-          </a:fillRef>
-          <a:effectRef idx="2">
-            <a:schemeClr val="accent1"/>
-          </a:effectRef>
-          <a:fontRef idx="minor">
-            <a:schemeClr val="lt1"/>
-          </a:fontRef>
-        </p:style>
-        <p:txBody>
-          <a:bodyPr rtlCol="0" anchor="ctr"/>
-          <a:lstStyle/>
-          <a:p>
-            <a:pPr algn="ctr"/>
-          </a:p>
-        </p:txBody>
-      </p:sp>
-      <p:sp>
-        <p:nvSpPr>
-          <p:cNvPr id="58" name="TextBox 57"/>
-          <p:cNvSpPr txBox="1"/>
-          <p:nvPr/>
-        </p:nvSpPr>
-        <p:spPr>
-          <a:xfrm>
-            <a:off x="329184" y="5943600"/>
-            <a:ext cx="1188720" cy="621792"/>
-          </a:xfrm>
-          <a:prstGeom prst="rect">
-            <a:avLst/>
-          </a:prstGeom>
-          <a:noFill/>
-        </p:spPr>
-        <p:txBody>
-          <a:bodyPr wrap="square" lIns="45720" rIns="45720" tIns="27432" bIns="27432" anchor="ctr"/>
-          <a:lstStyle/>
-          <a:p>
-            <a:pPr algn="ctr">
-              <a:spcBef>
-                <a:spcPts val="0"/>
-              </a:spcBef>
-              <a:spcAft>
-                <a:spcPts val="250"/>
-              </a:spcAft>
-            </a:pPr>
-            <a:r>
-              <a:rPr sz="1100" b="1" i="0">
-                <a:solidFill>
-                  <a:srgbClr val="FFFFFF"/>
-                </a:solidFill>
-                <a:latin typeface="微软雅黑"/>
-                <a:ea typeface="微软雅黑"/>
-                <a:cs typeface="微软雅黑"/>
-              </a:rPr>
-              <a:t>立项目标</a:t>
-            </a:r>
-          </a:p>
-          <a:p>
-            <a:pPr algn="ctr">
-              <a:spcBef>
-                <a:spcPts val="0"/>
-              </a:spcBef>
-              <a:spcAft>
-                <a:spcPts val="250"/>
-              </a:spcAft>
-            </a:pPr>
-            <a:r>
-              <a:rPr sz="800" b="0" i="0">
-                <a:solidFill>
-                  <a:srgbClr val="FFFFFF"/>
-                </a:solidFill>
-                <a:latin typeface="微软雅黑"/>
-                <a:ea typeface="微软雅黑"/>
-                <a:cs typeface="微软雅黑"/>
-              </a:rPr>
-              <a:t>建议值，待对齐</a:t>
-            </a:r>
-          </a:p>
-        </p:txBody>
-      </p:sp>
-      <p:sp>
-        <p:nvSpPr>
-          <p:cNvPr id="59" name="TextBox 58"/>
-          <p:cNvSpPr txBox="1"/>
-          <p:nvPr/>
-        </p:nvSpPr>
-        <p:spPr>
-          <a:xfrm>
-            <a:off x="1591056" y="5943600"/>
-            <a:ext cx="1207008" cy="621792"/>
-          </a:xfrm>
-          <a:prstGeom prst="rect">
-            <a:avLst/>
-          </a:prstGeom>
-          <a:noFill/>
-        </p:spPr>
-        <p:txBody>
-          <a:bodyPr wrap="square" lIns="45720" rIns="45720" tIns="27432" bIns="27432" anchor="ctr"/>
-          <a:lstStyle/>
-          <a:p>
-            <a:pPr algn="ctr">
-              <a:spcBef>
-                <a:spcPts val="0"/>
-              </a:spcBef>
-              <a:spcAft>
-                <a:spcPts val="250"/>
-              </a:spcAft>
-            </a:pPr>
-            <a:r>
-              <a:rPr sz="1300" b="1" i="0">
-                <a:solidFill>
-                  <a:srgbClr val="C45A10"/>
-                </a:solidFill>
-                <a:latin typeface="微软雅黑"/>
-                <a:ea typeface="微软雅黑"/>
-                <a:cs typeface="微软雅黑"/>
-              </a:rPr>
-              <a:t>≤10%</a:t>
-            </a:r>
-          </a:p>
-        </p:txBody>
-      </p:sp>
-      <p:sp>
-        <p:nvSpPr>
-          <p:cNvPr id="60" name="TextBox 59"/>
-          <p:cNvSpPr txBox="1"/>
-          <p:nvPr/>
-        </p:nvSpPr>
-        <p:spPr>
-          <a:xfrm>
-            <a:off x="2779776" y="5943600"/>
-            <a:ext cx="1341882" cy="621792"/>
-          </a:xfrm>
-          <a:prstGeom prst="rect">
-            <a:avLst/>
-          </a:prstGeom>
-          <a:noFill/>
-        </p:spPr>
-        <p:txBody>
-          <a:bodyPr wrap="square" lIns="45720" rIns="45720" tIns="27432" bIns="27432" anchor="ctr"/>
-          <a:lstStyle/>
-          <a:p>
-            <a:pPr algn="l">
-              <a:spcBef>
-                <a:spcPts val="0"/>
-              </a:spcBef>
-              <a:spcAft>
-                <a:spcPts val="250"/>
-              </a:spcAft>
-            </a:pPr>
-            <a:r>
-              <a:rPr sz="880" b="0" i="0">
-                <a:solidFill>
-                  <a:srgbClr val="1B2430"/>
-                </a:solidFill>
-                <a:latin typeface="微软雅黑"/>
-                <a:ea typeface="微软雅黑"/>
-                <a:cs typeface="微软雅黑"/>
-              </a:rPr>
-              <a:t>迭代时间/吞吐仿真误差（千卡实测对标）</a:t>
-            </a:r>
-          </a:p>
-        </p:txBody>
-      </p:sp>
-      <p:sp>
-        <p:nvSpPr>
-          <p:cNvPr id="61" name="Rectangle 60"/>
-          <p:cNvSpPr/>
-          <p:nvPr/>
-        </p:nvSpPr>
-        <p:spPr>
-          <a:xfrm>
-            <a:off x="4139946" y="6053328"/>
-            <a:ext cx="10972" cy="402336"/>
-          </a:xfrm>
-          <a:prstGeom prst="rect">
-            <a:avLst/>
-          </a:prstGeom>
-          <a:solidFill>
-            <a:srgbClr val="D0D8E0"/>
-          </a:solidFill>
-          <a:ln>
-            <a:noFill/>
-          </a:ln>
-          <a:effectLst/>
-        </p:spPr>
-        <p:style>
-          <a:lnRef idx="1">
-            <a:schemeClr val="accent1"/>
-          </a:lnRef>
-          <a:fillRef idx="3">
-            <a:schemeClr val="accent1"/>
-          </a:fillRef>
-          <a:effectRef idx="2">
-            <a:schemeClr val="accent1"/>
-          </a:effectRef>
-          <a:fontRef idx="minor">
-            <a:schemeClr val="lt1"/>
-          </a:fontRef>
-        </p:style>
-        <p:txBody>
-          <a:bodyPr rtlCol="0" anchor="ctr"/>
-          <a:lstStyle/>
-          <a:p>
-            <a:pPr algn="ctr"/>
-          </a:p>
-        </p:txBody>
-      </p:sp>
-      <p:sp>
-        <p:nvSpPr>
-          <p:cNvPr id="62" name="TextBox 61"/>
-          <p:cNvSpPr txBox="1"/>
-          <p:nvPr/>
-        </p:nvSpPr>
-        <p:spPr>
-          <a:xfrm>
-            <a:off x="4158234" y="5943600"/>
-            <a:ext cx="1207008" cy="621792"/>
-          </a:xfrm>
-          <a:prstGeom prst="rect">
-            <a:avLst/>
-          </a:prstGeom>
-          <a:noFill/>
-        </p:spPr>
-        <p:txBody>
-          <a:bodyPr wrap="square" lIns="45720" rIns="45720" tIns="27432" bIns="27432" anchor="ctr"/>
-          <a:lstStyle/>
-          <a:p>
-            <a:pPr algn="ctr">
-              <a:spcBef>
-                <a:spcPts val="0"/>
-              </a:spcBef>
-              <a:spcAft>
-                <a:spcPts val="250"/>
-              </a:spcAft>
-            </a:pPr>
-            <a:r>
-              <a:rPr sz="1300" b="1" i="0">
-                <a:solidFill>
-                  <a:srgbClr val="C45A10"/>
-                </a:solidFill>
-                <a:latin typeface="微软雅黑"/>
-                <a:ea typeface="微软雅黑"/>
-                <a:cs typeface="微软雅黑"/>
-              </a:rPr>
-              <a:t>1K→100K</a:t>
-            </a:r>
-          </a:p>
-        </p:txBody>
-      </p:sp>
-      <p:sp>
-        <p:nvSpPr>
-          <p:cNvPr id="63" name="TextBox 62"/>
-          <p:cNvSpPr txBox="1"/>
-          <p:nvPr/>
-        </p:nvSpPr>
-        <p:spPr>
-          <a:xfrm>
-            <a:off x="5346954" y="5943600"/>
-            <a:ext cx="1341882" cy="621792"/>
-          </a:xfrm>
-          <a:prstGeom prst="rect">
-            <a:avLst/>
-          </a:prstGeom>
-          <a:noFill/>
-        </p:spPr>
-        <p:txBody>
-          <a:bodyPr wrap="square" lIns="45720" rIns="45720" tIns="27432" bIns="27432" anchor="ctr"/>
-          <a:lstStyle/>
-          <a:p>
-            <a:pPr algn="l">
-              <a:spcBef>
-                <a:spcPts val="0"/>
-              </a:spcBef>
-              <a:spcAft>
-                <a:spcPts val="250"/>
-              </a:spcAft>
-            </a:pPr>
-            <a:r>
-              <a:rPr sz="880" b="0" i="0">
-                <a:solidFill>
-                  <a:srgbClr val="1B2430"/>
-                </a:solidFill>
-                <a:latin typeface="微软雅黑"/>
-                <a:ea typeface="微软雅黑"/>
-                <a:cs typeface="微软雅黑"/>
-              </a:rPr>
-              <a:t>千卡 Trace 外推生成十万卡负载</a:t>
-            </a:r>
-          </a:p>
-        </p:txBody>
-      </p:sp>
-      <p:sp>
-        <p:nvSpPr>
-          <p:cNvPr id="64" name="Rectangle 63"/>
-          <p:cNvSpPr/>
-          <p:nvPr/>
-        </p:nvSpPr>
-        <p:spPr>
-          <a:xfrm>
-            <a:off x="6707124" y="6053328"/>
-            <a:ext cx="10972" cy="402336"/>
-          </a:xfrm>
-          <a:prstGeom prst="rect">
-            <a:avLst/>
-          </a:prstGeom>
-          <a:solidFill>
-            <a:srgbClr val="D0D8E0"/>
-          </a:solidFill>
-          <a:ln>
-            <a:noFill/>
-          </a:ln>
-          <a:effectLst/>
-        </p:spPr>
-        <p:style>
-          <a:lnRef idx="1">
-            <a:schemeClr val="accent1"/>
-          </a:lnRef>
-          <a:fillRef idx="3">
-            <a:schemeClr val="accent1"/>
-          </a:fillRef>
-          <a:effectRef idx="2">
-            <a:schemeClr val="accent1"/>
-          </a:effectRef>
-          <a:fontRef idx="minor">
-            <a:schemeClr val="lt1"/>
-          </a:fontRef>
-        </p:style>
-        <p:txBody>
-          <a:bodyPr rtlCol="0" anchor="ctr"/>
-          <a:lstStyle/>
-          <a:p>
-            <a:pPr algn="ctr"/>
-          </a:p>
-        </p:txBody>
-      </p:sp>
-      <p:sp>
-        <p:nvSpPr>
-          <p:cNvPr id="65" name="TextBox 64"/>
-          <p:cNvSpPr txBox="1"/>
-          <p:nvPr/>
-        </p:nvSpPr>
-        <p:spPr>
-          <a:xfrm>
-            <a:off x="6725412" y="5943600"/>
-            <a:ext cx="1207008" cy="621792"/>
-          </a:xfrm>
-          <a:prstGeom prst="rect">
-            <a:avLst/>
-          </a:prstGeom>
-          <a:noFill/>
-        </p:spPr>
-        <p:txBody>
-          <a:bodyPr wrap="square" lIns="45720" rIns="45720" tIns="27432" bIns="27432" anchor="ctr"/>
-          <a:lstStyle/>
-          <a:p>
-            <a:pPr algn="ctr">
-              <a:spcBef>
-                <a:spcPts val="0"/>
-              </a:spcBef>
-              <a:spcAft>
-                <a:spcPts val="250"/>
-              </a:spcAft>
-            </a:pPr>
-            <a:r>
-              <a:rPr sz="1300" b="1" i="0">
-                <a:solidFill>
-                  <a:srgbClr val="C45A10"/>
-                </a:solidFill>
-                <a:latin typeface="微软雅黑"/>
-                <a:ea typeface="微软雅黑"/>
-                <a:cs typeface="微软雅黑"/>
-              </a:rPr>
-              <a:t>6类·30+</a:t>
-            </a:r>
-          </a:p>
-        </p:txBody>
-      </p:sp>
-      <p:sp>
-        <p:nvSpPr>
-          <p:cNvPr id="66" name="TextBox 65"/>
-          <p:cNvSpPr txBox="1"/>
-          <p:nvPr/>
-        </p:nvSpPr>
-        <p:spPr>
-          <a:xfrm>
-            <a:off x="7914132" y="5943600"/>
-            <a:ext cx="1341882" cy="621792"/>
-          </a:xfrm>
-          <a:prstGeom prst="rect">
-            <a:avLst/>
-          </a:prstGeom>
-          <a:noFill/>
-        </p:spPr>
-        <p:txBody>
-          <a:bodyPr wrap="square" lIns="45720" rIns="45720" tIns="27432" bIns="27432" anchor="ctr"/>
-          <a:lstStyle/>
-          <a:p>
-            <a:pPr algn="l">
-              <a:spcBef>
-                <a:spcPts val="0"/>
-              </a:spcBef>
-              <a:spcAft>
-                <a:spcPts val="250"/>
-              </a:spcAft>
-            </a:pPr>
-            <a:r>
-              <a:rPr sz="880" b="0" i="0">
-                <a:solidFill>
-                  <a:srgbClr val="1B2430"/>
-                </a:solidFill>
-                <a:latin typeface="微软雅黑"/>
-                <a:ea typeface="微软雅黑"/>
-                <a:cs typeface="微软雅黑"/>
-              </a:rPr>
-              <a:t>场景类别 · 版本化标准负载</a:t>
-            </a:r>
-          </a:p>
-        </p:txBody>
-      </p:sp>
-      <p:sp>
-        <p:nvSpPr>
-          <p:cNvPr id="67" name="Rectangle 66"/>
-          <p:cNvSpPr/>
-          <p:nvPr/>
-        </p:nvSpPr>
-        <p:spPr>
-          <a:xfrm>
-            <a:off x="9274302" y="6053328"/>
-            <a:ext cx="10972" cy="402336"/>
-          </a:xfrm>
-          <a:prstGeom prst="rect">
-            <a:avLst/>
-          </a:prstGeom>
-          <a:solidFill>
-            <a:srgbClr val="D0D8E0"/>
-          </a:solidFill>
-          <a:ln>
-            <a:noFill/>
-          </a:ln>
-          <a:effectLst/>
-        </p:spPr>
-        <p:style>
-          <a:lnRef idx="1">
-            <a:schemeClr val="accent1"/>
-          </a:lnRef>
-          <a:fillRef idx="3">
-            <a:schemeClr val="accent1"/>
-          </a:fillRef>
-          <a:effectRef idx="2">
-            <a:schemeClr val="accent1"/>
-          </a:effectRef>
-          <a:fontRef idx="minor">
-            <a:schemeClr val="lt1"/>
-          </a:fontRef>
-        </p:style>
-        <p:txBody>
-          <a:bodyPr rtlCol="0" anchor="ctr"/>
-          <a:lstStyle/>
-          <a:p>
-            <a:pPr algn="ctr"/>
-          </a:p>
-        </p:txBody>
-      </p:sp>
-      <p:sp>
-        <p:nvSpPr>
-          <p:cNvPr id="68" name="TextBox 67"/>
-          <p:cNvSpPr txBox="1"/>
-          <p:nvPr/>
-        </p:nvSpPr>
-        <p:spPr>
-          <a:xfrm>
-            <a:off x="9292590" y="5943600"/>
-            <a:ext cx="1207008" cy="621792"/>
-          </a:xfrm>
-          <a:prstGeom prst="rect">
-            <a:avLst/>
-          </a:prstGeom>
-          <a:noFill/>
-        </p:spPr>
-        <p:txBody>
-          <a:bodyPr wrap="square" lIns="45720" rIns="45720" tIns="27432" bIns="27432" anchor="ctr"/>
-          <a:lstStyle/>
-          <a:p>
-            <a:pPr algn="ctr">
-              <a:spcBef>
-                <a:spcPts val="0"/>
-              </a:spcBef>
-              <a:spcAft>
-                <a:spcPts val="250"/>
-              </a:spcAft>
-            </a:pPr>
-            <a:r>
-              <a:rPr sz="1300" b="1" i="0">
-                <a:solidFill>
-                  <a:srgbClr val="C45A10"/>
-                </a:solidFill>
-                <a:latin typeface="微软雅黑"/>
-                <a:ea typeface="微软雅黑"/>
-                <a:cs typeface="微软雅黑"/>
-              </a:rPr>
-              <a:t>≥1000</a:t>
-            </a:r>
-          </a:p>
-        </p:txBody>
-      </p:sp>
-      <p:sp>
-        <p:nvSpPr>
-          <p:cNvPr id="69" name="TextBox 68"/>
-          <p:cNvSpPr txBox="1"/>
-          <p:nvPr/>
-        </p:nvSpPr>
-        <p:spPr>
-          <a:xfrm>
-            <a:off x="10481310" y="5943600"/>
-            <a:ext cx="1341882" cy="621792"/>
-          </a:xfrm>
-          <a:prstGeom prst="rect">
-            <a:avLst/>
-          </a:prstGeom>
-          <a:noFill/>
-        </p:spPr>
-        <p:txBody>
-          <a:bodyPr wrap="square" lIns="45720" rIns="45720" tIns="27432" bIns="27432" anchor="ctr"/>
-          <a:lstStyle/>
-          <a:p>
-            <a:pPr algn="l">
-              <a:spcBef>
-                <a:spcPts val="0"/>
-              </a:spcBef>
-              <a:spcAft>
-                <a:spcPts val="250"/>
-              </a:spcAft>
-            </a:pPr>
-            <a:r>
-              <a:rPr sz="880" b="0" i="0">
-                <a:solidFill>
-                  <a:srgbClr val="1B2430"/>
-                </a:solidFill>
-                <a:latin typeface="微软雅黑"/>
-                <a:ea typeface="微软雅黑"/>
-                <a:cs typeface="微软雅黑"/>
-              </a:rPr>
-              <a:t>配置/轮批量 DSE；解析级分钟、包级小时</a:t>
-            </a:r>
-          </a:p>
-        </p:txBody>
-      </p:sp>
-      <p:sp>
-        <p:nvSpPr>
-          <p:cNvPr id="70" name="Rectangle 69"/>
-          <p:cNvSpPr/>
-          <p:nvPr/>
-        </p:nvSpPr>
-        <p:spPr>
-          <a:xfrm>
-            <a:off x="0" y="6638544"/>
-            <a:ext cx="12191695" cy="219456"/>
-          </a:xfrm>
-          <a:prstGeom prst="rect">
-            <a:avLst/>
-          </a:prstGeom>
-          <a:solidFill>
-            <a:srgbClr val="E9ECF0"/>
-          </a:solidFill>
-          <a:ln>
-            <a:noFill/>
-          </a:ln>
-          <a:effectLst/>
-        </p:spPr>
-        <p:style>
-          <a:lnRef idx="1">
-            <a:schemeClr val="accent1"/>
-          </a:lnRef>
-          <a:fillRef idx="3">
-            <a:schemeClr val="accent1"/>
-          </a:fillRef>
-          <a:effectRef idx="2">
-            <a:schemeClr val="accent1"/>
-          </a:effectRef>
-          <a:fontRef idx="minor">
-            <a:schemeClr val="lt1"/>
-          </a:fontRef>
-        </p:style>
-        <p:txBody>
-          <a:bodyPr rtlCol="0" anchor="ctr"/>
-          <a:lstStyle/>
-          <a:p>
-            <a:pPr algn="ctr"/>
-          </a:p>
-        </p:txBody>
-      </p:sp>
-      <p:sp>
-        <p:nvSpPr>
-          <p:cNvPr id="71" name="Rectangle 70"/>
-          <p:cNvSpPr/>
-          <p:nvPr/>
-        </p:nvSpPr>
-        <p:spPr>
-          <a:xfrm>
-            <a:off x="0" y="6638544"/>
-            <a:ext cx="146304" cy="219456"/>
-          </a:xfrm>
-          <a:prstGeom prst="rect">
-            <a:avLst/>
-          </a:prstGeom>
-          <a:solidFill>
-            <a:srgbClr val="1A5FA8"/>
-          </a:solidFill>
-          <a:ln>
-            <a:noFill/>
-          </a:ln>
-          <a:effectLst/>
-        </p:spPr>
-        <p:style>
-          <a:lnRef idx="1">
-            <a:schemeClr val="accent1"/>
-          </a:lnRef>
-          <a:fillRef idx="3">
-            <a:schemeClr val="accent1"/>
-          </a:fillRef>
-          <a:effectRef idx="2">
-            <a:schemeClr val="accent1"/>
-          </a:effectRef>
-          <a:fontRef idx="minor">
-            <a:schemeClr val="lt1"/>
-          </a:fontRef>
-        </p:style>
-        <p:txBody>
-          <a:bodyPr rtlCol="0" anchor="ctr"/>
-          <a:lstStyle/>
-          <a:p>
-            <a:pPr algn="ctr"/>
-          </a:p>
-        </p:txBody>
-      </p:sp>
-      <p:sp>
-        <p:nvSpPr>
-          <p:cNvPr id="72" name="TextBox 71"/>
-          <p:cNvSpPr txBox="1"/>
-          <p:nvPr/>
-        </p:nvSpPr>
-        <p:spPr>
-          <a:xfrm>
-            <a:off x="329184" y="6638544"/>
-            <a:ext cx="10058400" cy="219456"/>
-          </a:xfrm>
-          <a:prstGeom prst="rect">
-            <a:avLst/>
-          </a:prstGeom>
-          <a:noFill/>
-        </p:spPr>
-        <p:txBody>
-          <a:bodyPr wrap="square" lIns="45720" rIns="45720" tIns="27432" bIns="27432" anchor="ctr"/>
-          <a:lstStyle/>
-          <a:p>
-            <a:pPr algn="l">
-              <a:spcBef>
-                <a:spcPts val="0"/>
-              </a:spcBef>
-              <a:spcAft>
-                <a:spcPts val="250"/>
-              </a:spcAft>
-            </a:pPr>
-            <a:r>
               <a:rPr sz="850" b="0" i="0">
                 <a:solidFill>
                   <a:srgbClr val="7A8896"/>
@@ -8072,7 +7953,7 @@
       </p:sp>
       <p:sp>
         <p:nvSpPr>
-          <p:cNvPr id="73" name="TextBox 72"/>
+          <p:cNvPr id="80" name="TextBox 79"/>
           <p:cNvSpPr txBox="1"/>
           <p:nvPr/>
         </p:nvSpPr>
@@ -8354,7 +8235,7 @@
         </p:nvGraphicFramePr>
         <p:xfrm>
           <a:off x="329184" y="1143000"/>
-          <a:ext cx="11530584" cy="5047488"/>
+          <a:ext cx="11530584" cy="4334256"/>
         </p:xfrm>
         <a:graphic>
           <a:graphicData uri="http://schemas.openxmlformats.org/drawingml/2006/table">
@@ -8491,7 +8372,7 @@
                   </a:tcPr>
                 </a:tc>
               </a:tr>
-              <a:tr h="786384">
+              <a:tr h="667512">
                 <a:tc>
                   <a:txBody>
                     <a:bodyPr wrap="square"/>
@@ -8613,7 +8494,7 @@
                   </a:tcPr>
                 </a:tc>
               </a:tr>
-              <a:tr h="786384">
+              <a:tr h="667512">
                 <a:tc>
                   <a:txBody>
                     <a:bodyPr wrap="square"/>
@@ -8735,7 +8616,7 @@
                   </a:tcPr>
                 </a:tc>
               </a:tr>
-              <a:tr h="786384">
+              <a:tr h="667512">
                 <a:tc>
                   <a:txBody>
                     <a:bodyPr wrap="square"/>
@@ -8857,7 +8738,7 @@
                   </a:tcPr>
                 </a:tc>
               </a:tr>
-              <a:tr h="786384">
+              <a:tr h="667512">
                 <a:tc>
                   <a:txBody>
                     <a:bodyPr wrap="square"/>
@@ -8979,7 +8860,7 @@
                   </a:tcPr>
                 </a:tc>
               </a:tr>
-              <a:tr h="786384">
+              <a:tr h="667512">
                 <a:tc>
                   <a:txBody>
                     <a:bodyPr wrap="square"/>
@@ -9101,7 +8982,7 @@
                   </a:tcPr>
                 </a:tc>
               </a:tr>
-              <a:tr h="786384">
+              <a:tr h="667512">
                 <a:tc>
                   <a:txBody>
                     <a:bodyPr wrap="square"/>
@@ -9235,17 +9116,19 @@
         </p:nvSpPr>
         <p:spPr>
           <a:xfrm>
-            <a:off x="0" y="6638544"/>
-            <a:ext cx="12191695" cy="219456"/>
+            <a:off x="329184" y="5687568"/>
+            <a:ext cx="11530584" cy="603504"/>
           </a:xfrm>
           <a:prstGeom prst="rect">
             <a:avLst/>
           </a:prstGeom>
           <a:solidFill>
-            <a:srgbClr val="E9ECF0"/>
+            <a:srgbClr val="FFFFFF"/>
           </a:solidFill>
-          <a:ln>
-            <a:noFill/>
+          <a:ln w="9525">
+            <a:solidFill>
+              <a:srgbClr val="D0D8E0"/>
+            </a:solidFill>
           </a:ln>
           <a:effectLst/>
         </p:spPr>
@@ -9279,8 +9162,8 @@
         </p:nvSpPr>
         <p:spPr>
           <a:xfrm>
-            <a:off x="0" y="6638544"/>
-            <a:ext cx="146304" cy="219456"/>
+            <a:off x="329184" y="5687568"/>
+            <a:ext cx="1188720" cy="603504"/>
           </a:xfrm>
           <a:prstGeom prst="rect">
             <a:avLst/>
@@ -9323,8 +9206,113 @@
         </p:nvSpPr>
         <p:spPr>
           <a:xfrm>
-            <a:off x="329184" y="6638544"/>
-            <a:ext cx="10058400" cy="219456"/>
+            <a:off x="329184" y="5687568"/>
+            <a:ext cx="1188720" cy="603504"/>
+          </a:xfrm>
+          <a:prstGeom prst="rect">
+            <a:avLst/>
+          </a:prstGeom>
+          <a:noFill/>
+        </p:spPr>
+        <p:txBody>
+          <a:bodyPr wrap="square" lIns="45720" rIns="45720" tIns="27432" bIns="27432" anchor="ctr"/>
+          <a:lstStyle/>
+          <a:p>
+            <a:pPr algn="ctr">
+              <a:spcBef>
+                <a:spcPts val="0"/>
+              </a:spcBef>
+              <a:spcAft>
+                <a:spcPts val="250"/>
+              </a:spcAft>
+            </a:pPr>
+            <a:r>
+              <a:rPr sz="1100" b="1" i="0">
+                <a:solidFill>
+                  <a:srgbClr val="FFFFFF"/>
+                </a:solidFill>
+                <a:latin typeface="微软雅黑"/>
+                <a:ea typeface="微软雅黑"/>
+                <a:cs typeface="微软雅黑"/>
+              </a:rPr>
+              <a:t>立项目标</a:t>
+            </a:r>
+          </a:p>
+          <a:p>
+            <a:pPr algn="ctr">
+              <a:spcBef>
+                <a:spcPts val="0"/>
+              </a:spcBef>
+              <a:spcAft>
+                <a:spcPts val="250"/>
+              </a:spcAft>
+            </a:pPr>
+            <a:r>
+              <a:rPr sz="800" b="0" i="0">
+                <a:solidFill>
+                  <a:srgbClr val="FFFFFF"/>
+                </a:solidFill>
+                <a:latin typeface="微软雅黑"/>
+                <a:ea typeface="微软雅黑"/>
+                <a:cs typeface="微软雅黑"/>
+              </a:rPr>
+              <a:t>建议值，待对齐</a:t>
+            </a:r>
+          </a:p>
+        </p:txBody>
+      </p:sp>
+      <p:sp>
+        <p:nvSpPr>
+          <p:cNvPr id="11" name="TextBox 10"/>
+          <p:cNvSpPr txBox="1"/>
+          <p:nvPr/>
+        </p:nvSpPr>
+        <p:spPr>
+          <a:xfrm>
+            <a:off x="1591056" y="5687568"/>
+            <a:ext cx="1207008" cy="603504"/>
+          </a:xfrm>
+          <a:prstGeom prst="rect">
+            <a:avLst/>
+          </a:prstGeom>
+          <a:noFill/>
+        </p:spPr>
+        <p:txBody>
+          <a:bodyPr wrap="square" lIns="45720" rIns="45720" tIns="27432" bIns="27432" anchor="ctr"/>
+          <a:lstStyle/>
+          <a:p>
+            <a:pPr algn="ctr">
+              <a:spcBef>
+                <a:spcPts val="0"/>
+              </a:spcBef>
+              <a:spcAft>
+                <a:spcPts val="250"/>
+              </a:spcAft>
+            </a:pPr>
+            <a:r>
+              <a:rPr sz="1300" b="1" i="0">
+                <a:solidFill>
+                  <a:srgbClr val="C45A10"/>
+                </a:solidFill>
+                <a:latin typeface="微软雅黑"/>
+                <a:ea typeface="微软雅黑"/>
+                <a:cs typeface="微软雅黑"/>
+              </a:rPr>
+              <a:t>≤10%</a:t>
+            </a:r>
+          </a:p>
+        </p:txBody>
+      </p:sp>
+      <p:sp>
+        <p:nvSpPr>
+          <p:cNvPr id="12" name="TextBox 11"/>
+          <p:cNvSpPr txBox="1"/>
+          <p:nvPr/>
+        </p:nvSpPr>
+        <p:spPr>
+          <a:xfrm>
+            <a:off x="2779776" y="5687568"/>
+            <a:ext cx="1341882" cy="603504"/>
           </a:xfrm>
           <a:prstGeom prst="rect">
             <a:avLst/>
@@ -9344,6 +9332,520 @@
               </a:spcAft>
             </a:pPr>
             <a:r>
+              <a:rPr sz="880" b="0" i="0">
+                <a:solidFill>
+                  <a:srgbClr val="1B2430"/>
+                </a:solidFill>
+                <a:latin typeface="微软雅黑"/>
+                <a:ea typeface="微软雅黑"/>
+                <a:cs typeface="微软雅黑"/>
+              </a:rPr>
+              <a:t>迭代时间/吞吐仿真误差（千卡实测对标）</a:t>
+            </a:r>
+          </a:p>
+        </p:txBody>
+      </p:sp>
+      <p:sp>
+        <p:nvSpPr>
+          <p:cNvPr id="13" name="Rectangle 12"/>
+          <p:cNvSpPr/>
+          <p:nvPr/>
+        </p:nvSpPr>
+        <p:spPr>
+          <a:xfrm>
+            <a:off x="4139946" y="5797296"/>
+            <a:ext cx="10972" cy="384048"/>
+          </a:xfrm>
+          <a:prstGeom prst="rect">
+            <a:avLst/>
+          </a:prstGeom>
+          <a:solidFill>
+            <a:srgbClr val="D0D8E0"/>
+          </a:solidFill>
+          <a:ln>
+            <a:noFill/>
+          </a:ln>
+          <a:effectLst/>
+        </p:spPr>
+        <p:style>
+          <a:lnRef idx="1">
+            <a:schemeClr val="accent1"/>
+          </a:lnRef>
+          <a:fillRef idx="3">
+            <a:schemeClr val="accent1"/>
+          </a:fillRef>
+          <a:effectRef idx="2">
+            <a:schemeClr val="accent1"/>
+          </a:effectRef>
+          <a:fontRef idx="minor">
+            <a:schemeClr val="lt1"/>
+          </a:fontRef>
+        </p:style>
+        <p:txBody>
+          <a:bodyPr rtlCol="0" anchor="ctr"/>
+          <a:lstStyle/>
+          <a:p>
+            <a:pPr algn="ctr"/>
+          </a:p>
+        </p:txBody>
+      </p:sp>
+      <p:sp>
+        <p:nvSpPr>
+          <p:cNvPr id="14" name="TextBox 13"/>
+          <p:cNvSpPr txBox="1"/>
+          <p:nvPr/>
+        </p:nvSpPr>
+        <p:spPr>
+          <a:xfrm>
+            <a:off x="4158234" y="5687568"/>
+            <a:ext cx="1207008" cy="603504"/>
+          </a:xfrm>
+          <a:prstGeom prst="rect">
+            <a:avLst/>
+          </a:prstGeom>
+          <a:noFill/>
+        </p:spPr>
+        <p:txBody>
+          <a:bodyPr wrap="square" lIns="45720" rIns="45720" tIns="27432" bIns="27432" anchor="ctr"/>
+          <a:lstStyle/>
+          <a:p>
+            <a:pPr algn="ctr">
+              <a:spcBef>
+                <a:spcPts val="0"/>
+              </a:spcBef>
+              <a:spcAft>
+                <a:spcPts val="250"/>
+              </a:spcAft>
+            </a:pPr>
+            <a:r>
+              <a:rPr sz="1300" b="1" i="0">
+                <a:solidFill>
+                  <a:srgbClr val="C45A10"/>
+                </a:solidFill>
+                <a:latin typeface="微软雅黑"/>
+                <a:ea typeface="微软雅黑"/>
+                <a:cs typeface="微软雅黑"/>
+              </a:rPr>
+              <a:t>1K→100K</a:t>
+            </a:r>
+          </a:p>
+        </p:txBody>
+      </p:sp>
+      <p:sp>
+        <p:nvSpPr>
+          <p:cNvPr id="15" name="TextBox 14"/>
+          <p:cNvSpPr txBox="1"/>
+          <p:nvPr/>
+        </p:nvSpPr>
+        <p:spPr>
+          <a:xfrm>
+            <a:off x="5346954" y="5687568"/>
+            <a:ext cx="1341882" cy="603504"/>
+          </a:xfrm>
+          <a:prstGeom prst="rect">
+            <a:avLst/>
+          </a:prstGeom>
+          <a:noFill/>
+        </p:spPr>
+        <p:txBody>
+          <a:bodyPr wrap="square" lIns="45720" rIns="45720" tIns="27432" bIns="27432" anchor="ctr"/>
+          <a:lstStyle/>
+          <a:p>
+            <a:pPr algn="l">
+              <a:spcBef>
+                <a:spcPts val="0"/>
+              </a:spcBef>
+              <a:spcAft>
+                <a:spcPts val="250"/>
+              </a:spcAft>
+            </a:pPr>
+            <a:r>
+              <a:rPr sz="880" b="0" i="0">
+                <a:solidFill>
+                  <a:srgbClr val="1B2430"/>
+                </a:solidFill>
+                <a:latin typeface="微软雅黑"/>
+                <a:ea typeface="微软雅黑"/>
+                <a:cs typeface="微软雅黑"/>
+              </a:rPr>
+              <a:t>千卡 Trace 外推生成十万卡负载</a:t>
+            </a:r>
+          </a:p>
+        </p:txBody>
+      </p:sp>
+      <p:sp>
+        <p:nvSpPr>
+          <p:cNvPr id="16" name="Rectangle 15"/>
+          <p:cNvSpPr/>
+          <p:nvPr/>
+        </p:nvSpPr>
+        <p:spPr>
+          <a:xfrm>
+            <a:off x="6707124" y="5797296"/>
+            <a:ext cx="10972" cy="384048"/>
+          </a:xfrm>
+          <a:prstGeom prst="rect">
+            <a:avLst/>
+          </a:prstGeom>
+          <a:solidFill>
+            <a:srgbClr val="D0D8E0"/>
+          </a:solidFill>
+          <a:ln>
+            <a:noFill/>
+          </a:ln>
+          <a:effectLst/>
+        </p:spPr>
+        <p:style>
+          <a:lnRef idx="1">
+            <a:schemeClr val="accent1"/>
+          </a:lnRef>
+          <a:fillRef idx="3">
+            <a:schemeClr val="accent1"/>
+          </a:fillRef>
+          <a:effectRef idx="2">
+            <a:schemeClr val="accent1"/>
+          </a:effectRef>
+          <a:fontRef idx="minor">
+            <a:schemeClr val="lt1"/>
+          </a:fontRef>
+        </p:style>
+        <p:txBody>
+          <a:bodyPr rtlCol="0" anchor="ctr"/>
+          <a:lstStyle/>
+          <a:p>
+            <a:pPr algn="ctr"/>
+          </a:p>
+        </p:txBody>
+      </p:sp>
+      <p:sp>
+        <p:nvSpPr>
+          <p:cNvPr id="17" name="TextBox 16"/>
+          <p:cNvSpPr txBox="1"/>
+          <p:nvPr/>
+        </p:nvSpPr>
+        <p:spPr>
+          <a:xfrm>
+            <a:off x="6725412" y="5687568"/>
+            <a:ext cx="1207008" cy="603504"/>
+          </a:xfrm>
+          <a:prstGeom prst="rect">
+            <a:avLst/>
+          </a:prstGeom>
+          <a:noFill/>
+        </p:spPr>
+        <p:txBody>
+          <a:bodyPr wrap="square" lIns="45720" rIns="45720" tIns="27432" bIns="27432" anchor="ctr"/>
+          <a:lstStyle/>
+          <a:p>
+            <a:pPr algn="ctr">
+              <a:spcBef>
+                <a:spcPts val="0"/>
+              </a:spcBef>
+              <a:spcAft>
+                <a:spcPts val="250"/>
+              </a:spcAft>
+            </a:pPr>
+            <a:r>
+              <a:rPr sz="1300" b="1" i="0">
+                <a:solidFill>
+                  <a:srgbClr val="C45A10"/>
+                </a:solidFill>
+                <a:latin typeface="微软雅黑"/>
+                <a:ea typeface="微软雅黑"/>
+                <a:cs typeface="微软雅黑"/>
+              </a:rPr>
+              <a:t>6类·30+</a:t>
+            </a:r>
+          </a:p>
+        </p:txBody>
+      </p:sp>
+      <p:sp>
+        <p:nvSpPr>
+          <p:cNvPr id="18" name="TextBox 17"/>
+          <p:cNvSpPr txBox="1"/>
+          <p:nvPr/>
+        </p:nvSpPr>
+        <p:spPr>
+          <a:xfrm>
+            <a:off x="7914132" y="5687568"/>
+            <a:ext cx="1341882" cy="603504"/>
+          </a:xfrm>
+          <a:prstGeom prst="rect">
+            <a:avLst/>
+          </a:prstGeom>
+          <a:noFill/>
+        </p:spPr>
+        <p:txBody>
+          <a:bodyPr wrap="square" lIns="45720" rIns="45720" tIns="27432" bIns="27432" anchor="ctr"/>
+          <a:lstStyle/>
+          <a:p>
+            <a:pPr algn="l">
+              <a:spcBef>
+                <a:spcPts val="0"/>
+              </a:spcBef>
+              <a:spcAft>
+                <a:spcPts val="250"/>
+              </a:spcAft>
+            </a:pPr>
+            <a:r>
+              <a:rPr sz="880" b="0" i="0">
+                <a:solidFill>
+                  <a:srgbClr val="1B2430"/>
+                </a:solidFill>
+                <a:latin typeface="微软雅黑"/>
+                <a:ea typeface="微软雅黑"/>
+                <a:cs typeface="微软雅黑"/>
+              </a:rPr>
+              <a:t>场景类别 · 版本化标准负载</a:t>
+            </a:r>
+          </a:p>
+        </p:txBody>
+      </p:sp>
+      <p:sp>
+        <p:nvSpPr>
+          <p:cNvPr id="19" name="Rectangle 18"/>
+          <p:cNvSpPr/>
+          <p:nvPr/>
+        </p:nvSpPr>
+        <p:spPr>
+          <a:xfrm>
+            <a:off x="9274302" y="5797296"/>
+            <a:ext cx="10972" cy="384048"/>
+          </a:xfrm>
+          <a:prstGeom prst="rect">
+            <a:avLst/>
+          </a:prstGeom>
+          <a:solidFill>
+            <a:srgbClr val="D0D8E0"/>
+          </a:solidFill>
+          <a:ln>
+            <a:noFill/>
+          </a:ln>
+          <a:effectLst/>
+        </p:spPr>
+        <p:style>
+          <a:lnRef idx="1">
+            <a:schemeClr val="accent1"/>
+          </a:lnRef>
+          <a:fillRef idx="3">
+            <a:schemeClr val="accent1"/>
+          </a:fillRef>
+          <a:effectRef idx="2">
+            <a:schemeClr val="accent1"/>
+          </a:effectRef>
+          <a:fontRef idx="minor">
+            <a:schemeClr val="lt1"/>
+          </a:fontRef>
+        </p:style>
+        <p:txBody>
+          <a:bodyPr rtlCol="0" anchor="ctr"/>
+          <a:lstStyle/>
+          <a:p>
+            <a:pPr algn="ctr"/>
+          </a:p>
+        </p:txBody>
+      </p:sp>
+      <p:sp>
+        <p:nvSpPr>
+          <p:cNvPr id="20" name="TextBox 19"/>
+          <p:cNvSpPr txBox="1"/>
+          <p:nvPr/>
+        </p:nvSpPr>
+        <p:spPr>
+          <a:xfrm>
+            <a:off x="9292590" y="5687568"/>
+            <a:ext cx="1207008" cy="603504"/>
+          </a:xfrm>
+          <a:prstGeom prst="rect">
+            <a:avLst/>
+          </a:prstGeom>
+          <a:noFill/>
+        </p:spPr>
+        <p:txBody>
+          <a:bodyPr wrap="square" lIns="45720" rIns="45720" tIns="27432" bIns="27432" anchor="ctr"/>
+          <a:lstStyle/>
+          <a:p>
+            <a:pPr algn="ctr">
+              <a:spcBef>
+                <a:spcPts val="0"/>
+              </a:spcBef>
+              <a:spcAft>
+                <a:spcPts val="250"/>
+              </a:spcAft>
+            </a:pPr>
+            <a:r>
+              <a:rPr sz="1300" b="1" i="0">
+                <a:solidFill>
+                  <a:srgbClr val="C45A10"/>
+                </a:solidFill>
+                <a:latin typeface="微软雅黑"/>
+                <a:ea typeface="微软雅黑"/>
+                <a:cs typeface="微软雅黑"/>
+              </a:rPr>
+              <a:t>≥1000</a:t>
+            </a:r>
+          </a:p>
+        </p:txBody>
+      </p:sp>
+      <p:sp>
+        <p:nvSpPr>
+          <p:cNvPr id="21" name="TextBox 20"/>
+          <p:cNvSpPr txBox="1"/>
+          <p:nvPr/>
+        </p:nvSpPr>
+        <p:spPr>
+          <a:xfrm>
+            <a:off x="10481310" y="5687568"/>
+            <a:ext cx="1341882" cy="603504"/>
+          </a:xfrm>
+          <a:prstGeom prst="rect">
+            <a:avLst/>
+          </a:prstGeom>
+          <a:noFill/>
+        </p:spPr>
+        <p:txBody>
+          <a:bodyPr wrap="square" lIns="45720" rIns="45720" tIns="27432" bIns="27432" anchor="ctr"/>
+          <a:lstStyle/>
+          <a:p>
+            <a:pPr algn="l">
+              <a:spcBef>
+                <a:spcPts val="0"/>
+              </a:spcBef>
+              <a:spcAft>
+                <a:spcPts val="250"/>
+              </a:spcAft>
+            </a:pPr>
+            <a:r>
+              <a:rPr sz="880" b="0" i="0">
+                <a:solidFill>
+                  <a:srgbClr val="1B2430"/>
+                </a:solidFill>
+                <a:latin typeface="微软雅黑"/>
+                <a:ea typeface="微软雅黑"/>
+                <a:cs typeface="微软雅黑"/>
+              </a:rPr>
+              <a:t>配置/轮批量 DSE；解析级分钟、包级小时</a:t>
+            </a:r>
+          </a:p>
+        </p:txBody>
+      </p:sp>
+      <p:sp>
+        <p:nvSpPr>
+          <p:cNvPr id="22" name="Rectangle 21"/>
+          <p:cNvSpPr/>
+          <p:nvPr/>
+        </p:nvSpPr>
+        <p:spPr>
+          <a:xfrm>
+            <a:off x="0" y="6638544"/>
+            <a:ext cx="12191695" cy="219456"/>
+          </a:xfrm>
+          <a:prstGeom prst="rect">
+            <a:avLst/>
+          </a:prstGeom>
+          <a:solidFill>
+            <a:srgbClr val="E9ECF0"/>
+          </a:solidFill>
+          <a:ln>
+            <a:noFill/>
+          </a:ln>
+          <a:effectLst/>
+        </p:spPr>
+        <p:style>
+          <a:lnRef idx="1">
+            <a:schemeClr val="accent1"/>
+          </a:lnRef>
+          <a:fillRef idx="3">
+            <a:schemeClr val="accent1"/>
+          </a:fillRef>
+          <a:effectRef idx="2">
+            <a:schemeClr val="accent1"/>
+          </a:effectRef>
+          <a:fontRef idx="minor">
+            <a:schemeClr val="lt1"/>
+          </a:fontRef>
+        </p:style>
+        <p:txBody>
+          <a:bodyPr rtlCol="0" anchor="ctr"/>
+          <a:lstStyle/>
+          <a:p>
+            <a:pPr algn="ctr"/>
+          </a:p>
+        </p:txBody>
+      </p:sp>
+      <p:sp>
+        <p:nvSpPr>
+          <p:cNvPr id="23" name="Rectangle 22"/>
+          <p:cNvSpPr/>
+          <p:nvPr/>
+        </p:nvSpPr>
+        <p:spPr>
+          <a:xfrm>
+            <a:off x="0" y="6638544"/>
+            <a:ext cx="146304" cy="219456"/>
+          </a:xfrm>
+          <a:prstGeom prst="rect">
+            <a:avLst/>
+          </a:prstGeom>
+          <a:solidFill>
+            <a:srgbClr val="1A5FA8"/>
+          </a:solidFill>
+          <a:ln>
+            <a:noFill/>
+          </a:ln>
+          <a:effectLst/>
+        </p:spPr>
+        <p:style>
+          <a:lnRef idx="1">
+            <a:schemeClr val="accent1"/>
+          </a:lnRef>
+          <a:fillRef idx="3">
+            <a:schemeClr val="accent1"/>
+          </a:fillRef>
+          <a:effectRef idx="2">
+            <a:schemeClr val="accent1"/>
+          </a:effectRef>
+          <a:fontRef idx="minor">
+            <a:schemeClr val="lt1"/>
+          </a:fontRef>
+        </p:style>
+        <p:txBody>
+          <a:bodyPr rtlCol="0" anchor="ctr"/>
+          <a:lstStyle/>
+          <a:p>
+            <a:pPr algn="ctr"/>
+          </a:p>
+        </p:txBody>
+      </p:sp>
+      <p:sp>
+        <p:nvSpPr>
+          <p:cNvPr id="24" name="TextBox 23"/>
+          <p:cNvSpPr txBox="1"/>
+          <p:nvPr/>
+        </p:nvSpPr>
+        <p:spPr>
+          <a:xfrm>
+            <a:off x="329184" y="6638544"/>
+            <a:ext cx="10058400" cy="219456"/>
+          </a:xfrm>
+          <a:prstGeom prst="rect">
+            <a:avLst/>
+          </a:prstGeom>
+          <a:noFill/>
+        </p:spPr>
+        <p:txBody>
+          <a:bodyPr wrap="square" lIns="45720" rIns="45720" tIns="27432" bIns="27432" anchor="ctr"/>
+          <a:lstStyle/>
+          <a:p>
+            <a:pPr algn="l">
+              <a:spcBef>
+                <a:spcPts val="0"/>
+              </a:spcBef>
+              <a:spcAft>
+                <a:spcPts val="250"/>
+              </a:spcAft>
+            </a:pPr>
+            <a:r>
               <a:rPr sz="850" b="0" i="0">
                 <a:solidFill>
                   <a:srgbClr val="7A8896"/>
@@ -9359,7 +9861,7 @@
       </p:sp>
       <p:sp>
         <p:nvSpPr>
-          <p:cNvPr id="11" name="TextBox 10"/>
+          <p:cNvPr id="25" name="TextBox 24"/>
           <p:cNvSpPr txBox="1"/>
           <p:nvPr/>
         </p:nvSpPr>
